--- a/Boek 2 - Kosten, opbrengsten, elasticiteit en surplus/edities/chat-2026/bronnen/H2/paragrafen/2.2.1 Prijselasticiteit/2.2.1 Prijselasticiteit – presentatie.pptx
+++ b/Boek 2 - Kosten, opbrengsten, elasticiteit en surplus/edities/chat-2026/bronnen/H2/paragrafen/2.2.1 Prijselasticiteit/2.2.1 Prijselasticiteit – presentatie.pptx
@@ -2,36 +2,36 @@
 <file path=ppt/presentation.xml><?xml version="1.0" encoding="utf-8"?>
 <p:presentation xmlns:p="http://schemas.openxmlformats.org/presentationml/2006/main">
   <p:sldMasterIdLst>
-    <p:sldMasterId xmlns:r="http://schemas.openxmlformats.org/officeDocument/2006/relationships" id="2147483648" r:id="Rded182840a5a4b71"/>
+    <p:sldMasterId xmlns:r="http://schemas.openxmlformats.org/officeDocument/2006/relationships" id="2147483648" r:id="R7b3e2ab609b64021"/>
   </p:sldMasterIdLst>
   <p:notesMasterIdLst>
-    <p:notesMasterId xmlns:r="http://schemas.openxmlformats.org/officeDocument/2006/relationships" r:id="R0b12d0dbdfc34ad3"/>
+    <p:notesMasterId xmlns:r="http://schemas.openxmlformats.org/officeDocument/2006/relationships" r:id="R4d90dd2b53bc4774"/>
   </p:notesMasterIdLst>
   <p:sldIdLst>
-    <p:sldId xmlns:r="http://schemas.openxmlformats.org/officeDocument/2006/relationships" id="256" r:id="R6ece014317384b36"/>
-    <p:sldId xmlns:r="http://schemas.openxmlformats.org/officeDocument/2006/relationships" id="257" r:id="R86b01eb0f3e44396"/>
-    <p:sldId xmlns:r="http://schemas.openxmlformats.org/officeDocument/2006/relationships" id="258" r:id="R28b2c25df62d4716"/>
-    <p:sldId xmlns:r="http://schemas.openxmlformats.org/officeDocument/2006/relationships" id="259" r:id="R7fc458039923434c"/>
-    <p:sldId xmlns:r="http://schemas.openxmlformats.org/officeDocument/2006/relationships" id="260" r:id="Rcec423f604c140fc"/>
-    <p:sldId xmlns:r="http://schemas.openxmlformats.org/officeDocument/2006/relationships" id="261" r:id="R04de28110ef6446b"/>
-    <p:sldId xmlns:r="http://schemas.openxmlformats.org/officeDocument/2006/relationships" id="262" r:id="Rbc4b8a5386554054"/>
-    <p:sldId xmlns:r="http://schemas.openxmlformats.org/officeDocument/2006/relationships" id="263" r:id="Ra2e85350e87f4e2b"/>
-    <p:sldId xmlns:r="http://schemas.openxmlformats.org/officeDocument/2006/relationships" id="264" r:id="R479e0407c90d4d9e"/>
-    <p:sldId xmlns:r="http://schemas.openxmlformats.org/officeDocument/2006/relationships" id="265" r:id="Reec23529c41d4827"/>
-    <p:sldId xmlns:r="http://schemas.openxmlformats.org/officeDocument/2006/relationships" id="266" r:id="R0bf8edc7e2cf4812"/>
-    <p:sldId xmlns:r="http://schemas.openxmlformats.org/officeDocument/2006/relationships" id="267" r:id="R6b48e2d8527f4f53"/>
-    <p:sldId xmlns:r="http://schemas.openxmlformats.org/officeDocument/2006/relationships" id="268" r:id="R2b347820179a434c"/>
-    <p:sldId xmlns:r="http://schemas.openxmlformats.org/officeDocument/2006/relationships" id="269" r:id="R0f17d693f7ad48bf"/>
-    <p:sldId xmlns:r="http://schemas.openxmlformats.org/officeDocument/2006/relationships" id="270" r:id="Re422e50754c3427b"/>
-    <p:sldId xmlns:r="http://schemas.openxmlformats.org/officeDocument/2006/relationships" id="271" r:id="R43c91981130d4e88"/>
-    <p:sldId xmlns:r="http://schemas.openxmlformats.org/officeDocument/2006/relationships" id="272" r:id="R69f17fa6eee24993"/>
-    <p:sldId xmlns:r="http://schemas.openxmlformats.org/officeDocument/2006/relationships" id="273" r:id="Rc0a5283a780d454e"/>
-    <p:sldId xmlns:r="http://schemas.openxmlformats.org/officeDocument/2006/relationships" id="274" r:id="R92ef532a21da4e1e"/>
-    <p:sldId xmlns:r="http://schemas.openxmlformats.org/officeDocument/2006/relationships" id="275" r:id="R75c330da291541bf"/>
-    <p:sldId xmlns:r="http://schemas.openxmlformats.org/officeDocument/2006/relationships" id="276" r:id="Rd80ecb86c39d418f"/>
-    <p:sldId xmlns:r="http://schemas.openxmlformats.org/officeDocument/2006/relationships" id="277" r:id="Rabb9647cf76d4c24"/>
-    <p:sldId xmlns:r="http://schemas.openxmlformats.org/officeDocument/2006/relationships" id="278" r:id="R94b7233679024c06"/>
-    <p:sldId xmlns:r="http://schemas.openxmlformats.org/officeDocument/2006/relationships" id="279" r:id="R3b52cf9ca4a44b83"/>
+    <p:sldId xmlns:r="http://schemas.openxmlformats.org/officeDocument/2006/relationships" id="256" r:id="R1405ba2aa5714f41"/>
+    <p:sldId xmlns:r="http://schemas.openxmlformats.org/officeDocument/2006/relationships" id="257" r:id="R28f51640966c40b8"/>
+    <p:sldId xmlns:r="http://schemas.openxmlformats.org/officeDocument/2006/relationships" id="258" r:id="Rb1ef57512fc740cb"/>
+    <p:sldId xmlns:r="http://schemas.openxmlformats.org/officeDocument/2006/relationships" id="259" r:id="Rde82ec50bd364c25"/>
+    <p:sldId xmlns:r="http://schemas.openxmlformats.org/officeDocument/2006/relationships" id="260" r:id="Re82227c176b24646"/>
+    <p:sldId xmlns:r="http://schemas.openxmlformats.org/officeDocument/2006/relationships" id="261" r:id="R14f739450b8644be"/>
+    <p:sldId xmlns:r="http://schemas.openxmlformats.org/officeDocument/2006/relationships" id="262" r:id="R0b8772221f344ec3"/>
+    <p:sldId xmlns:r="http://schemas.openxmlformats.org/officeDocument/2006/relationships" id="263" r:id="R0634f734e95d447e"/>
+    <p:sldId xmlns:r="http://schemas.openxmlformats.org/officeDocument/2006/relationships" id="264" r:id="R38f2ba92291c4852"/>
+    <p:sldId xmlns:r="http://schemas.openxmlformats.org/officeDocument/2006/relationships" id="265" r:id="R4e6eacfaf2a84002"/>
+    <p:sldId xmlns:r="http://schemas.openxmlformats.org/officeDocument/2006/relationships" id="266" r:id="R74f2a9d9b0b24f52"/>
+    <p:sldId xmlns:r="http://schemas.openxmlformats.org/officeDocument/2006/relationships" id="267" r:id="R17bcefbbb2d6450a"/>
+    <p:sldId xmlns:r="http://schemas.openxmlformats.org/officeDocument/2006/relationships" id="268" r:id="Rfad22e55dd584b2c"/>
+    <p:sldId xmlns:r="http://schemas.openxmlformats.org/officeDocument/2006/relationships" id="269" r:id="R0c6c56dcd1644c9b"/>
+    <p:sldId xmlns:r="http://schemas.openxmlformats.org/officeDocument/2006/relationships" id="270" r:id="Rd66807f743274f57"/>
+    <p:sldId xmlns:r="http://schemas.openxmlformats.org/officeDocument/2006/relationships" id="271" r:id="Rd93bed0081fa48f7"/>
+    <p:sldId xmlns:r="http://schemas.openxmlformats.org/officeDocument/2006/relationships" id="272" r:id="Ra35abf56570f459f"/>
+    <p:sldId xmlns:r="http://schemas.openxmlformats.org/officeDocument/2006/relationships" id="273" r:id="R99915aa7509f4c83"/>
+    <p:sldId xmlns:r="http://schemas.openxmlformats.org/officeDocument/2006/relationships" id="274" r:id="Rac66e84d0dca4ec9"/>
+    <p:sldId xmlns:r="http://schemas.openxmlformats.org/officeDocument/2006/relationships" id="275" r:id="R376754b95da24dfd"/>
+    <p:sldId xmlns:r="http://schemas.openxmlformats.org/officeDocument/2006/relationships" id="276" r:id="Rdf0b63bd64fd4890"/>
+    <p:sldId xmlns:r="http://schemas.openxmlformats.org/officeDocument/2006/relationships" id="277" r:id="R209f9a5dc76e4af2"/>
+    <p:sldId xmlns:r="http://schemas.openxmlformats.org/officeDocument/2006/relationships" id="278" r:id="Rdac21e607afc4af6"/>
+    <p:sldId xmlns:r="http://schemas.openxmlformats.org/officeDocument/2006/relationships" id="279" r:id="R3828757e97c74dc1"/>
   </p:sldIdLst>
   <p:sldSz cx="15240000" cy="8572500"/>
   <p:notesSz cx="6858000" cy="9144000"/>
@@ -478,7 +478,7 @@
           <a:p xmlns:a="http://schemas.openxmlformats.org/drawingml/2006/main">
             <a:r>
               <a:rPr sz="1400"/>
-              <a:t>Uitleg: Laat deze dia staan tijdens startopdracht. Start 1–2 staat op p. 40. Opgave 1 haalt procenten uit Boek 1 §1.1.2 op. Opgave 2 vraagt nieuwe formele kennis: Ev indelen en relatieve sterkte vergelijken. Laat leerlingen hiervoor de tabel en uitleg op p. 38 raadplegen. Dit is ondersteund verkennen, geen toets van al beheerste stof. Keer na de uitleg expliciet terug naar opgave 2 (dia 12) vóór zelfstandig werk. Basis 3 staat op p. 40, basis 4 en zelfstandig 5–6 op p. 41; doel 7 op p. 42. Huiswerk: 3, 4, 5, 6 en 7 maken en nakijken. Bonus 8 en herhaling 9–10 zijn extra. De gehele route is niet als één les van 55 minuten begroot.</a:t>
+              <a:t>Uitleg: Laat deze dia staan tijdens startopdracht. Start 1–2 staat op p. 41. Opgave 1 haalt procenten uit Boek 1 §1.1.2 op. Opgave 2 vraagt nieuwe formele kennis: Ev indelen en relatieve sterkte vergelijken. Laat leerlingen hiervoor de tabel en uitleg op p. 39 raadplegen. Dit is ondersteund verkennen, geen toets van al beheerste stof. Keer na de uitleg expliciet terug naar opgave 2 (dia 12) vóór zelfstandig werk. Basis 3 staat op p. 41, basis 4 en zelfstandig 5–6 op p. 42; doel 7 op p. 43. Huiswerk: 3, 4, 5, 6 en 7 maken en nakijken. Bonus 8 en herhaling 9–10 zijn extra. De gehele route is niet als één les van 55 minuten begroot.</a:t>
             </a:r>
           </a:p>
           <a:p xmlns:a="http://schemas.openxmlformats.org/drawingml/2006/main">
@@ -514,25 +514,25 @@
           <a:p xmlns:a="http://schemas.openxmlformats.org/drawingml/2006/main">
             <a:r>
               <a:rPr sz="1400"/>
-              <a:t>Bron: Boek 2, chatuitgave 2026, revisie 21 september 2026. Leerlingenboek, gedrukte pagina 38, 40–42.</a:t>
-            </a:r>
-          </a:p>
-          <a:p xmlns:a="http://schemas.openxmlformats.org/drawingml/2006/main">
-            <a:r>
-              <a:rPr sz="1400"/>
-              <a:t>https://github.com/meijer1973/4veco-lessen/blob/f2660032cf7e4e3bbab96cf32863d06a38bd74bc/Boek%202%20-%20Kosten%2C%20opbrengsten%2C%20elasticiteit%20en%20surplus/edities/chat-2026/boek/Boek_2_Compleet.pdf</a:t>
-            </a:r>
-          </a:p>
-          <a:p xmlns:a="http://schemas.openxmlformats.org/drawingml/2006/main">
-            <a:r>
-              <a:rPr sz="1400"/>
-              <a:t>Antwoordmodel: https://github.com/meijer1973/4veco-lessen/blob/f2660032cf7e4e3bbab96cf32863d06a38bd74bc/Boek%202%20-%20Kosten%2C%20opbrengsten%2C%20elasticiteit%20en%20surplus/edities/chat-2026/bronnen/H2/2.2%20Elasticiteit%20%E2%80%93%20antwoorden.md</a:t>
-            </a:r>
-          </a:p>
-          <a:p xmlns:a="http://schemas.openxmlformats.org/drawingml/2006/main">
-            <a:r>
-              <a:rPr sz="1400"/>
-              <a:t>Voorkennisbron: Boek 1 §1.1.2, Theorie / Procentuele verandering. Nieuwe begripskennis: Boek 2 p. 38. Ondersteuning en opdrachten zijn in alle drie overzichten gelijk.</a:t>
+              <a:t>Bron: Boek 2, chatuitgave 2026, revisie 1 oktober 2026. Leerlingenboek, gedrukte pagina 39, 41–43.</a:t>
+            </a:r>
+          </a:p>
+          <a:p xmlns:a="http://schemas.openxmlformats.org/drawingml/2006/main">
+            <a:r>
+              <a:rPr sz="1400"/>
+              <a:t>https://github.com/meijer1973/4veco-lessen/blob/a8940a7a79e22857a3e306a91fe923c48c63e716/Boek%202%20-%20Kosten%2C%20opbrengsten%2C%20elasticiteit%20en%20surplus/edities/chat-2026/boek/Boek_2_Compleet.pdf</a:t>
+            </a:r>
+          </a:p>
+          <a:p xmlns:a="http://schemas.openxmlformats.org/drawingml/2006/main">
+            <a:r>
+              <a:rPr sz="1400"/>
+              <a:t>Antwoordmodel: https://github.com/meijer1973/4veco-lessen/blob/a8940a7a79e22857a3e306a91fe923c48c63e716/Boek%202%20-%20Kosten%2C%20opbrengsten%2C%20elasticiteit%20en%20surplus/edities/chat-2026/bronnen/H2/2.2%20Elasticiteit%20%E2%80%93%20antwoorden.md</a:t>
+            </a:r>
+          </a:p>
+          <a:p xmlns:a="http://schemas.openxmlformats.org/drawingml/2006/main">
+            <a:r>
+              <a:rPr sz="1400"/>
+              <a:t>Voorkennisbron: Boek 1 §1.1.2, Theorie / Procentuele verandering. Nieuwe begripskennis: Boek 2 p. 39. Ondersteuning en opdrachten zijn in alle drie overzichten gelijk.</a:t>
             </a:r>
           </a:p>
         </p:txBody>
@@ -651,19 +651,19 @@
           <a:p xmlns:a="http://schemas.openxmlformats.org/drawingml/2006/main">
             <a:r>
               <a:rPr sz="1400"/>
-              <a:t>Bron: Boek 2, chatuitgave 2026, revisie 21 september 2026. Dit is een afzonderlijk, door de presentatiemaker bedacht uitlegvoorbeeld met eigen context en gegevens. Het komt niet uit een boekopgave. Het boek is alleen de bron voor de methode (p. 37–38).</a:t>
-            </a:r>
-          </a:p>
-          <a:p xmlns:a="http://schemas.openxmlformats.org/drawingml/2006/main">
-            <a:r>
-              <a:rPr sz="1400"/>
-              <a:t>https://github.com/meijer1973/4veco-lessen/blob/f2660032cf7e4e3bbab96cf32863d06a38bd74bc/Boek%202%20-%20Kosten%2C%20opbrengsten%2C%20elasticiteit%20en%20surplus/edities/chat-2026/boek/Boek_2_Compleet.pdf</a:t>
-            </a:r>
-          </a:p>
-          <a:p xmlns:a="http://schemas.openxmlformats.org/drawingml/2006/main">
-            <a:r>
-              <a:rPr sz="1400"/>
-              <a:t>Antwoordmodel: https://github.com/meijer1973/4veco-lessen/blob/f2660032cf7e4e3bbab96cf32863d06a38bd74bc/Boek%202%20-%20Kosten%2C%20opbrengsten%2C%20elasticiteit%20en%20surplus/edities/chat-2026/bronnen/H2/2.2%20Elasticiteit%20%E2%80%93%20antwoorden.md</a:t>
+              <a:t>Bron: Boek 2, chatuitgave 2026, revisie 1 oktober 2026. Dit is een afzonderlijk, door de presentatiemaker bedacht uitlegvoorbeeld met eigen context en gegevens. Het komt niet uit een boekopgave. Het boek is alleen de bron voor de methode (p. 38–39).</a:t>
+            </a:r>
+          </a:p>
+          <a:p xmlns:a="http://schemas.openxmlformats.org/drawingml/2006/main">
+            <a:r>
+              <a:rPr sz="1400"/>
+              <a:t>https://github.com/meijer1973/4veco-lessen/blob/a8940a7a79e22857a3e306a91fe923c48c63e716/Boek%202%20-%20Kosten%2C%20opbrengsten%2C%20elasticiteit%20en%20surplus/edities/chat-2026/boek/Boek_2_Compleet.pdf</a:t>
+            </a:r>
+          </a:p>
+          <a:p xmlns:a="http://schemas.openxmlformats.org/drawingml/2006/main">
+            <a:r>
+              <a:rPr sz="1400"/>
+              <a:t>Antwoordmodel: https://github.com/meijer1973/4veco-lessen/blob/a8940a7a79e22857a3e306a91fe923c48c63e716/Boek%202%20-%20Kosten%2C%20opbrengsten%2C%20elasticiteit%20en%20surplus/edities/chat-2026/bronnen/H2/2.2%20Elasticiteit%20%E2%80%93%20antwoorden.md</a:t>
             </a:r>
           </a:p>
           <a:p xmlns:a="http://schemas.openxmlformats.org/drawingml/2006/main">
@@ -788,19 +788,19 @@
           <a:p xmlns:a="http://schemas.openxmlformats.org/drawingml/2006/main">
             <a:r>
               <a:rPr sz="1400"/>
-              <a:t>Bron: Boek 2, chatuitgave 2026, revisie 21 september 2026. Dit is een afzonderlijk, door de presentatiemaker bedacht uitlegvoorbeeld met eigen context en gegevens. Het komt niet uit een boekopgave. Het boek is alleen de bron voor de methode (p. 37–38).</a:t>
-            </a:r>
-          </a:p>
-          <a:p xmlns:a="http://schemas.openxmlformats.org/drawingml/2006/main">
-            <a:r>
-              <a:rPr sz="1400"/>
-              <a:t>https://github.com/meijer1973/4veco-lessen/blob/f2660032cf7e4e3bbab96cf32863d06a38bd74bc/Boek%202%20-%20Kosten%2C%20opbrengsten%2C%20elasticiteit%20en%20surplus/edities/chat-2026/boek/Boek_2_Compleet.pdf</a:t>
-            </a:r>
-          </a:p>
-          <a:p xmlns:a="http://schemas.openxmlformats.org/drawingml/2006/main">
-            <a:r>
-              <a:rPr sz="1400"/>
-              <a:t>Antwoordmodel: https://github.com/meijer1973/4veco-lessen/blob/f2660032cf7e4e3bbab96cf32863d06a38bd74bc/Boek%202%20-%20Kosten%2C%20opbrengsten%2C%20elasticiteit%20en%20surplus/edities/chat-2026/bronnen/H2/2.2%20Elasticiteit%20%E2%80%93%20antwoorden.md</a:t>
+              <a:t>Bron: Boek 2, chatuitgave 2026, revisie 1 oktober 2026. Dit is een afzonderlijk, door de presentatiemaker bedacht uitlegvoorbeeld met eigen context en gegevens. Het komt niet uit een boekopgave. Het boek is alleen de bron voor de methode (p. 38–39).</a:t>
+            </a:r>
+          </a:p>
+          <a:p xmlns:a="http://schemas.openxmlformats.org/drawingml/2006/main">
+            <a:r>
+              <a:rPr sz="1400"/>
+              <a:t>https://github.com/meijer1973/4veco-lessen/blob/a8940a7a79e22857a3e306a91fe923c48c63e716/Boek%202%20-%20Kosten%2C%20opbrengsten%2C%20elasticiteit%20en%20surplus/edities/chat-2026/boek/Boek_2_Compleet.pdf</a:t>
+            </a:r>
+          </a:p>
+          <a:p xmlns:a="http://schemas.openxmlformats.org/drawingml/2006/main">
+            <a:r>
+              <a:rPr sz="1400"/>
+              <a:t>Antwoordmodel: https://github.com/meijer1973/4veco-lessen/blob/a8940a7a79e22857a3e306a91fe923c48c63e716/Boek%202%20-%20Kosten%2C%20opbrengsten%2C%20elasticiteit%20en%20surplus/edities/chat-2026/bronnen/H2/2.2%20Elasticiteit%20%E2%80%93%20antwoorden.md</a:t>
             </a:r>
           </a:p>
           <a:p xmlns:a="http://schemas.openxmlformats.org/drawingml/2006/main">
@@ -889,7 +889,7 @@
           <a:p xmlns:a="http://schemas.openxmlformats.org/drawingml/2006/main">
             <a:r>
               <a:rPr sz="1400"/>
-              <a:t>Uitleg: Dit is feedback op de eerder met het boek verkende startopgave, na het afzonderlijke uitlegvoorbeeld. Laat eerst leerlingen antwoorden, eventueel met de indeling op p. 38. 2a: −1 &lt; −0,4 &lt; 0, dus prijsinelastisch. 2b: bij −2 reageert Qv procentueel sterker dan bij −0,4, namelijk 2 maal tegenover 0,4 maal de procentuele prijsverandering. Verbind het teken aan de richting en de verhouding aan de sterkte. Laat iedereen zijn eerste antwoord aanpassen vóór zelfstandig werk.</a:t>
+              <a:t>Uitleg: Dit is feedback op de eerder met het boek verkende startopgave, na het afzonderlijke uitlegvoorbeeld. Laat eerst leerlingen antwoorden, eventueel met de indeling op p. 39. 2a: −1 &lt; −0,4 &lt; 0, dus prijsinelastisch. 2b: bij −2 reageert Qv procentueel sterker dan bij −0,4, namelijk 2 maal tegenover 0,4 maal de procentuele prijsverandering. Verbind het teken aan de richting en de verhouding aan de sterkte. Laat iedereen zijn eerste antwoord aanpassen vóór zelfstandig werk.</a:t>
             </a:r>
           </a:p>
           <a:p xmlns:a="http://schemas.openxmlformats.org/drawingml/2006/main">
@@ -925,19 +925,19 @@
           <a:p xmlns:a="http://schemas.openxmlformats.org/drawingml/2006/main">
             <a:r>
               <a:rPr sz="1400"/>
-              <a:t>Bron: Boek 2, chatuitgave 2026, revisie 21 september 2026. Leerlingenboek, gedrukte pagina 38, 40.</a:t>
-            </a:r>
-          </a:p>
-          <a:p xmlns:a="http://schemas.openxmlformats.org/drawingml/2006/main">
-            <a:r>
-              <a:rPr sz="1400"/>
-              <a:t>https://github.com/meijer1973/4veco-lessen/blob/f2660032cf7e4e3bbab96cf32863d06a38bd74bc/Boek%202%20-%20Kosten%2C%20opbrengsten%2C%20elasticiteit%20en%20surplus/edities/chat-2026/boek/Boek_2_Compleet.pdf</a:t>
-            </a:r>
-          </a:p>
-          <a:p xmlns:a="http://schemas.openxmlformats.org/drawingml/2006/main">
-            <a:r>
-              <a:rPr sz="1400"/>
-              <a:t>Antwoordmodel: https://github.com/meijer1973/4veco-lessen/blob/f2660032cf7e4e3bbab96cf32863d06a38bd74bc/Boek%202%20-%20Kosten%2C%20opbrengsten%2C%20elasticiteit%20en%20surplus/edities/chat-2026/bronnen/H2/2.2%20Elasticiteit%20%E2%80%93%20antwoorden.md</a:t>
+              <a:t>Bron: Boek 2, chatuitgave 2026, revisie 1 oktober 2026. Leerlingenboek, gedrukte pagina 39, 41.</a:t>
+            </a:r>
+          </a:p>
+          <a:p xmlns:a="http://schemas.openxmlformats.org/drawingml/2006/main">
+            <a:r>
+              <a:rPr sz="1400"/>
+              <a:t>https://github.com/meijer1973/4veco-lessen/blob/a8940a7a79e22857a3e306a91fe923c48c63e716/Boek%202%20-%20Kosten%2C%20opbrengsten%2C%20elasticiteit%20en%20surplus/edities/chat-2026/boek/Boek_2_Compleet.pdf</a:t>
+            </a:r>
+          </a:p>
+          <a:p xmlns:a="http://schemas.openxmlformats.org/drawingml/2006/main">
+            <a:r>
+              <a:rPr sz="1400"/>
+              <a:t>Antwoordmodel: https://github.com/meijer1973/4veco-lessen/blob/a8940a7a79e22857a3e306a91fe923c48c63e716/Boek%202%20-%20Kosten%2C%20opbrengsten%2C%20elasticiteit%20en%20surplus/edities/chat-2026/bronnen/H2/2.2%20Elasticiteit%20%E2%80%93%20antwoorden.md</a:t>
             </a:r>
           </a:p>
           <a:p xmlns:a="http://schemas.openxmlformats.org/drawingml/2006/main">
@@ -1026,7 +1026,7 @@
           <a:p xmlns:a="http://schemas.openxmlformats.org/drawingml/2006/main">
             <a:r>
               <a:rPr sz="1400"/>
-              <a:t>Uitleg: Laat deze dia staan tijdens oefenen. Start 1–2 staat op p. 40. Opgave 1 haalt procenten uit Boek 1 §1.1.2 op. Opgave 2 vraagt nieuwe formele kennis: Ev indelen en relatieve sterkte vergelijken. Laat leerlingen hiervoor de tabel en uitleg op p. 38 raadplegen. Dit is ondersteund verkennen, geen toets van al beheerste stof. Keer na de uitleg expliciet terug naar opgave 2 (dia 12) vóór zelfstandig werk. Basis 3 staat op p. 40, basis 4 en zelfstandig 5–6 op p. 41; doel 7 op p. 42. Huiswerk: 3, 4, 5, 6 en 7 maken en nakijken. Bonus 8 en herhaling 9–10 zijn extra. De gehele route is niet als één les van 55 minuten begroot.</a:t>
+              <a:t>Uitleg: Laat deze dia staan tijdens oefenen. Start 1–2 staat op p. 41. Opgave 1 haalt procenten uit Boek 1 §1.1.2 op. Opgave 2 vraagt nieuwe formele kennis: Ev indelen en relatieve sterkte vergelijken. Laat leerlingen hiervoor de tabel en uitleg op p. 39 raadplegen. Dit is ondersteund verkennen, geen toets van al beheerste stof. Keer na de uitleg expliciet terug naar opgave 2 (dia 12) vóór zelfstandig werk. Basis 3 staat op p. 41, basis 4 en zelfstandig 5–6 op p. 42; doel 7 op p. 43. Huiswerk: 3, 4, 5, 6 en 7 maken en nakijken. Bonus 8 en herhaling 9–10 zijn extra. De gehele route is niet als één les van 55 minuten begroot.</a:t>
             </a:r>
           </a:p>
           <a:p xmlns:a="http://schemas.openxmlformats.org/drawingml/2006/main">
@@ -1062,25 +1062,25 @@
           <a:p xmlns:a="http://schemas.openxmlformats.org/drawingml/2006/main">
             <a:r>
               <a:rPr sz="1400"/>
-              <a:t>Bron: Boek 2, chatuitgave 2026, revisie 21 september 2026. Leerlingenboek, gedrukte pagina 38, 40–42.</a:t>
-            </a:r>
-          </a:p>
-          <a:p xmlns:a="http://schemas.openxmlformats.org/drawingml/2006/main">
-            <a:r>
-              <a:rPr sz="1400"/>
-              <a:t>https://github.com/meijer1973/4veco-lessen/blob/f2660032cf7e4e3bbab96cf32863d06a38bd74bc/Boek%202%20-%20Kosten%2C%20opbrengsten%2C%20elasticiteit%20en%20surplus/edities/chat-2026/boek/Boek_2_Compleet.pdf</a:t>
-            </a:r>
-          </a:p>
-          <a:p xmlns:a="http://schemas.openxmlformats.org/drawingml/2006/main">
-            <a:r>
-              <a:rPr sz="1400"/>
-              <a:t>Antwoordmodel: https://github.com/meijer1973/4veco-lessen/blob/f2660032cf7e4e3bbab96cf32863d06a38bd74bc/Boek%202%20-%20Kosten%2C%20opbrengsten%2C%20elasticiteit%20en%20surplus/edities/chat-2026/bronnen/H2/2.2%20Elasticiteit%20%E2%80%93%20antwoorden.md</a:t>
-            </a:r>
-          </a:p>
-          <a:p xmlns:a="http://schemas.openxmlformats.org/drawingml/2006/main">
-            <a:r>
-              <a:rPr sz="1400"/>
-              <a:t>Voorkennisbron: Boek 1 §1.1.2, Theorie / Procentuele verandering. Nieuwe begripskennis: Boek 2 p. 38. Ondersteuning en opdrachten zijn in alle drie overzichten gelijk.</a:t>
+              <a:t>Bron: Boek 2, chatuitgave 2026, revisie 1 oktober 2026. Leerlingenboek, gedrukte pagina 39, 41–43.</a:t>
+            </a:r>
+          </a:p>
+          <a:p xmlns:a="http://schemas.openxmlformats.org/drawingml/2006/main">
+            <a:r>
+              <a:rPr sz="1400"/>
+              <a:t>https://github.com/meijer1973/4veco-lessen/blob/a8940a7a79e22857a3e306a91fe923c48c63e716/Boek%202%20-%20Kosten%2C%20opbrengsten%2C%20elasticiteit%20en%20surplus/edities/chat-2026/boek/Boek_2_Compleet.pdf</a:t>
+            </a:r>
+          </a:p>
+          <a:p xmlns:a="http://schemas.openxmlformats.org/drawingml/2006/main">
+            <a:r>
+              <a:rPr sz="1400"/>
+              <a:t>Antwoordmodel: https://github.com/meijer1973/4veco-lessen/blob/a8940a7a79e22857a3e306a91fe923c48c63e716/Boek%202%20-%20Kosten%2C%20opbrengsten%2C%20elasticiteit%20en%20surplus/edities/chat-2026/bronnen/H2/2.2%20Elasticiteit%20%E2%80%93%20antwoorden.md</a:t>
+            </a:r>
+          </a:p>
+          <a:p xmlns:a="http://schemas.openxmlformats.org/drawingml/2006/main">
+            <a:r>
+              <a:rPr sz="1400"/>
+              <a:t>Voorkennisbron: Boek 1 §1.1.2, Theorie / Procentuele verandering. Nieuwe begripskennis: Boek 2 p. 39. Ondersteuning en opdrachten zijn in alle drie overzichten gelijk.</a:t>
             </a:r>
           </a:p>
         </p:txBody>
@@ -1199,19 +1199,19 @@
           <a:p xmlns:a="http://schemas.openxmlformats.org/drawingml/2006/main">
             <a:r>
               <a:rPr sz="1400"/>
-              <a:t>Bron: Boek 2, chatuitgave 2026, revisie 21 september 2026. Leerlingenboek, gedrukte pagina 42.</a:t>
-            </a:r>
-          </a:p>
-          <a:p xmlns:a="http://schemas.openxmlformats.org/drawingml/2006/main">
-            <a:r>
-              <a:rPr sz="1400"/>
-              <a:t>https://github.com/meijer1973/4veco-lessen/blob/f2660032cf7e4e3bbab96cf32863d06a38bd74bc/Boek%202%20-%20Kosten%2C%20opbrengsten%2C%20elasticiteit%20en%20surplus/edities/chat-2026/boek/Boek_2_Compleet.pdf</a:t>
-            </a:r>
-          </a:p>
-          <a:p xmlns:a="http://schemas.openxmlformats.org/drawingml/2006/main">
-            <a:r>
-              <a:rPr sz="1400"/>
-              <a:t>Antwoordmodel: https://github.com/meijer1973/4veco-lessen/blob/f2660032cf7e4e3bbab96cf32863d06a38bd74bc/Boek%202%20-%20Kosten%2C%20opbrengsten%2C%20elasticiteit%20en%20surplus/edities/chat-2026/bronnen/H2/2.2%20Elasticiteit%20%E2%80%93%20antwoorden.md</a:t>
+              <a:t>Bron: Boek 2, chatuitgave 2026, revisie 1 oktober 2026. Leerlingenboek, gedrukte pagina 43.</a:t>
+            </a:r>
+          </a:p>
+          <a:p xmlns:a="http://schemas.openxmlformats.org/drawingml/2006/main">
+            <a:r>
+              <a:rPr sz="1400"/>
+              <a:t>https://github.com/meijer1973/4veco-lessen/blob/a8940a7a79e22857a3e306a91fe923c48c63e716/Boek%202%20-%20Kosten%2C%20opbrengsten%2C%20elasticiteit%20en%20surplus/edities/chat-2026/boek/Boek_2_Compleet.pdf</a:t>
+            </a:r>
+          </a:p>
+          <a:p xmlns:a="http://schemas.openxmlformats.org/drawingml/2006/main">
+            <a:r>
+              <a:rPr sz="1400"/>
+              <a:t>Antwoordmodel: https://github.com/meijer1973/4veco-lessen/blob/a8940a7a79e22857a3e306a91fe923c48c63e716/Boek%202%20-%20Kosten%2C%20opbrengsten%2C%20elasticiteit%20en%20surplus/edities/chat-2026/bronnen/H2/2.2%20Elasticiteit%20%E2%80%93%20antwoorden.md</a:t>
             </a:r>
           </a:p>
           <a:p xmlns:a="http://schemas.openxmlformats.org/drawingml/2006/main">
@@ -1336,19 +1336,19 @@
           <a:p xmlns:a="http://schemas.openxmlformats.org/drawingml/2006/main">
             <a:r>
               <a:rPr sz="1400"/>
-              <a:t>Bron: Boek 2, chatuitgave 2026, revisie 21 september 2026. Leerlingenboek, gedrukte pagina 42.</a:t>
-            </a:r>
-          </a:p>
-          <a:p xmlns:a="http://schemas.openxmlformats.org/drawingml/2006/main">
-            <a:r>
-              <a:rPr sz="1400"/>
-              <a:t>https://github.com/meijer1973/4veco-lessen/blob/f2660032cf7e4e3bbab96cf32863d06a38bd74bc/Boek%202%20-%20Kosten%2C%20opbrengsten%2C%20elasticiteit%20en%20surplus/edities/chat-2026/boek/Boek_2_Compleet.pdf</a:t>
-            </a:r>
-          </a:p>
-          <a:p xmlns:a="http://schemas.openxmlformats.org/drawingml/2006/main">
-            <a:r>
-              <a:rPr sz="1400"/>
-              <a:t>Antwoordmodel: https://github.com/meijer1973/4veco-lessen/blob/f2660032cf7e4e3bbab96cf32863d06a38bd74bc/Boek%202%20-%20Kosten%2C%20opbrengsten%2C%20elasticiteit%20en%20surplus/edities/chat-2026/bronnen/H2/2.2%20Elasticiteit%20%E2%80%93%20antwoorden.md</a:t>
+              <a:t>Bron: Boek 2, chatuitgave 2026, revisie 1 oktober 2026. Leerlingenboek, gedrukte pagina 43.</a:t>
+            </a:r>
+          </a:p>
+          <a:p xmlns:a="http://schemas.openxmlformats.org/drawingml/2006/main">
+            <a:r>
+              <a:rPr sz="1400"/>
+              <a:t>https://github.com/meijer1973/4veco-lessen/blob/a8940a7a79e22857a3e306a91fe923c48c63e716/Boek%202%20-%20Kosten%2C%20opbrengsten%2C%20elasticiteit%20en%20surplus/edities/chat-2026/boek/Boek_2_Compleet.pdf</a:t>
+            </a:r>
+          </a:p>
+          <a:p xmlns:a="http://schemas.openxmlformats.org/drawingml/2006/main">
+            <a:r>
+              <a:rPr sz="1400"/>
+              <a:t>Antwoordmodel: https://github.com/meijer1973/4veco-lessen/blob/a8940a7a79e22857a3e306a91fe923c48c63e716/Boek%202%20-%20Kosten%2C%20opbrengsten%2C%20elasticiteit%20en%20surplus/edities/chat-2026/bronnen/H2/2.2%20Elasticiteit%20%E2%80%93%20antwoorden.md</a:t>
             </a:r>
           </a:p>
           <a:p xmlns:a="http://schemas.openxmlformats.org/drawingml/2006/main">
@@ -1473,19 +1473,19 @@
           <a:p xmlns:a="http://schemas.openxmlformats.org/drawingml/2006/main">
             <a:r>
               <a:rPr sz="1400"/>
-              <a:t>Bron: Boek 2, chatuitgave 2026, revisie 21 september 2026. Leerlingenboek, gedrukte pagina 42.</a:t>
-            </a:r>
-          </a:p>
-          <a:p xmlns:a="http://schemas.openxmlformats.org/drawingml/2006/main">
-            <a:r>
-              <a:rPr sz="1400"/>
-              <a:t>https://github.com/meijer1973/4veco-lessen/blob/f2660032cf7e4e3bbab96cf32863d06a38bd74bc/Boek%202%20-%20Kosten%2C%20opbrengsten%2C%20elasticiteit%20en%20surplus/edities/chat-2026/boek/Boek_2_Compleet.pdf</a:t>
-            </a:r>
-          </a:p>
-          <a:p xmlns:a="http://schemas.openxmlformats.org/drawingml/2006/main">
-            <a:r>
-              <a:rPr sz="1400"/>
-              <a:t>Antwoordmodel: https://github.com/meijer1973/4veco-lessen/blob/f2660032cf7e4e3bbab96cf32863d06a38bd74bc/Boek%202%20-%20Kosten%2C%20opbrengsten%2C%20elasticiteit%20en%20surplus/edities/chat-2026/bronnen/H2/2.2%20Elasticiteit%20%E2%80%93%20antwoorden.md</a:t>
+              <a:t>Bron: Boek 2, chatuitgave 2026, revisie 1 oktober 2026. Leerlingenboek, gedrukte pagina 43.</a:t>
+            </a:r>
+          </a:p>
+          <a:p xmlns:a="http://schemas.openxmlformats.org/drawingml/2006/main">
+            <a:r>
+              <a:rPr sz="1400"/>
+              <a:t>https://github.com/meijer1973/4veco-lessen/blob/a8940a7a79e22857a3e306a91fe923c48c63e716/Boek%202%20-%20Kosten%2C%20opbrengsten%2C%20elasticiteit%20en%20surplus/edities/chat-2026/boek/Boek_2_Compleet.pdf</a:t>
+            </a:r>
+          </a:p>
+          <a:p xmlns:a="http://schemas.openxmlformats.org/drawingml/2006/main">
+            <a:r>
+              <a:rPr sz="1400"/>
+              <a:t>Antwoordmodel: https://github.com/meijer1973/4veco-lessen/blob/a8940a7a79e22857a3e306a91fe923c48c63e716/Boek%202%20-%20Kosten%2C%20opbrengsten%2C%20elasticiteit%20en%20surplus/edities/chat-2026/bronnen/H2/2.2%20Elasticiteit%20%E2%80%93%20antwoorden.md</a:t>
             </a:r>
           </a:p>
           <a:p xmlns:a="http://schemas.openxmlformats.org/drawingml/2006/main">
@@ -1610,19 +1610,19 @@
           <a:p xmlns:a="http://schemas.openxmlformats.org/drawingml/2006/main">
             <a:r>
               <a:rPr sz="1400"/>
-              <a:t>Bron: Boek 2, chatuitgave 2026, revisie 21 september 2026. Leerlingenboek, gedrukte pagina 42.</a:t>
-            </a:r>
-          </a:p>
-          <a:p xmlns:a="http://schemas.openxmlformats.org/drawingml/2006/main">
-            <a:r>
-              <a:rPr sz="1400"/>
-              <a:t>https://github.com/meijer1973/4veco-lessen/blob/f2660032cf7e4e3bbab96cf32863d06a38bd74bc/Boek%202%20-%20Kosten%2C%20opbrengsten%2C%20elasticiteit%20en%20surplus/edities/chat-2026/boek/Boek_2_Compleet.pdf</a:t>
-            </a:r>
-          </a:p>
-          <a:p xmlns:a="http://schemas.openxmlformats.org/drawingml/2006/main">
-            <a:r>
-              <a:rPr sz="1400"/>
-              <a:t>Antwoordmodel: https://github.com/meijer1973/4veco-lessen/blob/f2660032cf7e4e3bbab96cf32863d06a38bd74bc/Boek%202%20-%20Kosten%2C%20opbrengsten%2C%20elasticiteit%20en%20surplus/edities/chat-2026/bronnen/H2/2.2%20Elasticiteit%20%E2%80%93%20antwoorden.md</a:t>
+              <a:t>Bron: Boek 2, chatuitgave 2026, revisie 1 oktober 2026. Leerlingenboek, gedrukte pagina 43.</a:t>
+            </a:r>
+          </a:p>
+          <a:p xmlns:a="http://schemas.openxmlformats.org/drawingml/2006/main">
+            <a:r>
+              <a:rPr sz="1400"/>
+              <a:t>https://github.com/meijer1973/4veco-lessen/blob/a8940a7a79e22857a3e306a91fe923c48c63e716/Boek%202%20-%20Kosten%2C%20opbrengsten%2C%20elasticiteit%20en%20surplus/edities/chat-2026/boek/Boek_2_Compleet.pdf</a:t>
+            </a:r>
+          </a:p>
+          <a:p xmlns:a="http://schemas.openxmlformats.org/drawingml/2006/main">
+            <a:r>
+              <a:rPr sz="1400"/>
+              <a:t>Antwoordmodel: https://github.com/meijer1973/4veco-lessen/blob/a8940a7a79e22857a3e306a91fe923c48c63e716/Boek%202%20-%20Kosten%2C%20opbrengsten%2C%20elasticiteit%20en%20surplus/edities/chat-2026/bronnen/H2/2.2%20Elasticiteit%20%E2%80%93%20antwoorden.md</a:t>
             </a:r>
           </a:p>
           <a:p xmlns:a="http://schemas.openxmlformats.org/drawingml/2006/main">
@@ -1747,19 +1747,19 @@
           <a:p xmlns:a="http://schemas.openxmlformats.org/drawingml/2006/main">
             <a:r>
               <a:rPr sz="1400"/>
-              <a:t>Bron: Boek 2, chatuitgave 2026, revisie 21 september 2026. Leerlingenboek, gedrukte pagina 42.</a:t>
-            </a:r>
-          </a:p>
-          <a:p xmlns:a="http://schemas.openxmlformats.org/drawingml/2006/main">
-            <a:r>
-              <a:rPr sz="1400"/>
-              <a:t>https://github.com/meijer1973/4veco-lessen/blob/f2660032cf7e4e3bbab96cf32863d06a38bd74bc/Boek%202%20-%20Kosten%2C%20opbrengsten%2C%20elasticiteit%20en%20surplus/edities/chat-2026/boek/Boek_2_Compleet.pdf</a:t>
-            </a:r>
-          </a:p>
-          <a:p xmlns:a="http://schemas.openxmlformats.org/drawingml/2006/main">
-            <a:r>
-              <a:rPr sz="1400"/>
-              <a:t>Antwoordmodel: https://github.com/meijer1973/4veco-lessen/blob/f2660032cf7e4e3bbab96cf32863d06a38bd74bc/Boek%202%20-%20Kosten%2C%20opbrengsten%2C%20elasticiteit%20en%20surplus/edities/chat-2026/bronnen/H2/2.2%20Elasticiteit%20%E2%80%93%20antwoorden.md</a:t>
+              <a:t>Bron: Boek 2, chatuitgave 2026, revisie 1 oktober 2026. Leerlingenboek, gedrukte pagina 43.</a:t>
+            </a:r>
+          </a:p>
+          <a:p xmlns:a="http://schemas.openxmlformats.org/drawingml/2006/main">
+            <a:r>
+              <a:rPr sz="1400"/>
+              <a:t>https://github.com/meijer1973/4veco-lessen/blob/a8940a7a79e22857a3e306a91fe923c48c63e716/Boek%202%20-%20Kosten%2C%20opbrengsten%2C%20elasticiteit%20en%20surplus/edities/chat-2026/boek/Boek_2_Compleet.pdf</a:t>
+            </a:r>
+          </a:p>
+          <a:p xmlns:a="http://schemas.openxmlformats.org/drawingml/2006/main">
+            <a:r>
+              <a:rPr sz="1400"/>
+              <a:t>Antwoordmodel: https://github.com/meijer1973/4veco-lessen/blob/a8940a7a79e22857a3e306a91fe923c48c63e716/Boek%202%20-%20Kosten%2C%20opbrengsten%2C%20elasticiteit%20en%20surplus/edities/chat-2026/bronnen/H2/2.2%20Elasticiteit%20%E2%80%93%20antwoorden.md</a:t>
             </a:r>
           </a:p>
           <a:p xmlns:a="http://schemas.openxmlformats.org/drawingml/2006/main">
@@ -1884,19 +1884,19 @@
           <a:p xmlns:a="http://schemas.openxmlformats.org/drawingml/2006/main">
             <a:r>
               <a:rPr sz="1400"/>
-              <a:t>Bron: Boek 2, chatuitgave 2026, revisie 21 september 2026. Leerlingenboek, gedrukte pagina 42.</a:t>
-            </a:r>
-          </a:p>
-          <a:p xmlns:a="http://schemas.openxmlformats.org/drawingml/2006/main">
-            <a:r>
-              <a:rPr sz="1400"/>
-              <a:t>https://github.com/meijer1973/4veco-lessen/blob/f2660032cf7e4e3bbab96cf32863d06a38bd74bc/Boek%202%20-%20Kosten%2C%20opbrengsten%2C%20elasticiteit%20en%20surplus/edities/chat-2026/boek/Boek_2_Compleet.pdf</a:t>
-            </a:r>
-          </a:p>
-          <a:p xmlns:a="http://schemas.openxmlformats.org/drawingml/2006/main">
-            <a:r>
-              <a:rPr sz="1400"/>
-              <a:t>Antwoordmodel: https://github.com/meijer1973/4veco-lessen/blob/f2660032cf7e4e3bbab96cf32863d06a38bd74bc/Boek%202%20-%20Kosten%2C%20opbrengsten%2C%20elasticiteit%20en%20surplus/edities/chat-2026/bronnen/H2/2.2%20Elasticiteit%20%E2%80%93%20antwoorden.md</a:t>
+              <a:t>Bron: Boek 2, chatuitgave 2026, revisie 1 oktober 2026. Leerlingenboek, gedrukte pagina 43.</a:t>
+            </a:r>
+          </a:p>
+          <a:p xmlns:a="http://schemas.openxmlformats.org/drawingml/2006/main">
+            <a:r>
+              <a:rPr sz="1400"/>
+              <a:t>https://github.com/meijer1973/4veco-lessen/blob/a8940a7a79e22857a3e306a91fe923c48c63e716/Boek%202%20-%20Kosten%2C%20opbrengsten%2C%20elasticiteit%20en%20surplus/edities/chat-2026/boek/Boek_2_Compleet.pdf</a:t>
+            </a:r>
+          </a:p>
+          <a:p xmlns:a="http://schemas.openxmlformats.org/drawingml/2006/main">
+            <a:r>
+              <a:rPr sz="1400"/>
+              <a:t>Antwoordmodel: https://github.com/meijer1973/4veco-lessen/blob/a8940a7a79e22857a3e306a91fe923c48c63e716/Boek%202%20-%20Kosten%2C%20opbrengsten%2C%20elasticiteit%20en%20surplus/edities/chat-2026/bronnen/H2/2.2%20Elasticiteit%20%E2%80%93%20antwoorden.md</a:t>
             </a:r>
           </a:p>
           <a:p xmlns:a="http://schemas.openxmlformats.org/drawingml/2006/main">
@@ -2021,19 +2021,19 @@
           <a:p xmlns:a="http://schemas.openxmlformats.org/drawingml/2006/main">
             <a:r>
               <a:rPr sz="1400"/>
-              <a:t>Bron: Boek 2, chatuitgave 2026, revisie 21 september 2026. Leerlingenboek, gedrukte pagina 36–39.</a:t>
-            </a:r>
-          </a:p>
-          <a:p xmlns:a="http://schemas.openxmlformats.org/drawingml/2006/main">
-            <a:r>
-              <a:rPr sz="1400"/>
-              <a:t>https://github.com/meijer1973/4veco-lessen/blob/f2660032cf7e4e3bbab96cf32863d06a38bd74bc/Boek%202%20-%20Kosten%2C%20opbrengsten%2C%20elasticiteit%20en%20surplus/edities/chat-2026/boek/Boek_2_Compleet.pdf</a:t>
-            </a:r>
-          </a:p>
-          <a:p xmlns:a="http://schemas.openxmlformats.org/drawingml/2006/main">
-            <a:r>
-              <a:rPr sz="1400"/>
-              <a:t>Antwoordmodel: https://github.com/meijer1973/4veco-lessen/blob/f2660032cf7e4e3bbab96cf32863d06a38bd74bc/Boek%202%20-%20Kosten%2C%20opbrengsten%2C%20elasticiteit%20en%20surplus/edities/chat-2026/bronnen/H2/2.2%20Elasticiteit%20%E2%80%93%20antwoorden.md</a:t>
+              <a:t>Bron: Boek 2, chatuitgave 2026, revisie 1 oktober 2026. Leerlingenboek, gedrukte pagina 37–40.</a:t>
+            </a:r>
+          </a:p>
+          <a:p xmlns:a="http://schemas.openxmlformats.org/drawingml/2006/main">
+            <a:r>
+              <a:rPr sz="1400"/>
+              <a:t>https://github.com/meijer1973/4veco-lessen/blob/a8940a7a79e22857a3e306a91fe923c48c63e716/Boek%202%20-%20Kosten%2C%20opbrengsten%2C%20elasticiteit%20en%20surplus/edities/chat-2026/boek/Boek_2_Compleet.pdf</a:t>
+            </a:r>
+          </a:p>
+          <a:p xmlns:a="http://schemas.openxmlformats.org/drawingml/2006/main">
+            <a:r>
+              <a:rPr sz="1400"/>
+              <a:t>Antwoordmodel: https://github.com/meijer1973/4veco-lessen/blob/a8940a7a79e22857a3e306a91fe923c48c63e716/Boek%202%20-%20Kosten%2C%20opbrengsten%2C%20elasticiteit%20en%20surplus/edities/chat-2026/bronnen/H2/2.2%20Elasticiteit%20%E2%80%93%20antwoorden.md</a:t>
             </a:r>
           </a:p>
           <a:p xmlns:a="http://schemas.openxmlformats.org/drawingml/2006/main">
@@ -2158,19 +2158,19 @@
           <a:p xmlns:a="http://schemas.openxmlformats.org/drawingml/2006/main">
             <a:r>
               <a:rPr sz="1400"/>
-              <a:t>Bron: Boek 2, chatuitgave 2026, revisie 21 september 2026. Leerlingenboek, gedrukte pagina 42.</a:t>
-            </a:r>
-          </a:p>
-          <a:p xmlns:a="http://schemas.openxmlformats.org/drawingml/2006/main">
-            <a:r>
-              <a:rPr sz="1400"/>
-              <a:t>https://github.com/meijer1973/4veco-lessen/blob/f2660032cf7e4e3bbab96cf32863d06a38bd74bc/Boek%202%20-%20Kosten%2C%20opbrengsten%2C%20elasticiteit%20en%20surplus/edities/chat-2026/boek/Boek_2_Compleet.pdf</a:t>
-            </a:r>
-          </a:p>
-          <a:p xmlns:a="http://schemas.openxmlformats.org/drawingml/2006/main">
-            <a:r>
-              <a:rPr sz="1400"/>
-              <a:t>Antwoordmodel: https://github.com/meijer1973/4veco-lessen/blob/f2660032cf7e4e3bbab96cf32863d06a38bd74bc/Boek%202%20-%20Kosten%2C%20opbrengsten%2C%20elasticiteit%20en%20surplus/edities/chat-2026/bronnen/H2/2.2%20Elasticiteit%20%E2%80%93%20antwoorden.md</a:t>
+              <a:t>Bron: Boek 2, chatuitgave 2026, revisie 1 oktober 2026. Leerlingenboek, gedrukte pagina 43.</a:t>
+            </a:r>
+          </a:p>
+          <a:p xmlns:a="http://schemas.openxmlformats.org/drawingml/2006/main">
+            <a:r>
+              <a:rPr sz="1400"/>
+              <a:t>https://github.com/meijer1973/4veco-lessen/blob/a8940a7a79e22857a3e306a91fe923c48c63e716/Boek%202%20-%20Kosten%2C%20opbrengsten%2C%20elasticiteit%20en%20surplus/edities/chat-2026/boek/Boek_2_Compleet.pdf</a:t>
+            </a:r>
+          </a:p>
+          <a:p xmlns:a="http://schemas.openxmlformats.org/drawingml/2006/main">
+            <a:r>
+              <a:rPr sz="1400"/>
+              <a:t>Antwoordmodel: https://github.com/meijer1973/4veco-lessen/blob/a8940a7a79e22857a3e306a91fe923c48c63e716/Boek%202%20-%20Kosten%2C%20opbrengsten%2C%20elasticiteit%20en%20surplus/edities/chat-2026/bronnen/H2/2.2%20Elasticiteit%20%E2%80%93%20antwoorden.md</a:t>
             </a:r>
           </a:p>
           <a:p xmlns:a="http://schemas.openxmlformats.org/drawingml/2006/main">
@@ -2295,19 +2295,19 @@
           <a:p xmlns:a="http://schemas.openxmlformats.org/drawingml/2006/main">
             <a:r>
               <a:rPr sz="1400"/>
-              <a:t>Bron: Boek 2, chatuitgave 2026, revisie 21 september 2026. Leerlingenboek, gedrukte pagina 42.</a:t>
-            </a:r>
-          </a:p>
-          <a:p xmlns:a="http://schemas.openxmlformats.org/drawingml/2006/main">
-            <a:r>
-              <a:rPr sz="1400"/>
-              <a:t>https://github.com/meijer1973/4veco-lessen/blob/f2660032cf7e4e3bbab96cf32863d06a38bd74bc/Boek%202%20-%20Kosten%2C%20opbrengsten%2C%20elasticiteit%20en%20surplus/edities/chat-2026/boek/Boek_2_Compleet.pdf</a:t>
-            </a:r>
-          </a:p>
-          <a:p xmlns:a="http://schemas.openxmlformats.org/drawingml/2006/main">
-            <a:r>
-              <a:rPr sz="1400"/>
-              <a:t>Antwoordmodel: https://github.com/meijer1973/4veco-lessen/blob/f2660032cf7e4e3bbab96cf32863d06a38bd74bc/Boek%202%20-%20Kosten%2C%20opbrengsten%2C%20elasticiteit%20en%20surplus/edities/chat-2026/bronnen/H2/2.2%20Elasticiteit%20%E2%80%93%20antwoorden.md</a:t>
+              <a:t>Bron: Boek 2, chatuitgave 2026, revisie 1 oktober 2026. Leerlingenboek, gedrukte pagina 43.</a:t>
+            </a:r>
+          </a:p>
+          <a:p xmlns:a="http://schemas.openxmlformats.org/drawingml/2006/main">
+            <a:r>
+              <a:rPr sz="1400"/>
+              <a:t>https://github.com/meijer1973/4veco-lessen/blob/a8940a7a79e22857a3e306a91fe923c48c63e716/Boek%202%20-%20Kosten%2C%20opbrengsten%2C%20elasticiteit%20en%20surplus/edities/chat-2026/boek/Boek_2_Compleet.pdf</a:t>
+            </a:r>
+          </a:p>
+          <a:p xmlns:a="http://schemas.openxmlformats.org/drawingml/2006/main">
+            <a:r>
+              <a:rPr sz="1400"/>
+              <a:t>Antwoordmodel: https://github.com/meijer1973/4veco-lessen/blob/a8940a7a79e22857a3e306a91fe923c48c63e716/Boek%202%20-%20Kosten%2C%20opbrengsten%2C%20elasticiteit%20en%20surplus/edities/chat-2026/bronnen/H2/2.2%20Elasticiteit%20%E2%80%93%20antwoorden.md</a:t>
             </a:r>
           </a:p>
           <a:p xmlns:a="http://schemas.openxmlformats.org/drawingml/2006/main">
@@ -2432,19 +2432,19 @@
           <a:p xmlns:a="http://schemas.openxmlformats.org/drawingml/2006/main">
             <a:r>
               <a:rPr sz="1400"/>
-              <a:t>Bron: Boek 2, chatuitgave 2026, revisie 21 september 2026. Leerlingenboek, gedrukte pagina 42.</a:t>
-            </a:r>
-          </a:p>
-          <a:p xmlns:a="http://schemas.openxmlformats.org/drawingml/2006/main">
-            <a:r>
-              <a:rPr sz="1400"/>
-              <a:t>https://github.com/meijer1973/4veco-lessen/blob/f2660032cf7e4e3bbab96cf32863d06a38bd74bc/Boek%202%20-%20Kosten%2C%20opbrengsten%2C%20elasticiteit%20en%20surplus/edities/chat-2026/boek/Boek_2_Compleet.pdf</a:t>
-            </a:r>
-          </a:p>
-          <a:p xmlns:a="http://schemas.openxmlformats.org/drawingml/2006/main">
-            <a:r>
-              <a:rPr sz="1400"/>
-              <a:t>Antwoordmodel: https://github.com/meijer1973/4veco-lessen/blob/f2660032cf7e4e3bbab96cf32863d06a38bd74bc/Boek%202%20-%20Kosten%2C%20opbrengsten%2C%20elasticiteit%20en%20surplus/edities/chat-2026/bronnen/H2/2.2%20Elasticiteit%20%E2%80%93%20antwoorden.md</a:t>
+              <a:t>Bron: Boek 2, chatuitgave 2026, revisie 1 oktober 2026. Leerlingenboek, gedrukte pagina 43.</a:t>
+            </a:r>
+          </a:p>
+          <a:p xmlns:a="http://schemas.openxmlformats.org/drawingml/2006/main">
+            <a:r>
+              <a:rPr sz="1400"/>
+              <a:t>https://github.com/meijer1973/4veco-lessen/blob/a8940a7a79e22857a3e306a91fe923c48c63e716/Boek%202%20-%20Kosten%2C%20opbrengsten%2C%20elasticiteit%20en%20surplus/edities/chat-2026/boek/Boek_2_Compleet.pdf</a:t>
+            </a:r>
+          </a:p>
+          <a:p xmlns:a="http://schemas.openxmlformats.org/drawingml/2006/main">
+            <a:r>
+              <a:rPr sz="1400"/>
+              <a:t>Antwoordmodel: https://github.com/meijer1973/4veco-lessen/blob/a8940a7a79e22857a3e306a91fe923c48c63e716/Boek%202%20-%20Kosten%2C%20opbrengsten%2C%20elasticiteit%20en%20surplus/edities/chat-2026/bronnen/H2/2.2%20Elasticiteit%20%E2%80%93%20antwoorden.md</a:t>
             </a:r>
           </a:p>
           <a:p xmlns:a="http://schemas.openxmlformats.org/drawingml/2006/main">
@@ -2569,19 +2569,19 @@
           <a:p xmlns:a="http://schemas.openxmlformats.org/drawingml/2006/main">
             <a:r>
               <a:rPr sz="1400"/>
-              <a:t>Bron: Boek 2, chatuitgave 2026, revisie 21 september 2026. Leerlingenboek, gedrukte pagina 42.</a:t>
-            </a:r>
-          </a:p>
-          <a:p xmlns:a="http://schemas.openxmlformats.org/drawingml/2006/main">
-            <a:r>
-              <a:rPr sz="1400"/>
-              <a:t>https://github.com/meijer1973/4veco-lessen/blob/f2660032cf7e4e3bbab96cf32863d06a38bd74bc/Boek%202%20-%20Kosten%2C%20opbrengsten%2C%20elasticiteit%20en%20surplus/edities/chat-2026/boek/Boek_2_Compleet.pdf</a:t>
-            </a:r>
-          </a:p>
-          <a:p xmlns:a="http://schemas.openxmlformats.org/drawingml/2006/main">
-            <a:r>
-              <a:rPr sz="1400"/>
-              <a:t>Antwoordmodel: https://github.com/meijer1973/4veco-lessen/blob/f2660032cf7e4e3bbab96cf32863d06a38bd74bc/Boek%202%20-%20Kosten%2C%20opbrengsten%2C%20elasticiteit%20en%20surplus/edities/chat-2026/bronnen/H2/2.2%20Elasticiteit%20%E2%80%93%20antwoorden.md</a:t>
+              <a:t>Bron: Boek 2, chatuitgave 2026, revisie 1 oktober 2026. Leerlingenboek, gedrukte pagina 43.</a:t>
+            </a:r>
+          </a:p>
+          <a:p xmlns:a="http://schemas.openxmlformats.org/drawingml/2006/main">
+            <a:r>
+              <a:rPr sz="1400"/>
+              <a:t>https://github.com/meijer1973/4veco-lessen/blob/a8940a7a79e22857a3e306a91fe923c48c63e716/Boek%202%20-%20Kosten%2C%20opbrengsten%2C%20elasticiteit%20en%20surplus/edities/chat-2026/boek/Boek_2_Compleet.pdf</a:t>
+            </a:r>
+          </a:p>
+          <a:p xmlns:a="http://schemas.openxmlformats.org/drawingml/2006/main">
+            <a:r>
+              <a:rPr sz="1400"/>
+              <a:t>Antwoordmodel: https://github.com/meijer1973/4veco-lessen/blob/a8940a7a79e22857a3e306a91fe923c48c63e716/Boek%202%20-%20Kosten%2C%20opbrengsten%2C%20elasticiteit%20en%20surplus/edities/chat-2026/bronnen/H2/2.2%20Elasticiteit%20%E2%80%93%20antwoorden.md</a:t>
             </a:r>
           </a:p>
           <a:p xmlns:a="http://schemas.openxmlformats.org/drawingml/2006/main">
@@ -2670,7 +2670,7 @@
           <a:p xmlns:a="http://schemas.openxmlformats.org/drawingml/2006/main">
             <a:r>
               <a:rPr sz="1400"/>
-              <a:t>Uitleg: Laat deze dia staan tijdens afsluiting / huiswerk. Start 1–2 staat op p. 40. Opgave 1 haalt procenten uit Boek 1 §1.1.2 op. Opgave 2 vraagt nieuwe formele kennis: Ev indelen en relatieve sterkte vergelijken. Laat leerlingen hiervoor de tabel en uitleg op p. 38 raadplegen. Dit is ondersteund verkennen, geen toets van al beheerste stof. Keer na de uitleg expliciet terug naar opgave 2 (dia 12) vóór zelfstandig werk. Basis 3 staat op p. 40, basis 4 en zelfstandig 5–6 op p. 41; doel 7 op p. 42. Huiswerk: 3, 4, 5, 6 en 7 maken en nakijken. Bonus 8 en herhaling 9–10 zijn extra. De gehele route is niet als één les van 55 minuten begroot.</a:t>
+              <a:t>Uitleg: Laat deze dia staan tijdens afsluiting / huiswerk. Start 1–2 staat op p. 41. Opgave 1 haalt procenten uit Boek 1 §1.1.2 op. Opgave 2 vraagt nieuwe formele kennis: Ev indelen en relatieve sterkte vergelijken. Laat leerlingen hiervoor de tabel en uitleg op p. 39 raadplegen. Dit is ondersteund verkennen, geen toets van al beheerste stof. Keer na de uitleg expliciet terug naar opgave 2 (dia 12) vóór zelfstandig werk. Basis 3 staat op p. 41, basis 4 en zelfstandig 5–6 op p. 42; doel 7 op p. 43. Huiswerk: 3, 4, 5, 6 en 7 maken en nakijken. Bonus 8 en herhaling 9–10 zijn extra. De gehele route is niet als één les van 55 minuten begroot.</a:t>
             </a:r>
           </a:p>
           <a:p xmlns:a="http://schemas.openxmlformats.org/drawingml/2006/main">
@@ -2706,25 +2706,25 @@
           <a:p xmlns:a="http://schemas.openxmlformats.org/drawingml/2006/main">
             <a:r>
               <a:rPr sz="1400"/>
-              <a:t>Bron: Boek 2, chatuitgave 2026, revisie 21 september 2026. Leerlingenboek, gedrukte pagina 38, 40–42.</a:t>
-            </a:r>
-          </a:p>
-          <a:p xmlns:a="http://schemas.openxmlformats.org/drawingml/2006/main">
-            <a:r>
-              <a:rPr sz="1400"/>
-              <a:t>https://github.com/meijer1973/4veco-lessen/blob/f2660032cf7e4e3bbab96cf32863d06a38bd74bc/Boek%202%20-%20Kosten%2C%20opbrengsten%2C%20elasticiteit%20en%20surplus/edities/chat-2026/boek/Boek_2_Compleet.pdf</a:t>
-            </a:r>
-          </a:p>
-          <a:p xmlns:a="http://schemas.openxmlformats.org/drawingml/2006/main">
-            <a:r>
-              <a:rPr sz="1400"/>
-              <a:t>Antwoordmodel: https://github.com/meijer1973/4veco-lessen/blob/f2660032cf7e4e3bbab96cf32863d06a38bd74bc/Boek%202%20-%20Kosten%2C%20opbrengsten%2C%20elasticiteit%20en%20surplus/edities/chat-2026/bronnen/H2/2.2%20Elasticiteit%20%E2%80%93%20antwoorden.md</a:t>
-            </a:r>
-          </a:p>
-          <a:p xmlns:a="http://schemas.openxmlformats.org/drawingml/2006/main">
-            <a:r>
-              <a:rPr sz="1400"/>
-              <a:t>Voorkennisbron: Boek 1 §1.1.2, Theorie / Procentuele verandering. Nieuwe begripskennis: Boek 2 p. 38. Ondersteuning en opdrachten zijn in alle drie overzichten gelijk.</a:t>
+              <a:t>Bron: Boek 2, chatuitgave 2026, revisie 1 oktober 2026. Leerlingenboek, gedrukte pagina 39, 41–43.</a:t>
+            </a:r>
+          </a:p>
+          <a:p xmlns:a="http://schemas.openxmlformats.org/drawingml/2006/main">
+            <a:r>
+              <a:rPr sz="1400"/>
+              <a:t>https://github.com/meijer1973/4veco-lessen/blob/a8940a7a79e22857a3e306a91fe923c48c63e716/Boek%202%20-%20Kosten%2C%20opbrengsten%2C%20elasticiteit%20en%20surplus/edities/chat-2026/boek/Boek_2_Compleet.pdf</a:t>
+            </a:r>
+          </a:p>
+          <a:p xmlns:a="http://schemas.openxmlformats.org/drawingml/2006/main">
+            <a:r>
+              <a:rPr sz="1400"/>
+              <a:t>Antwoordmodel: https://github.com/meijer1973/4veco-lessen/blob/a8940a7a79e22857a3e306a91fe923c48c63e716/Boek%202%20-%20Kosten%2C%20opbrengsten%2C%20elasticiteit%20en%20surplus/edities/chat-2026/bronnen/H2/2.2%20Elasticiteit%20%E2%80%93%20antwoorden.md</a:t>
+            </a:r>
+          </a:p>
+          <a:p xmlns:a="http://schemas.openxmlformats.org/drawingml/2006/main">
+            <a:r>
+              <a:rPr sz="1400"/>
+              <a:t>Voorkennisbron: Boek 1 §1.1.2, Theorie / Procentuele verandering. Nieuwe begripskennis: Boek 2 p. 39. Ondersteuning en opdrachten zijn in alle drie overzichten gelijk.</a:t>
             </a:r>
           </a:p>
         </p:txBody>
@@ -2843,19 +2843,19 @@
           <a:p xmlns:a="http://schemas.openxmlformats.org/drawingml/2006/main">
             <a:r>
               <a:rPr sz="1400"/>
-              <a:t>Bron: Boek 2, chatuitgave 2026, revisie 21 september 2026. Dit is een afzonderlijk, door de presentatiemaker bedacht uitlegvoorbeeld met eigen context en gegevens. Het komt niet uit een boekopgave. Het boek is alleen de bron voor de methode (p. 36).</a:t>
-            </a:r>
-          </a:p>
-          <a:p xmlns:a="http://schemas.openxmlformats.org/drawingml/2006/main">
-            <a:r>
-              <a:rPr sz="1400"/>
-              <a:t>https://github.com/meijer1973/4veco-lessen/blob/f2660032cf7e4e3bbab96cf32863d06a38bd74bc/Boek%202%20-%20Kosten%2C%20opbrengsten%2C%20elasticiteit%20en%20surplus/edities/chat-2026/boek/Boek_2_Compleet.pdf</a:t>
-            </a:r>
-          </a:p>
-          <a:p xmlns:a="http://schemas.openxmlformats.org/drawingml/2006/main">
-            <a:r>
-              <a:rPr sz="1400"/>
-              <a:t>Antwoordmodel: https://github.com/meijer1973/4veco-lessen/blob/f2660032cf7e4e3bbab96cf32863d06a38bd74bc/Boek%202%20-%20Kosten%2C%20opbrengsten%2C%20elasticiteit%20en%20surplus/edities/chat-2026/bronnen/H2/2.2%20Elasticiteit%20%E2%80%93%20antwoorden.md</a:t>
+              <a:t>Bron: Boek 2, chatuitgave 2026, revisie 1 oktober 2026. Dit is een afzonderlijk, door de presentatiemaker bedacht uitlegvoorbeeld met eigen context en gegevens. Het komt niet uit een boekopgave. Het boek is alleen de bron voor de methode (p. 37).</a:t>
+            </a:r>
+          </a:p>
+          <a:p xmlns:a="http://schemas.openxmlformats.org/drawingml/2006/main">
+            <a:r>
+              <a:rPr sz="1400"/>
+              <a:t>https://github.com/meijer1973/4veco-lessen/blob/a8940a7a79e22857a3e306a91fe923c48c63e716/Boek%202%20-%20Kosten%2C%20opbrengsten%2C%20elasticiteit%20en%20surplus/edities/chat-2026/boek/Boek_2_Compleet.pdf</a:t>
+            </a:r>
+          </a:p>
+          <a:p xmlns:a="http://schemas.openxmlformats.org/drawingml/2006/main">
+            <a:r>
+              <a:rPr sz="1400"/>
+              <a:t>Antwoordmodel: https://github.com/meijer1973/4veco-lessen/blob/a8940a7a79e22857a3e306a91fe923c48c63e716/Boek%202%20-%20Kosten%2C%20opbrengsten%2C%20elasticiteit%20en%20surplus/edities/chat-2026/bronnen/H2/2.2%20Elasticiteit%20%E2%80%93%20antwoorden.md</a:t>
             </a:r>
           </a:p>
           <a:p xmlns:a="http://schemas.openxmlformats.org/drawingml/2006/main">
@@ -2980,19 +2980,19 @@
           <a:p xmlns:a="http://schemas.openxmlformats.org/drawingml/2006/main">
             <a:r>
               <a:rPr sz="1400"/>
-              <a:t>Bron: Boek 2, chatuitgave 2026, revisie 21 september 2026. Dit is een afzonderlijk, door de presentatiemaker bedacht uitlegvoorbeeld met eigen context en gegevens. Het komt niet uit een boekopgave. Het boek is alleen de bron voor de methode (p. 37).</a:t>
-            </a:r>
-          </a:p>
-          <a:p xmlns:a="http://schemas.openxmlformats.org/drawingml/2006/main">
-            <a:r>
-              <a:rPr sz="1400"/>
-              <a:t>https://github.com/meijer1973/4veco-lessen/blob/f2660032cf7e4e3bbab96cf32863d06a38bd74bc/Boek%202%20-%20Kosten%2C%20opbrengsten%2C%20elasticiteit%20en%20surplus/edities/chat-2026/boek/Boek_2_Compleet.pdf</a:t>
-            </a:r>
-          </a:p>
-          <a:p xmlns:a="http://schemas.openxmlformats.org/drawingml/2006/main">
-            <a:r>
-              <a:rPr sz="1400"/>
-              <a:t>Antwoordmodel: https://github.com/meijer1973/4veco-lessen/blob/f2660032cf7e4e3bbab96cf32863d06a38bd74bc/Boek%202%20-%20Kosten%2C%20opbrengsten%2C%20elasticiteit%20en%20surplus/edities/chat-2026/bronnen/H2/2.2%20Elasticiteit%20%E2%80%93%20antwoorden.md</a:t>
+              <a:t>Bron: Boek 2, chatuitgave 2026, revisie 1 oktober 2026. Dit is een afzonderlijk, door de presentatiemaker bedacht uitlegvoorbeeld met eigen context en gegevens. Het komt niet uit een boekopgave. Het boek is alleen de bron voor de methode (p. 38).</a:t>
+            </a:r>
+          </a:p>
+          <a:p xmlns:a="http://schemas.openxmlformats.org/drawingml/2006/main">
+            <a:r>
+              <a:rPr sz="1400"/>
+              <a:t>https://github.com/meijer1973/4veco-lessen/blob/a8940a7a79e22857a3e306a91fe923c48c63e716/Boek%202%20-%20Kosten%2C%20opbrengsten%2C%20elasticiteit%20en%20surplus/edities/chat-2026/boek/Boek_2_Compleet.pdf</a:t>
+            </a:r>
+          </a:p>
+          <a:p xmlns:a="http://schemas.openxmlformats.org/drawingml/2006/main">
+            <a:r>
+              <a:rPr sz="1400"/>
+              <a:t>Antwoordmodel: https://github.com/meijer1973/4veco-lessen/blob/a8940a7a79e22857a3e306a91fe923c48c63e716/Boek%202%20-%20Kosten%2C%20opbrengsten%2C%20elasticiteit%20en%20surplus/edities/chat-2026/bronnen/H2/2.2%20Elasticiteit%20%E2%80%93%20antwoorden.md</a:t>
             </a:r>
           </a:p>
           <a:p xmlns:a="http://schemas.openxmlformats.org/drawingml/2006/main">
@@ -3117,19 +3117,19 @@
           <a:p xmlns:a="http://schemas.openxmlformats.org/drawingml/2006/main">
             <a:r>
               <a:rPr sz="1400"/>
-              <a:t>Bron: Boek 2, chatuitgave 2026, revisie 21 september 2026. Dit is een afzonderlijk, door de presentatiemaker bedacht uitlegvoorbeeld met eigen context en gegevens. Het komt niet uit een boekopgave. Het boek is alleen de bron voor de methode (p. 36–37).</a:t>
-            </a:r>
-          </a:p>
-          <a:p xmlns:a="http://schemas.openxmlformats.org/drawingml/2006/main">
-            <a:r>
-              <a:rPr sz="1400"/>
-              <a:t>https://github.com/meijer1973/4veco-lessen/blob/f2660032cf7e4e3bbab96cf32863d06a38bd74bc/Boek%202%20-%20Kosten%2C%20opbrengsten%2C%20elasticiteit%20en%20surplus/edities/chat-2026/boek/Boek_2_Compleet.pdf</a:t>
-            </a:r>
-          </a:p>
-          <a:p xmlns:a="http://schemas.openxmlformats.org/drawingml/2006/main">
-            <a:r>
-              <a:rPr sz="1400"/>
-              <a:t>Antwoordmodel: https://github.com/meijer1973/4veco-lessen/blob/f2660032cf7e4e3bbab96cf32863d06a38bd74bc/Boek%202%20-%20Kosten%2C%20opbrengsten%2C%20elasticiteit%20en%20surplus/edities/chat-2026/bronnen/H2/2.2%20Elasticiteit%20%E2%80%93%20antwoorden.md</a:t>
+              <a:t>Bron: Boek 2, chatuitgave 2026, revisie 1 oktober 2026. Dit is een afzonderlijk, door de presentatiemaker bedacht uitlegvoorbeeld met eigen context en gegevens. Het komt niet uit een boekopgave. Het boek is alleen de bron voor de methode (p. 37–38).</a:t>
+            </a:r>
+          </a:p>
+          <a:p xmlns:a="http://schemas.openxmlformats.org/drawingml/2006/main">
+            <a:r>
+              <a:rPr sz="1400"/>
+              <a:t>https://github.com/meijer1973/4veco-lessen/blob/a8940a7a79e22857a3e306a91fe923c48c63e716/Boek%202%20-%20Kosten%2C%20opbrengsten%2C%20elasticiteit%20en%20surplus/edities/chat-2026/boek/Boek_2_Compleet.pdf</a:t>
+            </a:r>
+          </a:p>
+          <a:p xmlns:a="http://schemas.openxmlformats.org/drawingml/2006/main">
+            <a:r>
+              <a:rPr sz="1400"/>
+              <a:t>Antwoordmodel: https://github.com/meijer1973/4veco-lessen/blob/a8940a7a79e22857a3e306a91fe923c48c63e716/Boek%202%20-%20Kosten%2C%20opbrengsten%2C%20elasticiteit%20en%20surplus/edities/chat-2026/bronnen/H2/2.2%20Elasticiteit%20%E2%80%93%20antwoorden.md</a:t>
             </a:r>
           </a:p>
           <a:p xmlns:a="http://schemas.openxmlformats.org/drawingml/2006/main">
@@ -3254,19 +3254,19 @@
           <a:p xmlns:a="http://schemas.openxmlformats.org/drawingml/2006/main">
             <a:r>
               <a:rPr sz="1400"/>
-              <a:t>Bron: Boek 2, chatuitgave 2026, revisie 21 september 2026. Dit is een afzonderlijk, door de presentatiemaker bedacht uitlegvoorbeeld met eigen context en gegevens. Het komt niet uit een boekopgave. Het boek is alleen de bron voor de methode (p. 37).</a:t>
-            </a:r>
-          </a:p>
-          <a:p xmlns:a="http://schemas.openxmlformats.org/drawingml/2006/main">
-            <a:r>
-              <a:rPr sz="1400"/>
-              <a:t>https://github.com/meijer1973/4veco-lessen/blob/f2660032cf7e4e3bbab96cf32863d06a38bd74bc/Boek%202%20-%20Kosten%2C%20opbrengsten%2C%20elasticiteit%20en%20surplus/edities/chat-2026/boek/Boek_2_Compleet.pdf</a:t>
-            </a:r>
-          </a:p>
-          <a:p xmlns:a="http://schemas.openxmlformats.org/drawingml/2006/main">
-            <a:r>
-              <a:rPr sz="1400"/>
-              <a:t>Antwoordmodel: https://github.com/meijer1973/4veco-lessen/blob/f2660032cf7e4e3bbab96cf32863d06a38bd74bc/Boek%202%20-%20Kosten%2C%20opbrengsten%2C%20elasticiteit%20en%20surplus/edities/chat-2026/bronnen/H2/2.2%20Elasticiteit%20%E2%80%93%20antwoorden.md</a:t>
+              <a:t>Bron: Boek 2, chatuitgave 2026, revisie 1 oktober 2026. Dit is een afzonderlijk, door de presentatiemaker bedacht uitlegvoorbeeld met eigen context en gegevens. Het komt niet uit een boekopgave. Het boek is alleen de bron voor de methode (p. 38).</a:t>
+            </a:r>
+          </a:p>
+          <a:p xmlns:a="http://schemas.openxmlformats.org/drawingml/2006/main">
+            <a:r>
+              <a:rPr sz="1400"/>
+              <a:t>https://github.com/meijer1973/4veco-lessen/blob/a8940a7a79e22857a3e306a91fe923c48c63e716/Boek%202%20-%20Kosten%2C%20opbrengsten%2C%20elasticiteit%20en%20surplus/edities/chat-2026/boek/Boek_2_Compleet.pdf</a:t>
+            </a:r>
+          </a:p>
+          <a:p xmlns:a="http://schemas.openxmlformats.org/drawingml/2006/main">
+            <a:r>
+              <a:rPr sz="1400"/>
+              <a:t>Antwoordmodel: https://github.com/meijer1973/4veco-lessen/blob/a8940a7a79e22857a3e306a91fe923c48c63e716/Boek%202%20-%20Kosten%2C%20opbrengsten%2C%20elasticiteit%20en%20surplus/edities/chat-2026/bronnen/H2/2.2%20Elasticiteit%20%E2%80%93%20antwoorden.md</a:t>
             </a:r>
           </a:p>
           <a:p xmlns:a="http://schemas.openxmlformats.org/drawingml/2006/main">
@@ -3391,19 +3391,19 @@
           <a:p xmlns:a="http://schemas.openxmlformats.org/drawingml/2006/main">
             <a:r>
               <a:rPr sz="1400"/>
-              <a:t>Bron: Boek 2, chatuitgave 2026, revisie 21 september 2026. Leerlingenboek, gedrukte pagina 38.</a:t>
-            </a:r>
-          </a:p>
-          <a:p xmlns:a="http://schemas.openxmlformats.org/drawingml/2006/main">
-            <a:r>
-              <a:rPr sz="1400"/>
-              <a:t>https://github.com/meijer1973/4veco-lessen/blob/f2660032cf7e4e3bbab96cf32863d06a38bd74bc/Boek%202%20-%20Kosten%2C%20opbrengsten%2C%20elasticiteit%20en%20surplus/edities/chat-2026/boek/Boek_2_Compleet.pdf</a:t>
-            </a:r>
-          </a:p>
-          <a:p xmlns:a="http://schemas.openxmlformats.org/drawingml/2006/main">
-            <a:r>
-              <a:rPr sz="1400"/>
-              <a:t>Antwoordmodel: https://github.com/meijer1973/4veco-lessen/blob/f2660032cf7e4e3bbab96cf32863d06a38bd74bc/Boek%202%20-%20Kosten%2C%20opbrengsten%2C%20elasticiteit%20en%20surplus/edities/chat-2026/bronnen/H2/2.2%20Elasticiteit%20%E2%80%93%20antwoorden.md</a:t>
+              <a:t>Bron: Boek 2, chatuitgave 2026, revisie 1 oktober 2026. Leerlingenboek, gedrukte pagina 39.</a:t>
+            </a:r>
+          </a:p>
+          <a:p xmlns:a="http://schemas.openxmlformats.org/drawingml/2006/main">
+            <a:r>
+              <a:rPr sz="1400"/>
+              <a:t>https://github.com/meijer1973/4veco-lessen/blob/a8940a7a79e22857a3e306a91fe923c48c63e716/Boek%202%20-%20Kosten%2C%20opbrengsten%2C%20elasticiteit%20en%20surplus/edities/chat-2026/boek/Boek_2_Compleet.pdf</a:t>
+            </a:r>
+          </a:p>
+          <a:p xmlns:a="http://schemas.openxmlformats.org/drawingml/2006/main">
+            <a:r>
+              <a:rPr sz="1400"/>
+              <a:t>Antwoordmodel: https://github.com/meijer1973/4veco-lessen/blob/a8940a7a79e22857a3e306a91fe923c48c63e716/Boek%202%20-%20Kosten%2C%20opbrengsten%2C%20elasticiteit%20en%20surplus/edities/chat-2026/bronnen/H2/2.2%20Elasticiteit%20%E2%80%93%20antwoorden.md</a:t>
             </a:r>
           </a:p>
           <a:p xmlns:a="http://schemas.openxmlformats.org/drawingml/2006/main">
@@ -3528,19 +3528,19 @@
           <a:p xmlns:a="http://schemas.openxmlformats.org/drawingml/2006/main">
             <a:r>
               <a:rPr sz="1400"/>
-              <a:t>Bron: Boek 2, chatuitgave 2026, revisie 21 september 2026. Dit is een afzonderlijk, door de presentatiemaker bedacht uitlegvoorbeeld met eigen context en gegevens. Het komt niet uit een boekopgave. Het boek is alleen de bron voor de methode (p. 38–39).</a:t>
-            </a:r>
-          </a:p>
-          <a:p xmlns:a="http://schemas.openxmlformats.org/drawingml/2006/main">
-            <a:r>
-              <a:rPr sz="1400"/>
-              <a:t>https://github.com/meijer1973/4veco-lessen/blob/f2660032cf7e4e3bbab96cf32863d06a38bd74bc/Boek%202%20-%20Kosten%2C%20opbrengsten%2C%20elasticiteit%20en%20surplus/edities/chat-2026/boek/Boek_2_Compleet.pdf</a:t>
-            </a:r>
-          </a:p>
-          <a:p xmlns:a="http://schemas.openxmlformats.org/drawingml/2006/main">
-            <a:r>
-              <a:rPr sz="1400"/>
-              <a:t>Antwoordmodel: https://github.com/meijer1973/4veco-lessen/blob/f2660032cf7e4e3bbab96cf32863d06a38bd74bc/Boek%202%20-%20Kosten%2C%20opbrengsten%2C%20elasticiteit%20en%20surplus/edities/chat-2026/bronnen/H2/2.2%20Elasticiteit%20%E2%80%93%20antwoorden.md</a:t>
+              <a:t>Bron: Boek 2, chatuitgave 2026, revisie 1 oktober 2026. Dit is een afzonderlijk, door de presentatiemaker bedacht uitlegvoorbeeld met eigen context en gegevens. Het komt niet uit een boekopgave. Het boek is alleen de bron voor de methode (p. 39–40).</a:t>
+            </a:r>
+          </a:p>
+          <a:p xmlns:a="http://schemas.openxmlformats.org/drawingml/2006/main">
+            <a:r>
+              <a:rPr sz="1400"/>
+              <a:t>https://github.com/meijer1973/4veco-lessen/blob/a8940a7a79e22857a3e306a91fe923c48c63e716/Boek%202%20-%20Kosten%2C%20opbrengsten%2C%20elasticiteit%20en%20surplus/edities/chat-2026/boek/Boek_2_Compleet.pdf</a:t>
+            </a:r>
+          </a:p>
+          <a:p xmlns:a="http://schemas.openxmlformats.org/drawingml/2006/main">
+            <a:r>
+              <a:rPr sz="1400"/>
+              <a:t>Antwoordmodel: https://github.com/meijer1973/4veco-lessen/blob/a8940a7a79e22857a3e306a91fe923c48c63e716/Boek%202%20-%20Kosten%2C%20opbrengsten%2C%20elasticiteit%20en%20surplus/edities/chat-2026/bronnen/H2/2.2%20Elasticiteit%20%E2%80%93%20antwoorden.md</a:t>
             </a:r>
           </a:p>
           <a:p xmlns:a="http://schemas.openxmlformats.org/drawingml/2006/main">
@@ -3665,19 +3665,19 @@
           <a:p xmlns:a="http://schemas.openxmlformats.org/drawingml/2006/main">
             <a:r>
               <a:rPr sz="1400"/>
-              <a:t>Bron: Boek 2, chatuitgave 2026, revisie 21 september 2026. Dit is een afzonderlijk, door de presentatiemaker bedacht uitlegvoorbeeld met eigen context en gegevens. Het komt niet uit een boekopgave. Het boek is alleen de bron voor de methode (p. 38–39).</a:t>
-            </a:r>
-          </a:p>
-          <a:p xmlns:a="http://schemas.openxmlformats.org/drawingml/2006/main">
-            <a:r>
-              <a:rPr sz="1400"/>
-              <a:t>https://github.com/meijer1973/4veco-lessen/blob/f2660032cf7e4e3bbab96cf32863d06a38bd74bc/Boek%202%20-%20Kosten%2C%20opbrengsten%2C%20elasticiteit%20en%20surplus/edities/chat-2026/boek/Boek_2_Compleet.pdf</a:t>
-            </a:r>
-          </a:p>
-          <a:p xmlns:a="http://schemas.openxmlformats.org/drawingml/2006/main">
-            <a:r>
-              <a:rPr sz="1400"/>
-              <a:t>Antwoordmodel: https://github.com/meijer1973/4veco-lessen/blob/f2660032cf7e4e3bbab96cf32863d06a38bd74bc/Boek%202%20-%20Kosten%2C%20opbrengsten%2C%20elasticiteit%20en%20surplus/edities/chat-2026/bronnen/H2/2.2%20Elasticiteit%20%E2%80%93%20antwoorden.md</a:t>
+              <a:t>Bron: Boek 2, chatuitgave 2026, revisie 1 oktober 2026. Dit is een afzonderlijk, door de presentatiemaker bedacht uitlegvoorbeeld met eigen context en gegevens. Het komt niet uit een boekopgave. Het boek is alleen de bron voor de methode (p. 39–40).</a:t>
+            </a:r>
+          </a:p>
+          <a:p xmlns:a="http://schemas.openxmlformats.org/drawingml/2006/main">
+            <a:r>
+              <a:rPr sz="1400"/>
+              <a:t>https://github.com/meijer1973/4veco-lessen/blob/a8940a7a79e22857a3e306a91fe923c48c63e716/Boek%202%20-%20Kosten%2C%20opbrengsten%2C%20elasticiteit%20en%20surplus/edities/chat-2026/boek/Boek_2_Compleet.pdf</a:t>
+            </a:r>
+          </a:p>
+          <a:p xmlns:a="http://schemas.openxmlformats.org/drawingml/2006/main">
+            <a:r>
+              <a:rPr sz="1400"/>
+              <a:t>Antwoordmodel: https://github.com/meijer1973/4veco-lessen/blob/a8940a7a79e22857a3e306a91fe923c48c63e716/Boek%202%20-%20Kosten%2C%20opbrengsten%2C%20elasticiteit%20en%20surplus/edities/chat-2026/bronnen/H2/2.2%20Elasticiteit%20%E2%80%93%20antwoorden.md</a:t>
             </a:r>
           </a:p>
           <a:p xmlns:a="http://schemas.openxmlformats.org/drawingml/2006/main">
@@ -3751,7 +3751,7 @@
   </p:cSld>
   <p:clrMap bg1="lt1" tx1="dk1" bg2="lt2" tx2="dk2" accent1="accent1" accent2="accent2" accent3="accent3" accent4="accent4" accent5="accent5" accent6="accent6" hlink="hlink" folHlink="folHlink"/>
   <p:sldLayoutIdLst>
-    <p:sldLayoutId xmlns:r="http://schemas.openxmlformats.org/officeDocument/2006/relationships" id="2147483649" r:id="Rf82b9ba362694e40"/>
+    <p:sldLayoutId xmlns:r="http://schemas.openxmlformats.org/officeDocument/2006/relationships" id="2147483649" r:id="R0561ebce32ba4732"/>
   </p:sldLayoutIdLst>
   <p:txStyles>
     <p:titleStyle>
@@ -4578,7 +4578,7 @@
           <p:cNvPr id="29" name="Deze les: §2.2.1 Prijselasticiteit">
             <a:extLst xmlns:a="http://schemas.openxmlformats.org/drawingml/2006/main">
               <a:ext uri="{FF2B5EF4-FFF2-40B4-BE49-F238E27FC236}">
-                <a16:creationId xmlns:a16="http://schemas.microsoft.com/office/drawing/2014/main" id="{7A9327FF-B225-46B2-8808-1634AC09E2AA}"/>
+                <a16:creationId xmlns:a16="http://schemas.microsoft.com/office/drawing/2014/main" id="{D2DC3FB1-B008-4BCC-BB22-3FD40C128A8D}"/>
               </a:ext>
             </a:extLst>
           </p:cNvPr>
@@ -4635,7 +4635,7 @@
           <p:cNvPr id="2" name="">
             <a:extLst xmlns:a="http://schemas.openxmlformats.org/drawingml/2006/main">
               <a:ext uri="{FF2B5EF4-FFF2-40B4-BE49-F238E27FC236}">
-                <a16:creationId xmlns:a16="http://schemas.microsoft.com/office/drawing/2014/main" id="{0D8A1C96-7EE3-4343-BB92-E4017503E2B8}"/>
+                <a16:creationId xmlns:a16="http://schemas.microsoft.com/office/drawing/2014/main" id="{EBBD4B9E-5EC4-44D5-B994-325C950D4D0C}"/>
               </a:ext>
             </a:extLst>
           </p:cNvPr>
@@ -4664,7 +4664,7 @@
           <p:cNvPr id="3" name="§2.2.1 Prijselasticiteit">
             <a:extLst xmlns:a="http://schemas.openxmlformats.org/drawingml/2006/main">
               <a:ext uri="{FF2B5EF4-FFF2-40B4-BE49-F238E27FC236}">
-                <a16:creationId xmlns:a16="http://schemas.microsoft.com/office/drawing/2014/main" id="{EF8280EF-F06D-4679-9C54-9FDC8F17617D}"/>
+                <a16:creationId xmlns:a16="http://schemas.microsoft.com/office/drawing/2014/main" id="{C5A0CF20-5F59-478A-8338-2942EE11EF9E}"/>
               </a:ext>
             </a:extLst>
           </p:cNvPr>
@@ -4721,7 +4721,7 @@
           <p:cNvPr id="4" name="slide-number">
             <a:extLst xmlns:a="http://schemas.openxmlformats.org/drawingml/2006/main">
               <a:ext uri="{FF2B5EF4-FFF2-40B4-BE49-F238E27FC236}">
-                <a16:creationId xmlns:a16="http://schemas.microsoft.com/office/drawing/2014/main" id="{1A7D618C-FE37-4A23-A6FC-69EA1549ABD4}"/>
+                <a16:creationId xmlns:a16="http://schemas.microsoft.com/office/drawing/2014/main" id="{22AC195B-8DC9-4110-8EF6-E3489600A15A}"/>
               </a:ext>
             </a:extLst>
           </p:cNvPr>
@@ -4778,7 +4778,7 @@
           <p:cNvPr id="5" name="phase">
             <a:extLst xmlns:a="http://schemas.openxmlformats.org/drawingml/2006/main">
               <a:ext uri="{FF2B5EF4-FFF2-40B4-BE49-F238E27FC236}">
-                <a16:creationId xmlns:a16="http://schemas.microsoft.com/office/drawing/2014/main" id="{EC6632CC-2202-4D2D-951E-D4E4F32C2643}"/>
+                <a16:creationId xmlns:a16="http://schemas.microsoft.com/office/drawing/2014/main" id="{43556534-8B9E-431E-B2FF-0D96CF4DEF07}"/>
               </a:ext>
             </a:extLst>
           </p:cNvPr>
@@ -4835,7 +4835,7 @@
           <p:cNvPr id="6" name="Lesroute">
             <a:extLst xmlns:a="http://schemas.openxmlformats.org/drawingml/2006/main">
               <a:ext uri="{FF2B5EF4-FFF2-40B4-BE49-F238E27FC236}">
-                <a16:creationId xmlns:a16="http://schemas.microsoft.com/office/drawing/2014/main" id="{C4AD30B5-9B6A-45B3-A7A7-99F08B9C2CA6}"/>
+                <a16:creationId xmlns:a16="http://schemas.microsoft.com/office/drawing/2014/main" id="{B5453FDA-9D8B-401B-957D-6BBF75C4CE0D}"/>
               </a:ext>
             </a:extLst>
           </p:cNvPr>
@@ -4892,7 +4892,7 @@
           <p:cNvPr id="7" name="route-number-1">
             <a:extLst xmlns:a="http://schemas.openxmlformats.org/drawingml/2006/main">
               <a:ext uri="{FF2B5EF4-FFF2-40B4-BE49-F238E27FC236}">
-                <a16:creationId xmlns:a16="http://schemas.microsoft.com/office/drawing/2014/main" id="{0DBF210F-B1CC-4E7B-A5F8-96B03681FB25}"/>
+                <a16:creationId xmlns:a16="http://schemas.microsoft.com/office/drawing/2014/main" id="{C6FF820C-0711-4F6F-93C1-994208762F2F}"/>
               </a:ext>
             </a:extLst>
           </p:cNvPr>
@@ -4949,7 +4949,7 @@
           <p:cNvPr id="8" name="route-1">
             <a:extLst xmlns:a="http://schemas.openxmlformats.org/drawingml/2006/main">
               <a:ext uri="{FF2B5EF4-FFF2-40B4-BE49-F238E27FC236}">
-                <a16:creationId xmlns:a16="http://schemas.microsoft.com/office/drawing/2014/main" id="{8CA53B14-D342-4768-AE90-8D89C5F4B9B3}"/>
+                <a16:creationId xmlns:a16="http://schemas.microsoft.com/office/drawing/2014/main" id="{109F42AA-80EA-4E95-B54B-CBD1D527316E}"/>
               </a:ext>
             </a:extLst>
           </p:cNvPr>
@@ -5006,7 +5006,7 @@
           <p:cNvPr id="9" name="route-number-2">
             <a:extLst xmlns:a="http://schemas.openxmlformats.org/drawingml/2006/main">
               <a:ext uri="{FF2B5EF4-FFF2-40B4-BE49-F238E27FC236}">
-                <a16:creationId xmlns:a16="http://schemas.microsoft.com/office/drawing/2014/main" id="{77A705DA-281D-438C-8112-9ECAD2A8F225}"/>
+                <a16:creationId xmlns:a16="http://schemas.microsoft.com/office/drawing/2014/main" id="{A9B2CAC0-D6C5-4EF1-A5E1-85AFFF12BBAA}"/>
               </a:ext>
             </a:extLst>
           </p:cNvPr>
@@ -5063,7 +5063,7 @@
           <p:cNvPr id="10" name="route-2">
             <a:extLst xmlns:a="http://schemas.openxmlformats.org/drawingml/2006/main">
               <a:ext uri="{FF2B5EF4-FFF2-40B4-BE49-F238E27FC236}">
-                <a16:creationId xmlns:a16="http://schemas.microsoft.com/office/drawing/2014/main" id="{3018B910-AC1B-4814-948D-89269CB444CA}"/>
+                <a16:creationId xmlns:a16="http://schemas.microsoft.com/office/drawing/2014/main" id="{8D0FC50D-C293-4B83-B3CD-86DB62E0FB2D}"/>
               </a:ext>
             </a:extLst>
           </p:cNvPr>
@@ -5120,7 +5120,7 @@
           <p:cNvPr id="11" name="route-number-3">
             <a:extLst xmlns:a="http://schemas.openxmlformats.org/drawingml/2006/main">
               <a:ext uri="{FF2B5EF4-FFF2-40B4-BE49-F238E27FC236}">
-                <a16:creationId xmlns:a16="http://schemas.microsoft.com/office/drawing/2014/main" id="{0F31525B-60A7-491E-9E2B-5742095F96F2}"/>
+                <a16:creationId xmlns:a16="http://schemas.microsoft.com/office/drawing/2014/main" id="{F1BA922A-30D3-4CDF-8EA1-5997FB1E73AB}"/>
               </a:ext>
             </a:extLst>
           </p:cNvPr>
@@ -5177,7 +5177,7 @@
           <p:cNvPr id="12" name="route-3">
             <a:extLst xmlns:a="http://schemas.openxmlformats.org/drawingml/2006/main">
               <a:ext uri="{FF2B5EF4-FFF2-40B4-BE49-F238E27FC236}">
-                <a16:creationId xmlns:a16="http://schemas.microsoft.com/office/drawing/2014/main" id="{B7811D59-FAF2-4907-9ACB-B5B23F8861C3}"/>
+                <a16:creationId xmlns:a16="http://schemas.microsoft.com/office/drawing/2014/main" id="{DAE4780C-12DE-4E00-90B6-A893174E9B70}"/>
               </a:ext>
             </a:extLst>
           </p:cNvPr>
@@ -5234,7 +5234,7 @@
           <p:cNvPr id="13" name="route-number-4">
             <a:extLst xmlns:a="http://schemas.openxmlformats.org/drawingml/2006/main">
               <a:ext uri="{FF2B5EF4-FFF2-40B4-BE49-F238E27FC236}">
-                <a16:creationId xmlns:a16="http://schemas.microsoft.com/office/drawing/2014/main" id="{C14C9DD9-9FB7-4859-B49C-E3EBFA32E889}"/>
+                <a16:creationId xmlns:a16="http://schemas.microsoft.com/office/drawing/2014/main" id="{1516B4C5-D0C0-4DF3-8D80-E39EA6496DAB}"/>
               </a:ext>
             </a:extLst>
           </p:cNvPr>
@@ -5291,7 +5291,7 @@
           <p:cNvPr id="14" name="route-4">
             <a:extLst xmlns:a="http://schemas.openxmlformats.org/drawingml/2006/main">
               <a:ext uri="{FF2B5EF4-FFF2-40B4-BE49-F238E27FC236}">
-                <a16:creationId xmlns:a16="http://schemas.microsoft.com/office/drawing/2014/main" id="{3699F0A4-EC09-4EBA-A619-652702357EA8}"/>
+                <a16:creationId xmlns:a16="http://schemas.microsoft.com/office/drawing/2014/main" id="{4D0CD506-D083-4402-A09E-A5BA19E00EF8}"/>
               </a:ext>
             </a:extLst>
           </p:cNvPr>
@@ -5348,7 +5348,7 @@
           <p:cNvPr id="15" name="route-number-5">
             <a:extLst xmlns:a="http://schemas.openxmlformats.org/drawingml/2006/main">
               <a:ext uri="{FF2B5EF4-FFF2-40B4-BE49-F238E27FC236}">
-                <a16:creationId xmlns:a16="http://schemas.microsoft.com/office/drawing/2014/main" id="{B162DB6B-D208-4C00-B9EB-9D94CFB98015}"/>
+                <a16:creationId xmlns:a16="http://schemas.microsoft.com/office/drawing/2014/main" id="{9B75F64D-CCDF-46F2-B023-F14E51C23100}"/>
               </a:ext>
             </a:extLst>
           </p:cNvPr>
@@ -5405,7 +5405,7 @@
           <p:cNvPr id="16" name="route-5">
             <a:extLst xmlns:a="http://schemas.openxmlformats.org/drawingml/2006/main">
               <a:ext uri="{FF2B5EF4-FFF2-40B4-BE49-F238E27FC236}">
-                <a16:creationId xmlns:a16="http://schemas.microsoft.com/office/drawing/2014/main" id="{6621E758-B673-4F2F-9903-EE1CB3542466}"/>
+                <a16:creationId xmlns:a16="http://schemas.microsoft.com/office/drawing/2014/main" id="{270741EF-DA63-4DF7-B9B7-F04A0FD32CE1}"/>
               </a:ext>
             </a:extLst>
           </p:cNvPr>
@@ -5462,7 +5462,7 @@
           <p:cNvPr id="17" name="route-number-6">
             <a:extLst xmlns:a="http://schemas.openxmlformats.org/drawingml/2006/main">
               <a:ext uri="{FF2B5EF4-FFF2-40B4-BE49-F238E27FC236}">
-                <a16:creationId xmlns:a16="http://schemas.microsoft.com/office/drawing/2014/main" id="{B935C6F8-E34A-49D7-9FCE-D315C12DF338}"/>
+                <a16:creationId xmlns:a16="http://schemas.microsoft.com/office/drawing/2014/main" id="{473282B3-6464-43BA-95C4-A210825234C5}"/>
               </a:ext>
             </a:extLst>
           </p:cNvPr>
@@ -5519,7 +5519,7 @@
           <p:cNvPr id="18" name="route-6">
             <a:extLst xmlns:a="http://schemas.openxmlformats.org/drawingml/2006/main">
               <a:ext uri="{FF2B5EF4-FFF2-40B4-BE49-F238E27FC236}">
-                <a16:creationId xmlns:a16="http://schemas.microsoft.com/office/drawing/2014/main" id="{8C060DA0-EF58-430B-AE31-5AFDD767B5C3}"/>
+                <a16:creationId xmlns:a16="http://schemas.microsoft.com/office/drawing/2014/main" id="{876A40A8-78DA-4C74-91E7-E68F8D853029}"/>
               </a:ext>
             </a:extLst>
           </p:cNvPr>
@@ -5576,7 +5576,7 @@
           <p:cNvPr id="19" name="route-number-7">
             <a:extLst xmlns:a="http://schemas.openxmlformats.org/drawingml/2006/main">
               <a:ext uri="{FF2B5EF4-FFF2-40B4-BE49-F238E27FC236}">
-                <a16:creationId xmlns:a16="http://schemas.microsoft.com/office/drawing/2014/main" id="{DBFE8309-72E3-41FF-8C8E-9E4F57F74C84}"/>
+                <a16:creationId xmlns:a16="http://schemas.microsoft.com/office/drawing/2014/main" id="{6778A192-B487-43B1-A5E0-3032E1DBC1C8}"/>
               </a:ext>
             </a:extLst>
           </p:cNvPr>
@@ -5633,7 +5633,7 @@
           <p:cNvPr id="20" name="route-7">
             <a:extLst xmlns:a="http://schemas.openxmlformats.org/drawingml/2006/main">
               <a:ext uri="{FF2B5EF4-FFF2-40B4-BE49-F238E27FC236}">
-                <a16:creationId xmlns:a16="http://schemas.microsoft.com/office/drawing/2014/main" id="{2F2A8187-F1F7-4D08-B00E-BF2F5FCC30DD}"/>
+                <a16:creationId xmlns:a16="http://schemas.microsoft.com/office/drawing/2014/main" id="{3F3DBB66-71DE-4DB8-A359-A37FC9C52A49}"/>
               </a:ext>
             </a:extLst>
           </p:cNvPr>
@@ -5690,7 +5690,7 @@
           <p:cNvPr id="21" name="Lesdoelen">
             <a:extLst xmlns:a="http://schemas.openxmlformats.org/drawingml/2006/main">
               <a:ext uri="{FF2B5EF4-FFF2-40B4-BE49-F238E27FC236}">
-                <a16:creationId xmlns:a16="http://schemas.microsoft.com/office/drawing/2014/main" id="{D69F612E-5BC3-4195-83C3-792483E840EE}"/>
+                <a16:creationId xmlns:a16="http://schemas.microsoft.com/office/drawing/2014/main" id="{5C973B95-5D8F-4A23-82DA-45DAB2F003A1}"/>
               </a:ext>
             </a:extLst>
           </p:cNvPr>
@@ -5747,7 +5747,7 @@
           <p:cNvPr id="22" name="overview-goals">
             <a:extLst xmlns:a="http://schemas.openxmlformats.org/drawingml/2006/main">
               <a:ext uri="{FF2B5EF4-FFF2-40B4-BE49-F238E27FC236}">
-                <a16:creationId xmlns:a16="http://schemas.microsoft.com/office/drawing/2014/main" id="{77981895-80BB-4B1B-A845-BA2C0C716EC5}"/>
+                <a16:creationId xmlns:a16="http://schemas.microsoft.com/office/drawing/2014/main" id="{6E60FBED-A16A-45E2-92FF-58EE707B5360}"/>
               </a:ext>
             </a:extLst>
           </p:cNvPr>
@@ -5850,7 +5850,7 @@
           <p:cNvPr id="23" name="">
             <a:extLst xmlns:a="http://schemas.openxmlformats.org/drawingml/2006/main">
               <a:ext uri="{FF2B5EF4-FFF2-40B4-BE49-F238E27FC236}">
-                <a16:creationId xmlns:a16="http://schemas.microsoft.com/office/drawing/2014/main" id="{275140AA-F5CF-40FD-ACD2-BB69645454A6}"/>
+                <a16:creationId xmlns:a16="http://schemas.microsoft.com/office/drawing/2014/main" id="{AE3133CC-B3AB-48CD-BC7D-06013A28925A}"/>
               </a:ext>
             </a:extLst>
           </p:cNvPr>
@@ -5879,7 +5879,7 @@
           <p:cNvPr id="24" name="Startopdracht">
             <a:extLst xmlns:a="http://schemas.openxmlformats.org/drawingml/2006/main">
               <a:ext uri="{FF2B5EF4-FFF2-40B4-BE49-F238E27FC236}">
-                <a16:creationId xmlns:a16="http://schemas.microsoft.com/office/drawing/2014/main" id="{3C44C1A8-A76C-4734-BCF2-75DF0CB26C05}"/>
+                <a16:creationId xmlns:a16="http://schemas.microsoft.com/office/drawing/2014/main" id="{654B17B5-F6F1-412A-AFB2-C465F19286DE}"/>
               </a:ext>
             </a:extLst>
           </p:cNvPr>
@@ -5936,7 +5936,7 @@
           <p:cNvPr id="25" name="overview-start">
             <a:extLst xmlns:a="http://schemas.openxmlformats.org/drawingml/2006/main">
               <a:ext uri="{FF2B5EF4-FFF2-40B4-BE49-F238E27FC236}">
-                <a16:creationId xmlns:a16="http://schemas.microsoft.com/office/drawing/2014/main" id="{070132CC-DCFB-4C93-B49E-43345C90155F}"/>
+                <a16:creationId xmlns:a16="http://schemas.microsoft.com/office/drawing/2014/main" id="{3DA52AB8-6855-40FD-B842-A905C41EB769}"/>
               </a:ext>
             </a:extLst>
           </p:cNvPr>
@@ -5983,7 +5983,7 @@
                 <a:ea typeface="Arial"/>
                 <a:cs typeface="Arial"/>
               </a:rPr>
-              <a:t>Pagina 40 · Opgaven 1 en 2</a:t>
+              <a:t>Pagina 41 · Opgaven 1 en 2</a:t>
             </a:r>
           </a:p>
           <a:p xmlns:a="http://schemas.openxmlformats.org/drawingml/2006/main">
@@ -6029,7 +6029,7 @@
                 <a:ea typeface="Arial"/>
                 <a:cs typeface="Arial"/>
               </a:rPr>
-              <a:t>2: verkennen met theorie p. 38</a:t>
+              <a:t>2: verkennen met theorie p. 39</a:t>
             </a:r>
           </a:p>
         </p:txBody>
@@ -6039,7 +6039,7 @@
           <p:cNvPr id="26" name="">
             <a:extLst xmlns:a="http://schemas.openxmlformats.org/drawingml/2006/main">
               <a:ext uri="{FF2B5EF4-FFF2-40B4-BE49-F238E27FC236}">
-                <a16:creationId xmlns:a16="http://schemas.microsoft.com/office/drawing/2014/main" id="{92A84AA7-5F59-4444-BBB0-6065B36EEA7A}"/>
+                <a16:creationId xmlns:a16="http://schemas.microsoft.com/office/drawing/2014/main" id="{2F1B98DA-EC01-4340-AD50-51494C377BEF}"/>
               </a:ext>
             </a:extLst>
           </p:cNvPr>
@@ -6068,7 +6068,7 @@
           <p:cNvPr id="27" name="Huiswerk">
             <a:extLst xmlns:a="http://schemas.openxmlformats.org/drawingml/2006/main">
               <a:ext uri="{FF2B5EF4-FFF2-40B4-BE49-F238E27FC236}">
-                <a16:creationId xmlns:a16="http://schemas.microsoft.com/office/drawing/2014/main" id="{A19672AF-D2E3-4CE1-82FA-914CF065633F}"/>
+                <a16:creationId xmlns:a16="http://schemas.microsoft.com/office/drawing/2014/main" id="{3EB7DE2C-64B0-405D-BA2D-F2B493F13453}"/>
               </a:ext>
             </a:extLst>
           </p:cNvPr>
@@ -6125,7 +6125,7 @@
           <p:cNvPr id="28" name="overview-homework">
             <a:extLst xmlns:a="http://schemas.openxmlformats.org/drawingml/2006/main">
               <a:ext uri="{FF2B5EF4-FFF2-40B4-BE49-F238E27FC236}">
-                <a16:creationId xmlns:a16="http://schemas.microsoft.com/office/drawing/2014/main" id="{CD769EA5-C196-4D73-9A99-FCC620841470}"/>
+                <a16:creationId xmlns:a16="http://schemas.microsoft.com/office/drawing/2014/main" id="{049C4FE6-B772-4619-9D65-2B2756C57AC9}"/>
               </a:ext>
             </a:extLst>
           </p:cNvPr>
@@ -6272,7 +6272,7 @@
     </p:spTree>
     <p:extLst>
       <p:ext uri="{BB962C8B-B14F-4D97-AF65-F5344CB8AC3E}">
-        <p14:creationId xmlns:p14="http://schemas.microsoft.com/office/powerpoint/2010/main" val="165498226"/>
+        <p14:creationId xmlns:p14="http://schemas.microsoft.com/office/powerpoint/2010/main" val="1714683960"/>
       </p:ext>
     </p:extLst>
   </p:cSld>
@@ -6303,7 +6303,7 @@
           <p:cNvPr id="10" name="Een prijsdaling in een nieuwe situatie">
             <a:extLst xmlns:a="http://schemas.openxmlformats.org/drawingml/2006/main">
               <a:ext uri="{FF2B5EF4-FFF2-40B4-BE49-F238E27FC236}">
-                <a16:creationId xmlns:a16="http://schemas.microsoft.com/office/drawing/2014/main" id="{F9C5112A-1A94-4108-BF61-4CEAD579A887}"/>
+                <a16:creationId xmlns:a16="http://schemas.microsoft.com/office/drawing/2014/main" id="{F96621C1-F807-466A-B3D2-1D8153286005}"/>
               </a:ext>
             </a:extLst>
           </p:cNvPr>
@@ -6360,7 +6360,7 @@
           <p:cNvPr id="2" name="">
             <a:extLst xmlns:a="http://schemas.openxmlformats.org/drawingml/2006/main">
               <a:ext uri="{FF2B5EF4-FFF2-40B4-BE49-F238E27FC236}">
-                <a16:creationId xmlns:a16="http://schemas.microsoft.com/office/drawing/2014/main" id="{C3EC88C6-ABBC-4195-BA06-8C659FD4CEF5}"/>
+                <a16:creationId xmlns:a16="http://schemas.microsoft.com/office/drawing/2014/main" id="{74AD3556-99FF-4C1F-AE3A-2D8200E8BF36}"/>
               </a:ext>
             </a:extLst>
           </p:cNvPr>
@@ -6389,7 +6389,7 @@
           <p:cNvPr id="3" name="§2.2.1 Prijselasticiteit">
             <a:extLst xmlns:a="http://schemas.openxmlformats.org/drawingml/2006/main">
               <a:ext uri="{FF2B5EF4-FFF2-40B4-BE49-F238E27FC236}">
-                <a16:creationId xmlns:a16="http://schemas.microsoft.com/office/drawing/2014/main" id="{9F2A2348-F15B-422E-ADA2-3F4B76E4600D}"/>
+                <a16:creationId xmlns:a16="http://schemas.microsoft.com/office/drawing/2014/main" id="{68922645-7441-49E2-B943-D3D6D8B2166D}"/>
               </a:ext>
             </a:extLst>
           </p:cNvPr>
@@ -6446,7 +6446,7 @@
           <p:cNvPr id="4" name="slide-number">
             <a:extLst xmlns:a="http://schemas.openxmlformats.org/drawingml/2006/main">
               <a:ext uri="{FF2B5EF4-FFF2-40B4-BE49-F238E27FC236}">
-                <a16:creationId xmlns:a16="http://schemas.microsoft.com/office/drawing/2014/main" id="{E60F6F48-413D-4E0A-8711-4ADB7518D0B9}"/>
+                <a16:creationId xmlns:a16="http://schemas.microsoft.com/office/drawing/2014/main" id="{0569A5A9-3F8B-4E0D-8689-449B8ED904DD}"/>
               </a:ext>
             </a:extLst>
           </p:cNvPr>
@@ -6503,7 +6503,7 @@
           <p:cNvPr id="5" name="Uitlegvoorbeeld — niet uit het boek">
             <a:extLst xmlns:a="http://schemas.openxmlformats.org/drawingml/2006/main">
               <a:ext uri="{FF2B5EF4-FFF2-40B4-BE49-F238E27FC236}">
-                <a16:creationId xmlns:a16="http://schemas.microsoft.com/office/drawing/2014/main" id="{29D00944-BE18-4D55-BB48-92916DE19B72}"/>
+                <a16:creationId xmlns:a16="http://schemas.microsoft.com/office/drawing/2014/main" id="{160CDC45-DBEF-4DFA-8D34-C377DB33F707}"/>
               </a:ext>
             </a:extLst>
           </p:cNvPr>
@@ -6560,7 +6560,7 @@
           <p:cNvPr id="6" name="BoekBox: maandabonnement">
             <a:extLst xmlns:a="http://schemas.openxmlformats.org/drawingml/2006/main">
               <a:ext uri="{FF2B5EF4-FFF2-40B4-BE49-F238E27FC236}">
-                <a16:creationId xmlns:a16="http://schemas.microsoft.com/office/drawing/2014/main" id="{B18E0894-1D12-4A4B-A7F5-F7C38C147D4A}"/>
+                <a16:creationId xmlns:a16="http://schemas.microsoft.com/office/drawing/2014/main" id="{80FA1D22-AC78-4BD7-9409-36BDF0ABC6AD}"/>
               </a:ext>
             </a:extLst>
           </p:cNvPr>
@@ -6862,7 +6862,7 @@
           <p:cNvPr id="8" name="%ΔP = (14 − 16) / 16 × 100% = −12,5%">
             <a:extLst xmlns:a="http://schemas.openxmlformats.org/drawingml/2006/main">
               <a:ext uri="{FF2B5EF4-FFF2-40B4-BE49-F238E27FC236}">
-                <a16:creationId xmlns:a16="http://schemas.microsoft.com/office/drawing/2014/main" id="{2682B102-48F7-48C5-8540-02E4E6EBD2B0}"/>
+                <a16:creationId xmlns:a16="http://schemas.microsoft.com/office/drawing/2014/main" id="{3123EBB1-BB43-42A6-B795-82DA2EDC4E42}"/>
               </a:ext>
             </a:extLst>
           </p:cNvPr>
@@ -6919,7 +6919,7 @@
           <p:cNvPr id="9" name="%ΔQv = (92 − 80) / 80 × 100% = +15%">
             <a:extLst xmlns:a="http://schemas.openxmlformats.org/drawingml/2006/main">
               <a:ext uri="{FF2B5EF4-FFF2-40B4-BE49-F238E27FC236}">
-                <a16:creationId xmlns:a16="http://schemas.microsoft.com/office/drawing/2014/main" id="{A42E6288-76E9-4E56-8605-269CFF064613}"/>
+                <a16:creationId xmlns:a16="http://schemas.microsoft.com/office/drawing/2014/main" id="{81BCE25F-3490-4686-80CA-4FFAC5682935}"/>
               </a:ext>
             </a:extLst>
           </p:cNvPr>
@@ -6974,7 +6974,7 @@
     </p:spTree>
     <p:extLst>
       <p:ext uri="{BB962C8B-B14F-4D97-AF65-F5344CB8AC3E}">
-        <p14:creationId xmlns:p14="http://schemas.microsoft.com/office/powerpoint/2010/main" val="1830792827"/>
+        <p14:creationId xmlns:p14="http://schemas.microsoft.com/office/powerpoint/2010/main" val="179036446"/>
       </p:ext>
     </p:extLst>
   </p:cSld>
@@ -7005,7 +7005,7 @@
           <p:cNvPr id="11" name="Een negatieve Ev bij een stijgende hoeveelheid">
             <a:extLst xmlns:a="http://schemas.openxmlformats.org/drawingml/2006/main">
               <a:ext uri="{FF2B5EF4-FFF2-40B4-BE49-F238E27FC236}">
-                <a16:creationId xmlns:a16="http://schemas.microsoft.com/office/drawing/2014/main" id="{396F8C9A-B56D-4433-B91B-026E85F9D7F3}"/>
+                <a16:creationId xmlns:a16="http://schemas.microsoft.com/office/drawing/2014/main" id="{0BECB55A-8AE4-47DE-AACC-3E2545B595BF}"/>
               </a:ext>
             </a:extLst>
           </p:cNvPr>
@@ -7062,7 +7062,7 @@
           <p:cNvPr id="2" name="">
             <a:extLst xmlns:a="http://schemas.openxmlformats.org/drawingml/2006/main">
               <a:ext uri="{FF2B5EF4-FFF2-40B4-BE49-F238E27FC236}">
-                <a16:creationId xmlns:a16="http://schemas.microsoft.com/office/drawing/2014/main" id="{6A0234F4-F407-4EAC-BA06-A8B8AA6A42D7}"/>
+                <a16:creationId xmlns:a16="http://schemas.microsoft.com/office/drawing/2014/main" id="{67F8CCE1-3638-4EB6-ABA4-E8465060B6A6}"/>
               </a:ext>
             </a:extLst>
           </p:cNvPr>
@@ -7091,7 +7091,7 @@
           <p:cNvPr id="3" name="§2.2.1 Prijselasticiteit">
             <a:extLst xmlns:a="http://schemas.openxmlformats.org/drawingml/2006/main">
               <a:ext uri="{FF2B5EF4-FFF2-40B4-BE49-F238E27FC236}">
-                <a16:creationId xmlns:a16="http://schemas.microsoft.com/office/drawing/2014/main" id="{20C5AEDC-DA4A-4976-9744-410A8F055487}"/>
+                <a16:creationId xmlns:a16="http://schemas.microsoft.com/office/drawing/2014/main" id="{40B03444-E98E-4A0D-9027-0FD1C66092EE}"/>
               </a:ext>
             </a:extLst>
           </p:cNvPr>
@@ -7148,7 +7148,7 @@
           <p:cNvPr id="4" name="slide-number">
             <a:extLst xmlns:a="http://schemas.openxmlformats.org/drawingml/2006/main">
               <a:ext uri="{FF2B5EF4-FFF2-40B4-BE49-F238E27FC236}">
-                <a16:creationId xmlns:a16="http://schemas.microsoft.com/office/drawing/2014/main" id="{C4E0AABB-26A7-464F-ABCE-6845ED2A79F5}"/>
+                <a16:creationId xmlns:a16="http://schemas.microsoft.com/office/drawing/2014/main" id="{90F02DD4-E25D-4988-AC55-CEB75F99BB3D}"/>
               </a:ext>
             </a:extLst>
           </p:cNvPr>
@@ -7205,7 +7205,7 @@
           <p:cNvPr id="5" name="Uitlegvoorbeeld — niet uit het boek">
             <a:extLst xmlns:a="http://schemas.openxmlformats.org/drawingml/2006/main">
               <a:ext uri="{FF2B5EF4-FFF2-40B4-BE49-F238E27FC236}">
-                <a16:creationId xmlns:a16="http://schemas.microsoft.com/office/drawing/2014/main" id="{948D4E70-90E9-4FF9-8D18-8AF0F73DCC3C}"/>
+                <a16:creationId xmlns:a16="http://schemas.microsoft.com/office/drawing/2014/main" id="{0FF587B0-8BD6-4CD1-AC8F-FB69175A3A54}"/>
               </a:ext>
             </a:extLst>
           </p:cNvPr>
@@ -7262,7 +7262,7 @@
           <p:cNvPr id="6" name="BoekBox">
             <a:extLst xmlns:a="http://schemas.openxmlformats.org/drawingml/2006/main">
               <a:ext uri="{FF2B5EF4-FFF2-40B4-BE49-F238E27FC236}">
-                <a16:creationId xmlns:a16="http://schemas.microsoft.com/office/drawing/2014/main" id="{ABECE3CA-0ED2-43F6-9E50-7F97673920FF}"/>
+                <a16:creationId xmlns:a16="http://schemas.microsoft.com/office/drawing/2014/main" id="{8B9BB41C-C690-418F-B67A-F6962AE51B1F}"/>
               </a:ext>
             </a:extLst>
           </p:cNvPr>
@@ -7319,7 +7319,7 @@
           <p:cNvPr id="7" name="Ev = +15% / −12,5% = −1,2">
             <a:extLst xmlns:a="http://schemas.openxmlformats.org/drawingml/2006/main">
               <a:ext uri="{FF2B5EF4-FFF2-40B4-BE49-F238E27FC236}">
-                <a16:creationId xmlns:a16="http://schemas.microsoft.com/office/drawing/2014/main" id="{47CC134F-39E2-48B7-8F34-53BB6A4DA1C9}"/>
+                <a16:creationId xmlns:a16="http://schemas.microsoft.com/office/drawing/2014/main" id="{6A6A6773-CE48-46FA-8C90-3B987B4E83AA}"/>
               </a:ext>
             </a:extLst>
           </p:cNvPr>
@@ -7376,7 +7376,7 @@
           <p:cNvPr id="8" name="−1,2 &lt; −1: prijselastische vraag">
             <a:extLst xmlns:a="http://schemas.openxmlformats.org/drawingml/2006/main">
               <a:ext uri="{FF2B5EF4-FFF2-40B4-BE49-F238E27FC236}">
-                <a16:creationId xmlns:a16="http://schemas.microsoft.com/office/drawing/2014/main" id="{256457E4-C001-4D19-8130-AFC4ABB89A37}"/>
+                <a16:creationId xmlns:a16="http://schemas.microsoft.com/office/drawing/2014/main" id="{855586E8-04A8-4A15-87C0-BF3C0C5E6F3E}"/>
               </a:ext>
             </a:extLst>
           </p:cNvPr>
@@ -7433,7 +7433,7 @@
           <p:cNvPr id="9" name="De hoeveelheid stijgt procentueel 1,2 maal zo sterk&#10;als">
             <a:extLst xmlns:a="http://schemas.openxmlformats.org/drawingml/2006/main">
               <a:ext uri="{FF2B5EF4-FFF2-40B4-BE49-F238E27FC236}">
-                <a16:creationId xmlns:a16="http://schemas.microsoft.com/office/drawing/2014/main" id="{1BA3092C-3B9B-486A-BA8C-697CBCDE9C10}"/>
+                <a16:creationId xmlns:a16="http://schemas.microsoft.com/office/drawing/2014/main" id="{1B130459-6DA0-488B-AC8F-BE6FEEC9A007}"/>
               </a:ext>
             </a:extLst>
           </p:cNvPr>
@@ -7513,7 +7513,7 @@
           <p:cNvPr id="10" name="Waarom blijft Ev negatief?">
             <a:extLst xmlns:a="http://schemas.openxmlformats.org/drawingml/2006/main">
               <a:ext uri="{FF2B5EF4-FFF2-40B4-BE49-F238E27FC236}">
-                <a16:creationId xmlns:a16="http://schemas.microsoft.com/office/drawing/2014/main" id="{242ED6FF-E8AC-41B6-81F4-47346E96656F}"/>
+                <a16:creationId xmlns:a16="http://schemas.microsoft.com/office/drawing/2014/main" id="{6F1E3EAA-779D-4F70-A6FE-D20B9E43EE3C}"/>
               </a:ext>
             </a:extLst>
           </p:cNvPr>
@@ -7568,7 +7568,7 @@
     </p:spTree>
     <p:extLst>
       <p:ext uri="{BB962C8B-B14F-4D97-AF65-F5344CB8AC3E}">
-        <p14:creationId xmlns:p14="http://schemas.microsoft.com/office/powerpoint/2010/main" val="2067989337"/>
+        <p14:creationId xmlns:p14="http://schemas.microsoft.com/office/powerpoint/2010/main" val="1437925408"/>
       </p:ext>
     </p:extLst>
   </p:cSld>
@@ -7599,7 +7599,7 @@
           <p:cNvPr id="11" name="Terug naar startopgave 2">
             <a:extLst xmlns:a="http://schemas.openxmlformats.org/drawingml/2006/main">
               <a:ext uri="{FF2B5EF4-FFF2-40B4-BE49-F238E27FC236}">
-                <a16:creationId xmlns:a16="http://schemas.microsoft.com/office/drawing/2014/main" id="{1E472D11-7FDA-45E2-8736-78028FB3D8EF}"/>
+                <a16:creationId xmlns:a16="http://schemas.microsoft.com/office/drawing/2014/main" id="{25AAA1EE-3B07-4783-A418-8902AC28E394}"/>
               </a:ext>
             </a:extLst>
           </p:cNvPr>
@@ -7656,7 +7656,7 @@
           <p:cNvPr id="2" name="">
             <a:extLst xmlns:a="http://schemas.openxmlformats.org/drawingml/2006/main">
               <a:ext uri="{FF2B5EF4-FFF2-40B4-BE49-F238E27FC236}">
-                <a16:creationId xmlns:a16="http://schemas.microsoft.com/office/drawing/2014/main" id="{43F2F73B-7C6D-4306-9AD7-B59A819B2405}"/>
+                <a16:creationId xmlns:a16="http://schemas.microsoft.com/office/drawing/2014/main" id="{8AC19071-2992-44D2-BD89-2419CAED070B}"/>
               </a:ext>
             </a:extLst>
           </p:cNvPr>
@@ -7685,7 +7685,7 @@
           <p:cNvPr id="3" name="§2.2.1 Prijselasticiteit · Startopgave 2 · Boekpagina 4">
             <a:extLst xmlns:a="http://schemas.openxmlformats.org/drawingml/2006/main">
               <a:ext uri="{FF2B5EF4-FFF2-40B4-BE49-F238E27FC236}">
-                <a16:creationId xmlns:a16="http://schemas.microsoft.com/office/drawing/2014/main" id="{1FC2C811-7927-4CE7-AF51-E405C3FDB4A1}"/>
+                <a16:creationId xmlns:a16="http://schemas.microsoft.com/office/drawing/2014/main" id="{A3689827-A4EB-49E8-B228-6BCEAF674646}"/>
               </a:ext>
             </a:extLst>
           </p:cNvPr>
@@ -7732,7 +7732,7 @@
                 <a:ea typeface="Arial"/>
                 <a:cs typeface="Arial"/>
               </a:rPr>
-              <a:t>§2.2.1 Prijselasticiteit · Startopgave 2 · Boekpagina 40</a:t>
+              <a:t>§2.2.1 Prijselasticiteit · Startopgave 2 · Boekpagina 41</a:t>
             </a:r>
           </a:p>
         </p:txBody>
@@ -7742,7 +7742,7 @@
           <p:cNvPr id="4" name="slide-number">
             <a:extLst xmlns:a="http://schemas.openxmlformats.org/drawingml/2006/main">
               <a:ext uri="{FF2B5EF4-FFF2-40B4-BE49-F238E27FC236}">
-                <a16:creationId xmlns:a16="http://schemas.microsoft.com/office/drawing/2014/main" id="{0F4C73DD-8968-41B5-B50D-D5F295D5B0A0}"/>
+                <a16:creationId xmlns:a16="http://schemas.microsoft.com/office/drawing/2014/main" id="{961BD14A-430E-443C-AD7B-CD47648A36B1}"/>
               </a:ext>
             </a:extLst>
           </p:cNvPr>
@@ -7799,7 +7799,7 @@
           <p:cNvPr id="5" name="2a">
             <a:extLst xmlns:a="http://schemas.openxmlformats.org/drawingml/2006/main">
               <a:ext uri="{FF2B5EF4-FFF2-40B4-BE49-F238E27FC236}">
-                <a16:creationId xmlns:a16="http://schemas.microsoft.com/office/drawing/2014/main" id="{51C8D6B0-7206-4F43-800B-5E2B1491146E}"/>
+                <a16:creationId xmlns:a16="http://schemas.microsoft.com/office/drawing/2014/main" id="{89357391-6884-4D14-8747-0D92002EAE89}"/>
               </a:ext>
             </a:extLst>
           </p:cNvPr>
@@ -7856,7 +7856,7 @@
           <p:cNvPr id="6" name="Ev = −0,4: welke indeling past?&#10;Leg de relatieve reacti">
             <a:extLst xmlns:a="http://schemas.openxmlformats.org/drawingml/2006/main">
               <a:ext uri="{FF2B5EF4-FFF2-40B4-BE49-F238E27FC236}">
-                <a16:creationId xmlns:a16="http://schemas.microsoft.com/office/drawing/2014/main" id="{3CE3275D-C69C-4B0E-B2E3-818897F30D0D}"/>
+                <a16:creationId xmlns:a16="http://schemas.microsoft.com/office/drawing/2014/main" id="{81218747-F9E2-405F-8492-31BAC7B27ED2}"/>
               </a:ext>
             </a:extLst>
           </p:cNvPr>
@@ -7936,7 +7936,7 @@
           <p:cNvPr id="7" name="">
             <a:extLst xmlns:a="http://schemas.openxmlformats.org/drawingml/2006/main">
               <a:ext uri="{FF2B5EF4-FFF2-40B4-BE49-F238E27FC236}">
-                <a16:creationId xmlns:a16="http://schemas.microsoft.com/office/drawing/2014/main" id="{D4660657-7299-43E3-BFEC-B2E56D282DF7}"/>
+                <a16:creationId xmlns:a16="http://schemas.microsoft.com/office/drawing/2014/main" id="{831DEC90-9750-4F95-8BCE-639CB279905E}"/>
               </a:ext>
             </a:extLst>
           </p:cNvPr>
@@ -7965,7 +7965,7 @@
           <p:cNvPr id="8" name="2b">
             <a:extLst xmlns:a="http://schemas.openxmlformats.org/drawingml/2006/main">
               <a:ext uri="{FF2B5EF4-FFF2-40B4-BE49-F238E27FC236}">
-                <a16:creationId xmlns:a16="http://schemas.microsoft.com/office/drawing/2014/main" id="{BB1A2EB9-07EB-4F49-8015-92F5A656467C}"/>
+                <a16:creationId xmlns:a16="http://schemas.microsoft.com/office/drawing/2014/main" id="{84C903C1-2481-49A2-98F8-9BFEA2A6C027}"/>
               </a:ext>
             </a:extLst>
           </p:cNvPr>
@@ -8022,7 +8022,7 @@
           <p:cNvPr id="9" name="Een leerling noemt de reactie bij Ev = −2 zwakker&#10;dan b">
             <a:extLst xmlns:a="http://schemas.openxmlformats.org/drawingml/2006/main">
               <a:ext uri="{FF2B5EF4-FFF2-40B4-BE49-F238E27FC236}">
-                <a16:creationId xmlns:a16="http://schemas.microsoft.com/office/drawing/2014/main" id="{54A348EA-E30E-4001-ADCA-3E08928888AA}"/>
+                <a16:creationId xmlns:a16="http://schemas.microsoft.com/office/drawing/2014/main" id="{7C7A142B-4AA5-4BA5-B947-1470BB0E00DA}"/>
               </a:ext>
             </a:extLst>
           </p:cNvPr>
@@ -8102,7 +8102,7 @@
           <p:cNvPr id="10" name="Herzie je eerste antwoord met de uitleg van deze les.">
             <a:extLst xmlns:a="http://schemas.openxmlformats.org/drawingml/2006/main">
               <a:ext uri="{FF2B5EF4-FFF2-40B4-BE49-F238E27FC236}">
-                <a16:creationId xmlns:a16="http://schemas.microsoft.com/office/drawing/2014/main" id="{013CEA3A-695D-437D-8B77-AA4FEBC39A5A}"/>
+                <a16:creationId xmlns:a16="http://schemas.microsoft.com/office/drawing/2014/main" id="{C25F2CEF-BE0B-4C7E-8F88-E4F9E243DD7E}"/>
               </a:ext>
             </a:extLst>
           </p:cNvPr>
@@ -8157,7 +8157,7 @@
     </p:spTree>
     <p:extLst>
       <p:ext uri="{BB962C8B-B14F-4D97-AF65-F5344CB8AC3E}">
-        <p14:creationId xmlns:p14="http://schemas.microsoft.com/office/powerpoint/2010/main" val="1613147628"/>
+        <p14:creationId xmlns:p14="http://schemas.microsoft.com/office/powerpoint/2010/main" val="537704701"/>
       </p:ext>
     </p:extLst>
   </p:cSld>
@@ -8188,7 +8188,7 @@
           <p:cNvPr id="29" name="Deze les: §2.2.1 Prijselasticiteit">
             <a:extLst xmlns:a="http://schemas.openxmlformats.org/drawingml/2006/main">
               <a:ext uri="{FF2B5EF4-FFF2-40B4-BE49-F238E27FC236}">
-                <a16:creationId xmlns:a16="http://schemas.microsoft.com/office/drawing/2014/main" id="{AF393D9E-68DE-4835-BEE7-7E2E8EB6DB39}"/>
+                <a16:creationId xmlns:a16="http://schemas.microsoft.com/office/drawing/2014/main" id="{78EC164A-6B03-41EC-BCEA-47961CD1CF34}"/>
               </a:ext>
             </a:extLst>
           </p:cNvPr>
@@ -8245,7 +8245,7 @@
           <p:cNvPr id="2" name="">
             <a:extLst xmlns:a="http://schemas.openxmlformats.org/drawingml/2006/main">
               <a:ext uri="{FF2B5EF4-FFF2-40B4-BE49-F238E27FC236}">
-                <a16:creationId xmlns:a16="http://schemas.microsoft.com/office/drawing/2014/main" id="{E5A57BD1-BEC7-4D60-B69F-D45863E53D31}"/>
+                <a16:creationId xmlns:a16="http://schemas.microsoft.com/office/drawing/2014/main" id="{13E85AD1-D96F-40BC-8E05-445FFA32907D}"/>
               </a:ext>
             </a:extLst>
           </p:cNvPr>
@@ -8274,7 +8274,7 @@
           <p:cNvPr id="3" name="§2.2.1 Prijselasticiteit">
             <a:extLst xmlns:a="http://schemas.openxmlformats.org/drawingml/2006/main">
               <a:ext uri="{FF2B5EF4-FFF2-40B4-BE49-F238E27FC236}">
-                <a16:creationId xmlns:a16="http://schemas.microsoft.com/office/drawing/2014/main" id="{9FDC00CF-7C31-4CE9-97D0-C7621B9E6F4B}"/>
+                <a16:creationId xmlns:a16="http://schemas.microsoft.com/office/drawing/2014/main" id="{9FB6968D-62A9-4D23-9C8C-3BF2E9080C10}"/>
               </a:ext>
             </a:extLst>
           </p:cNvPr>
@@ -8331,7 +8331,7 @@
           <p:cNvPr id="4" name="slide-number">
             <a:extLst xmlns:a="http://schemas.openxmlformats.org/drawingml/2006/main">
               <a:ext uri="{FF2B5EF4-FFF2-40B4-BE49-F238E27FC236}">
-                <a16:creationId xmlns:a16="http://schemas.microsoft.com/office/drawing/2014/main" id="{F75ACDB6-2B53-4F81-87AC-ADF7D9489846}"/>
+                <a16:creationId xmlns:a16="http://schemas.microsoft.com/office/drawing/2014/main" id="{75C2D991-4381-4B7B-A187-6B2E6E6F64FA}"/>
               </a:ext>
             </a:extLst>
           </p:cNvPr>
@@ -8388,7 +8388,7 @@
           <p:cNvPr id="5" name="phase">
             <a:extLst xmlns:a="http://schemas.openxmlformats.org/drawingml/2006/main">
               <a:ext uri="{FF2B5EF4-FFF2-40B4-BE49-F238E27FC236}">
-                <a16:creationId xmlns:a16="http://schemas.microsoft.com/office/drawing/2014/main" id="{43A83F83-E9D6-4FD5-99D9-EFA0924A2F70}"/>
+                <a16:creationId xmlns:a16="http://schemas.microsoft.com/office/drawing/2014/main" id="{B2BA7925-4339-4DDB-80BE-869F43A189CE}"/>
               </a:ext>
             </a:extLst>
           </p:cNvPr>
@@ -8445,7 +8445,7 @@
           <p:cNvPr id="6" name="Lesroute">
             <a:extLst xmlns:a="http://schemas.openxmlformats.org/drawingml/2006/main">
               <a:ext uri="{FF2B5EF4-FFF2-40B4-BE49-F238E27FC236}">
-                <a16:creationId xmlns:a16="http://schemas.microsoft.com/office/drawing/2014/main" id="{A03DB6E5-FA02-440F-9B12-9E347759754F}"/>
+                <a16:creationId xmlns:a16="http://schemas.microsoft.com/office/drawing/2014/main" id="{43F71ABB-E61F-4C61-9DDB-05D83C444C1C}"/>
               </a:ext>
             </a:extLst>
           </p:cNvPr>
@@ -8502,7 +8502,7 @@
           <p:cNvPr id="7" name="route-number-1">
             <a:extLst xmlns:a="http://schemas.openxmlformats.org/drawingml/2006/main">
               <a:ext uri="{FF2B5EF4-FFF2-40B4-BE49-F238E27FC236}">
-                <a16:creationId xmlns:a16="http://schemas.microsoft.com/office/drawing/2014/main" id="{0E82F82D-6AB7-4DE7-8CF4-6502F29F379C}"/>
+                <a16:creationId xmlns:a16="http://schemas.microsoft.com/office/drawing/2014/main" id="{CCBDCAA7-7B03-4BAB-9588-ED7FBE2BF52B}"/>
               </a:ext>
             </a:extLst>
           </p:cNvPr>
@@ -8559,7 +8559,7 @@
           <p:cNvPr id="8" name="route-1">
             <a:extLst xmlns:a="http://schemas.openxmlformats.org/drawingml/2006/main">
               <a:ext uri="{FF2B5EF4-FFF2-40B4-BE49-F238E27FC236}">
-                <a16:creationId xmlns:a16="http://schemas.microsoft.com/office/drawing/2014/main" id="{78EB0BA5-65A2-400A-8427-0372B1F6EBBD}"/>
+                <a16:creationId xmlns:a16="http://schemas.microsoft.com/office/drawing/2014/main" id="{CFA53B7B-9FE8-42B3-A394-5902A72ECD4B}"/>
               </a:ext>
             </a:extLst>
           </p:cNvPr>
@@ -8616,7 +8616,7 @@
           <p:cNvPr id="9" name="route-number-2">
             <a:extLst xmlns:a="http://schemas.openxmlformats.org/drawingml/2006/main">
               <a:ext uri="{FF2B5EF4-FFF2-40B4-BE49-F238E27FC236}">
-                <a16:creationId xmlns:a16="http://schemas.microsoft.com/office/drawing/2014/main" id="{F21042FF-92C4-4DFC-B54D-C611D03E212C}"/>
+                <a16:creationId xmlns:a16="http://schemas.microsoft.com/office/drawing/2014/main" id="{D08968CF-82A1-4C7E-A1BE-B2CFA4498222}"/>
               </a:ext>
             </a:extLst>
           </p:cNvPr>
@@ -8673,7 +8673,7 @@
           <p:cNvPr id="10" name="route-2">
             <a:extLst xmlns:a="http://schemas.openxmlformats.org/drawingml/2006/main">
               <a:ext uri="{FF2B5EF4-FFF2-40B4-BE49-F238E27FC236}">
-                <a16:creationId xmlns:a16="http://schemas.microsoft.com/office/drawing/2014/main" id="{0C83FFA0-3468-45F8-ADD0-2514D6ED8BB8}"/>
+                <a16:creationId xmlns:a16="http://schemas.microsoft.com/office/drawing/2014/main" id="{2941EE48-1F31-40AE-A367-E1AFA4659F0C}"/>
               </a:ext>
             </a:extLst>
           </p:cNvPr>
@@ -8730,7 +8730,7 @@
           <p:cNvPr id="11" name="route-number-3">
             <a:extLst xmlns:a="http://schemas.openxmlformats.org/drawingml/2006/main">
               <a:ext uri="{FF2B5EF4-FFF2-40B4-BE49-F238E27FC236}">
-                <a16:creationId xmlns:a16="http://schemas.microsoft.com/office/drawing/2014/main" id="{291ACA7F-8DC9-4EE7-A24C-9F75A2A9B6E2}"/>
+                <a16:creationId xmlns:a16="http://schemas.microsoft.com/office/drawing/2014/main" id="{E42CA762-54E3-4048-BD06-AB89534CDB4E}"/>
               </a:ext>
             </a:extLst>
           </p:cNvPr>
@@ -8787,7 +8787,7 @@
           <p:cNvPr id="12" name="route-3">
             <a:extLst xmlns:a="http://schemas.openxmlformats.org/drawingml/2006/main">
               <a:ext uri="{FF2B5EF4-FFF2-40B4-BE49-F238E27FC236}">
-                <a16:creationId xmlns:a16="http://schemas.microsoft.com/office/drawing/2014/main" id="{29812422-8FD2-49FB-BD99-C08C7F292E0D}"/>
+                <a16:creationId xmlns:a16="http://schemas.microsoft.com/office/drawing/2014/main" id="{B0CD2EFA-D4F4-4DF6-BE2B-AA7A9ADCE949}"/>
               </a:ext>
             </a:extLst>
           </p:cNvPr>
@@ -8844,7 +8844,7 @@
           <p:cNvPr id="13" name="route-number-4">
             <a:extLst xmlns:a="http://schemas.openxmlformats.org/drawingml/2006/main">
               <a:ext uri="{FF2B5EF4-FFF2-40B4-BE49-F238E27FC236}">
-                <a16:creationId xmlns:a16="http://schemas.microsoft.com/office/drawing/2014/main" id="{1CB41BA3-AB0E-4775-A918-B3B0272002A7}"/>
+                <a16:creationId xmlns:a16="http://schemas.microsoft.com/office/drawing/2014/main" id="{5B66955B-7EA7-4A56-932D-CB00241511C4}"/>
               </a:ext>
             </a:extLst>
           </p:cNvPr>
@@ -8901,7 +8901,7 @@
           <p:cNvPr id="14" name="route-4">
             <a:extLst xmlns:a="http://schemas.openxmlformats.org/drawingml/2006/main">
               <a:ext uri="{FF2B5EF4-FFF2-40B4-BE49-F238E27FC236}">
-                <a16:creationId xmlns:a16="http://schemas.microsoft.com/office/drawing/2014/main" id="{61A19512-EA7B-4207-9EDD-1253A1E7003C}"/>
+                <a16:creationId xmlns:a16="http://schemas.microsoft.com/office/drawing/2014/main" id="{3F450FFF-0C6E-47B3-A7A8-19D87D2146D0}"/>
               </a:ext>
             </a:extLst>
           </p:cNvPr>
@@ -8958,7 +8958,7 @@
           <p:cNvPr id="15" name="route-number-5">
             <a:extLst xmlns:a="http://schemas.openxmlformats.org/drawingml/2006/main">
               <a:ext uri="{FF2B5EF4-FFF2-40B4-BE49-F238E27FC236}">
-                <a16:creationId xmlns:a16="http://schemas.microsoft.com/office/drawing/2014/main" id="{BB210709-84A2-4081-8207-EB790182B666}"/>
+                <a16:creationId xmlns:a16="http://schemas.microsoft.com/office/drawing/2014/main" id="{A7421F7F-C915-4B27-9D07-E7642317835E}"/>
               </a:ext>
             </a:extLst>
           </p:cNvPr>
@@ -9015,7 +9015,7 @@
           <p:cNvPr id="16" name="route-5">
             <a:extLst xmlns:a="http://schemas.openxmlformats.org/drawingml/2006/main">
               <a:ext uri="{FF2B5EF4-FFF2-40B4-BE49-F238E27FC236}">
-                <a16:creationId xmlns:a16="http://schemas.microsoft.com/office/drawing/2014/main" id="{55BA4566-98F4-4961-B881-A406234836D2}"/>
+                <a16:creationId xmlns:a16="http://schemas.microsoft.com/office/drawing/2014/main" id="{9A720572-88AB-45A8-AEBD-6281085E868A}"/>
               </a:ext>
             </a:extLst>
           </p:cNvPr>
@@ -9072,7 +9072,7 @@
           <p:cNvPr id="17" name="route-number-6">
             <a:extLst xmlns:a="http://schemas.openxmlformats.org/drawingml/2006/main">
               <a:ext uri="{FF2B5EF4-FFF2-40B4-BE49-F238E27FC236}">
-                <a16:creationId xmlns:a16="http://schemas.microsoft.com/office/drawing/2014/main" id="{9A10AAC8-6FF9-4E39-B40E-37BED1DCE43C}"/>
+                <a16:creationId xmlns:a16="http://schemas.microsoft.com/office/drawing/2014/main" id="{A574A882-2BCF-4038-A323-72FC948CAEFA}"/>
               </a:ext>
             </a:extLst>
           </p:cNvPr>
@@ -9129,7 +9129,7 @@
           <p:cNvPr id="18" name="route-6">
             <a:extLst xmlns:a="http://schemas.openxmlformats.org/drawingml/2006/main">
               <a:ext uri="{FF2B5EF4-FFF2-40B4-BE49-F238E27FC236}">
-                <a16:creationId xmlns:a16="http://schemas.microsoft.com/office/drawing/2014/main" id="{24F867A5-5142-4164-BE11-9458C28B908A}"/>
+                <a16:creationId xmlns:a16="http://schemas.microsoft.com/office/drawing/2014/main" id="{34FEC2B8-4AB0-4FC7-8261-1A68332F7946}"/>
               </a:ext>
             </a:extLst>
           </p:cNvPr>
@@ -9186,7 +9186,7 @@
           <p:cNvPr id="19" name="route-number-7">
             <a:extLst xmlns:a="http://schemas.openxmlformats.org/drawingml/2006/main">
               <a:ext uri="{FF2B5EF4-FFF2-40B4-BE49-F238E27FC236}">
-                <a16:creationId xmlns:a16="http://schemas.microsoft.com/office/drawing/2014/main" id="{EEDC937B-717D-47DF-9D7C-2B9333A7C29D}"/>
+                <a16:creationId xmlns:a16="http://schemas.microsoft.com/office/drawing/2014/main" id="{3157DAC6-F481-4A1B-B251-9D06C4EAB799}"/>
               </a:ext>
             </a:extLst>
           </p:cNvPr>
@@ -9243,7 +9243,7 @@
           <p:cNvPr id="20" name="route-7">
             <a:extLst xmlns:a="http://schemas.openxmlformats.org/drawingml/2006/main">
               <a:ext uri="{FF2B5EF4-FFF2-40B4-BE49-F238E27FC236}">
-                <a16:creationId xmlns:a16="http://schemas.microsoft.com/office/drawing/2014/main" id="{F3A919E2-C458-42B7-9BCA-7437319110D2}"/>
+                <a16:creationId xmlns:a16="http://schemas.microsoft.com/office/drawing/2014/main" id="{CE60BC3F-C390-40C4-9684-44529EDF594D}"/>
               </a:ext>
             </a:extLst>
           </p:cNvPr>
@@ -9300,7 +9300,7 @@
           <p:cNvPr id="21" name="Lesdoelen">
             <a:extLst xmlns:a="http://schemas.openxmlformats.org/drawingml/2006/main">
               <a:ext uri="{FF2B5EF4-FFF2-40B4-BE49-F238E27FC236}">
-                <a16:creationId xmlns:a16="http://schemas.microsoft.com/office/drawing/2014/main" id="{D4F3566D-5477-45F8-A803-5FBF9A13A2B5}"/>
+                <a16:creationId xmlns:a16="http://schemas.microsoft.com/office/drawing/2014/main" id="{4BD72970-84AC-474C-91DD-5836CBE1B08A}"/>
               </a:ext>
             </a:extLst>
           </p:cNvPr>
@@ -9357,7 +9357,7 @@
           <p:cNvPr id="22" name="overview-goals">
             <a:extLst xmlns:a="http://schemas.openxmlformats.org/drawingml/2006/main">
               <a:ext uri="{FF2B5EF4-FFF2-40B4-BE49-F238E27FC236}">
-                <a16:creationId xmlns:a16="http://schemas.microsoft.com/office/drawing/2014/main" id="{1F5CD769-B1AF-4D32-9DCA-933B44358529}"/>
+                <a16:creationId xmlns:a16="http://schemas.microsoft.com/office/drawing/2014/main" id="{35B526BE-871C-44E3-8B09-0CD5F87881E2}"/>
               </a:ext>
             </a:extLst>
           </p:cNvPr>
@@ -9460,7 +9460,7 @@
           <p:cNvPr id="23" name="">
             <a:extLst xmlns:a="http://schemas.openxmlformats.org/drawingml/2006/main">
               <a:ext uri="{FF2B5EF4-FFF2-40B4-BE49-F238E27FC236}">
-                <a16:creationId xmlns:a16="http://schemas.microsoft.com/office/drawing/2014/main" id="{801F2282-E1DC-4EB0-86BE-46D558E08AC6}"/>
+                <a16:creationId xmlns:a16="http://schemas.microsoft.com/office/drawing/2014/main" id="{2A2FE6F6-812A-45EE-88A9-64F209F0F356}"/>
               </a:ext>
             </a:extLst>
           </p:cNvPr>
@@ -9489,7 +9489,7 @@
           <p:cNvPr id="24" name="Startopdracht">
             <a:extLst xmlns:a="http://schemas.openxmlformats.org/drawingml/2006/main">
               <a:ext uri="{FF2B5EF4-FFF2-40B4-BE49-F238E27FC236}">
-                <a16:creationId xmlns:a16="http://schemas.microsoft.com/office/drawing/2014/main" id="{892F00F0-6879-4E04-9B96-03FD7EBB2388}"/>
+                <a16:creationId xmlns:a16="http://schemas.microsoft.com/office/drawing/2014/main" id="{90C591C3-138D-41E4-B578-59DDBDD66535}"/>
               </a:ext>
             </a:extLst>
           </p:cNvPr>
@@ -9546,7 +9546,7 @@
           <p:cNvPr id="25" name="overview-start">
             <a:extLst xmlns:a="http://schemas.openxmlformats.org/drawingml/2006/main">
               <a:ext uri="{FF2B5EF4-FFF2-40B4-BE49-F238E27FC236}">
-                <a16:creationId xmlns:a16="http://schemas.microsoft.com/office/drawing/2014/main" id="{2E24B0F8-EF21-4666-80C3-812D225F87E4}"/>
+                <a16:creationId xmlns:a16="http://schemas.microsoft.com/office/drawing/2014/main" id="{C8AD8384-A87B-411D-9FA9-300C04EEE2DD}"/>
               </a:ext>
             </a:extLst>
           </p:cNvPr>
@@ -9593,7 +9593,7 @@
                 <a:ea typeface="Arial"/>
                 <a:cs typeface="Arial"/>
               </a:rPr>
-              <a:t>Pagina 40 · Opgaven 1 en 2</a:t>
+              <a:t>Pagina 41 · Opgaven 1 en 2</a:t>
             </a:r>
           </a:p>
           <a:p xmlns:a="http://schemas.openxmlformats.org/drawingml/2006/main">
@@ -9639,7 +9639,7 @@
                 <a:ea typeface="Arial"/>
                 <a:cs typeface="Arial"/>
               </a:rPr>
-              <a:t>2: verkennen met theorie p. 38</a:t>
+              <a:t>2: verkennen met theorie p. 39</a:t>
             </a:r>
           </a:p>
         </p:txBody>
@@ -9649,7 +9649,7 @@
           <p:cNvPr id="26" name="">
             <a:extLst xmlns:a="http://schemas.openxmlformats.org/drawingml/2006/main">
               <a:ext uri="{FF2B5EF4-FFF2-40B4-BE49-F238E27FC236}">
-                <a16:creationId xmlns:a16="http://schemas.microsoft.com/office/drawing/2014/main" id="{1E204265-95EF-4697-96D4-342D447C5390}"/>
+                <a16:creationId xmlns:a16="http://schemas.microsoft.com/office/drawing/2014/main" id="{99A12D01-C0E3-41B2-ABC8-3E0B0D4DA8B1}"/>
               </a:ext>
             </a:extLst>
           </p:cNvPr>
@@ -9678,7 +9678,7 @@
           <p:cNvPr id="27" name="Huiswerk">
             <a:extLst xmlns:a="http://schemas.openxmlformats.org/drawingml/2006/main">
               <a:ext uri="{FF2B5EF4-FFF2-40B4-BE49-F238E27FC236}">
-                <a16:creationId xmlns:a16="http://schemas.microsoft.com/office/drawing/2014/main" id="{9C7B57E5-805C-466E-82BB-D935FD44D7E4}"/>
+                <a16:creationId xmlns:a16="http://schemas.microsoft.com/office/drawing/2014/main" id="{E57FA28C-B068-471D-9D2B-E5335AB87642}"/>
               </a:ext>
             </a:extLst>
           </p:cNvPr>
@@ -9735,7 +9735,7 @@
           <p:cNvPr id="28" name="overview-homework">
             <a:extLst xmlns:a="http://schemas.openxmlformats.org/drawingml/2006/main">
               <a:ext uri="{FF2B5EF4-FFF2-40B4-BE49-F238E27FC236}">
-                <a16:creationId xmlns:a16="http://schemas.microsoft.com/office/drawing/2014/main" id="{CF58FE32-9344-4361-84E3-A600483557ED}"/>
+                <a16:creationId xmlns:a16="http://schemas.microsoft.com/office/drawing/2014/main" id="{4830AC41-2180-48C6-BEAD-15740E560E5C}"/>
               </a:ext>
             </a:extLst>
           </p:cNvPr>
@@ -9882,7 +9882,7 @@
     </p:spTree>
     <p:extLst>
       <p:ext uri="{BB962C8B-B14F-4D97-AF65-F5344CB8AC3E}">
-        <p14:creationId xmlns:p14="http://schemas.microsoft.com/office/powerpoint/2010/main" val="258115879"/>
+        <p14:creationId xmlns:p14="http://schemas.microsoft.com/office/powerpoint/2010/main" val="1635494184"/>
       </p:ext>
     </p:extLst>
   </p:cSld>
@@ -9913,7 +9913,7 @@
           <p:cNvPr id="9" name="Opgave 7: Bioscoop Nova en StreamNow">
             <a:extLst xmlns:a="http://schemas.openxmlformats.org/drawingml/2006/main">
               <a:ext uri="{FF2B5EF4-FFF2-40B4-BE49-F238E27FC236}">
-                <a16:creationId xmlns:a16="http://schemas.microsoft.com/office/drawing/2014/main" id="{E377AC53-401B-4A88-8E44-62AFFA28D32B}"/>
+                <a16:creationId xmlns:a16="http://schemas.microsoft.com/office/drawing/2014/main" id="{BE95F754-9891-4D6A-8C73-68905425A195}"/>
               </a:ext>
             </a:extLst>
           </p:cNvPr>
@@ -9970,7 +9970,7 @@
           <p:cNvPr id="2" name="">
             <a:extLst xmlns:a="http://schemas.openxmlformats.org/drawingml/2006/main">
               <a:ext uri="{FF2B5EF4-FFF2-40B4-BE49-F238E27FC236}">
-                <a16:creationId xmlns:a16="http://schemas.microsoft.com/office/drawing/2014/main" id="{98358C30-AE61-489F-9724-316E8244D283}"/>
+                <a16:creationId xmlns:a16="http://schemas.microsoft.com/office/drawing/2014/main" id="{F317F38B-39C3-4B92-A0A0-144858B4F6AC}"/>
               </a:ext>
             </a:extLst>
           </p:cNvPr>
@@ -9996,10 +9996,10 @@
       </p:sp>
       <p:sp>
         <p:nvSpPr>
-          <p:cNvPr id="3" name="§2.2.1 Prijselasticiteit · Doeloefening · Boekpagina 42">
-            <a:extLst xmlns:a="http://schemas.openxmlformats.org/drawingml/2006/main">
-              <a:ext uri="{FF2B5EF4-FFF2-40B4-BE49-F238E27FC236}">
-                <a16:creationId xmlns:a16="http://schemas.microsoft.com/office/drawing/2014/main" id="{AC019F88-8621-4FFF-98B8-AC2791BCB5C8}"/>
+          <p:cNvPr id="3" name="§2.2.1 Prijselasticiteit · Doeloefening · Boekpagina 43">
+            <a:extLst xmlns:a="http://schemas.openxmlformats.org/drawingml/2006/main">
+              <a:ext uri="{FF2B5EF4-FFF2-40B4-BE49-F238E27FC236}">
+                <a16:creationId xmlns:a16="http://schemas.microsoft.com/office/drawing/2014/main" id="{0A82634D-ED4A-4B92-8669-C7432D8BE535}"/>
               </a:ext>
             </a:extLst>
           </p:cNvPr>
@@ -10046,7 +10046,7 @@
                 <a:ea typeface="Arial"/>
                 <a:cs typeface="Arial"/>
               </a:rPr>
-              <a:t>§2.2.1 Prijselasticiteit · Doeloefening · Boekpagina 42</a:t>
+              <a:t>§2.2.1 Prijselasticiteit · Doeloefening · Boekpagina 43</a:t>
             </a:r>
           </a:p>
         </p:txBody>
@@ -10056,7 +10056,7 @@
           <p:cNvPr id="4" name="slide-number">
             <a:extLst xmlns:a="http://schemas.openxmlformats.org/drawingml/2006/main">
               <a:ext uri="{FF2B5EF4-FFF2-40B4-BE49-F238E27FC236}">
-                <a16:creationId xmlns:a16="http://schemas.microsoft.com/office/drawing/2014/main" id="{6B4EC058-D06C-4771-96EC-3B519BE317A6}"/>
+                <a16:creationId xmlns:a16="http://schemas.microsoft.com/office/drawing/2014/main" id="{AA070E5E-7F18-443A-AF32-51E5980B198D}"/>
               </a:ext>
             </a:extLst>
           </p:cNvPr>
@@ -10113,7 +10113,7 @@
           <p:cNvPr id="5" name="Bioscoop Nova verhoogt de ticketprijs van € 10 naar € 1">
             <a:extLst xmlns:a="http://schemas.openxmlformats.org/drawingml/2006/main">
               <a:ext uri="{FF2B5EF4-FFF2-40B4-BE49-F238E27FC236}">
-                <a16:creationId xmlns:a16="http://schemas.microsoft.com/office/drawing/2014/main" id="{7E6A8F6D-348C-4853-85F1-7164CA907A97}"/>
+                <a16:creationId xmlns:a16="http://schemas.microsoft.com/office/drawing/2014/main" id="{66A90A8F-C09E-4C3D-B6E4-3DD8D8CC1F5C}"/>
               </a:ext>
             </a:extLst>
           </p:cNvPr>
@@ -10438,7 +10438,7 @@
           <p:cNvPr id="7" name="Bij StreamNow is voor een andere prijsverhoging Ev = −2">
             <a:extLst xmlns:a="http://schemas.openxmlformats.org/drawingml/2006/main">
               <a:ext uri="{FF2B5EF4-FFF2-40B4-BE49-F238E27FC236}">
-                <a16:creationId xmlns:a16="http://schemas.microsoft.com/office/drawing/2014/main" id="{DB3878EC-FB6B-441E-9E38-712918B4D15B}"/>
+                <a16:creationId xmlns:a16="http://schemas.microsoft.com/office/drawing/2014/main" id="{CBB5FAA9-F80D-47B0-8E31-8CF3800D19D7}"/>
               </a:ext>
             </a:extLst>
           </p:cNvPr>
@@ -10495,7 +10495,7 @@
           <p:cNvPr id="8" name="Gebruik voor Nova de oude waarde als noemer en Ev = %ΔQ">
             <a:extLst xmlns:a="http://schemas.openxmlformats.org/drawingml/2006/main">
               <a:ext uri="{FF2B5EF4-FFF2-40B4-BE49-F238E27FC236}">
-                <a16:creationId xmlns:a16="http://schemas.microsoft.com/office/drawing/2014/main" id="{39F3BDD5-915E-492F-814E-046ED37DFADC}"/>
+                <a16:creationId xmlns:a16="http://schemas.microsoft.com/office/drawing/2014/main" id="{BBB737B8-9EFC-4EA0-B37E-4E48CACCDCB0}"/>
               </a:ext>
             </a:extLst>
           </p:cNvPr>
@@ -10550,7 +10550,7 @@
     </p:spTree>
     <p:extLst>
       <p:ext uri="{BB962C8B-B14F-4D97-AF65-F5344CB8AC3E}">
-        <p14:creationId xmlns:p14="http://schemas.microsoft.com/office/powerpoint/2010/main" val="220027588"/>
+        <p14:creationId xmlns:p14="http://schemas.microsoft.com/office/powerpoint/2010/main" val="1509811248"/>
       </p:ext>
     </p:extLst>
   </p:cSld>
@@ -10581,7 +10581,7 @@
           <p:cNvPr id="10" name="Opgave 7: deelvragen a en b">
             <a:extLst xmlns:a="http://schemas.openxmlformats.org/drawingml/2006/main">
               <a:ext uri="{FF2B5EF4-FFF2-40B4-BE49-F238E27FC236}">
-                <a16:creationId xmlns:a16="http://schemas.microsoft.com/office/drawing/2014/main" id="{4DD2C43C-47E8-4DDC-B4B7-BBD2753AFB52}"/>
+                <a16:creationId xmlns:a16="http://schemas.microsoft.com/office/drawing/2014/main" id="{00F97FA7-EE2C-4614-86D0-2C2C86A3B377}"/>
               </a:ext>
             </a:extLst>
           </p:cNvPr>
@@ -10638,7 +10638,7 @@
           <p:cNvPr id="2" name="">
             <a:extLst xmlns:a="http://schemas.openxmlformats.org/drawingml/2006/main">
               <a:ext uri="{FF2B5EF4-FFF2-40B4-BE49-F238E27FC236}">
-                <a16:creationId xmlns:a16="http://schemas.microsoft.com/office/drawing/2014/main" id="{A31FD4BF-5A98-4E04-8006-2754BCAD5648}"/>
+                <a16:creationId xmlns:a16="http://schemas.microsoft.com/office/drawing/2014/main" id="{516565F1-94B5-4445-8342-D7B9C2511FA2}"/>
               </a:ext>
             </a:extLst>
           </p:cNvPr>
@@ -10664,10 +10664,10 @@
       </p:sp>
       <p:sp>
         <p:nvSpPr>
-          <p:cNvPr id="3" name="§2.2.1 Prijselasticiteit · Doeloefening · Boekpagina 42">
-            <a:extLst xmlns:a="http://schemas.openxmlformats.org/drawingml/2006/main">
-              <a:ext uri="{FF2B5EF4-FFF2-40B4-BE49-F238E27FC236}">
-                <a16:creationId xmlns:a16="http://schemas.microsoft.com/office/drawing/2014/main" id="{D903EDAD-C788-49EA-9040-D3BD6D46799F}"/>
+          <p:cNvPr id="3" name="§2.2.1 Prijselasticiteit · Doeloefening · Boekpagina 43">
+            <a:extLst xmlns:a="http://schemas.openxmlformats.org/drawingml/2006/main">
+              <a:ext uri="{FF2B5EF4-FFF2-40B4-BE49-F238E27FC236}">
+                <a16:creationId xmlns:a16="http://schemas.microsoft.com/office/drawing/2014/main" id="{E1BC2548-2A0F-46B3-A854-F7C964AED5C4}"/>
               </a:ext>
             </a:extLst>
           </p:cNvPr>
@@ -10714,7 +10714,7 @@
                 <a:ea typeface="Arial"/>
                 <a:cs typeface="Arial"/>
               </a:rPr>
-              <a:t>§2.2.1 Prijselasticiteit · Doeloefening · Boekpagina 42</a:t>
+              <a:t>§2.2.1 Prijselasticiteit · Doeloefening · Boekpagina 43</a:t>
             </a:r>
           </a:p>
         </p:txBody>
@@ -10724,7 +10724,7 @@
           <p:cNvPr id="4" name="slide-number">
             <a:extLst xmlns:a="http://schemas.openxmlformats.org/drawingml/2006/main">
               <a:ext uri="{FF2B5EF4-FFF2-40B4-BE49-F238E27FC236}">
-                <a16:creationId xmlns:a16="http://schemas.microsoft.com/office/drawing/2014/main" id="{80594332-9565-4593-8078-45BC962DC8F5}"/>
+                <a16:creationId xmlns:a16="http://schemas.microsoft.com/office/drawing/2014/main" id="{5CBB741D-24B9-458D-A7F5-873A3FA3F7EE}"/>
               </a:ext>
             </a:extLst>
           </p:cNvPr>
@@ -10781,7 +10781,7 @@
           <p:cNvPr id="5" name="a">
             <a:extLst xmlns:a="http://schemas.openxmlformats.org/drawingml/2006/main">
               <a:ext uri="{FF2B5EF4-FFF2-40B4-BE49-F238E27FC236}">
-                <a16:creationId xmlns:a16="http://schemas.microsoft.com/office/drawing/2014/main" id="{1C0553FB-0AF1-4C4F-B089-91026A204020}"/>
+                <a16:creationId xmlns:a16="http://schemas.microsoft.com/office/drawing/2014/main" id="{80BABDFB-3698-457D-AB6D-E01162E81E24}"/>
               </a:ext>
             </a:extLst>
           </p:cNvPr>
@@ -10838,7 +10838,7 @@
           <p:cNvPr id="6" name="Bereken voor Bioscoop Nova de procentuele prijsverander">
             <a:extLst xmlns:a="http://schemas.openxmlformats.org/drawingml/2006/main">
               <a:ext uri="{FF2B5EF4-FFF2-40B4-BE49-F238E27FC236}">
-                <a16:creationId xmlns:a16="http://schemas.microsoft.com/office/drawing/2014/main" id="{EA81EEDA-F205-4010-A571-063103C20130}"/>
+                <a16:creationId xmlns:a16="http://schemas.microsoft.com/office/drawing/2014/main" id="{519B73C9-6A1B-40B3-9C14-3B0FDBDB601C}"/>
               </a:ext>
             </a:extLst>
           </p:cNvPr>
@@ -10941,7 +10941,7 @@
           <p:cNvPr id="7" name="">
             <a:extLst xmlns:a="http://schemas.openxmlformats.org/drawingml/2006/main">
               <a:ext uri="{FF2B5EF4-FFF2-40B4-BE49-F238E27FC236}">
-                <a16:creationId xmlns:a16="http://schemas.microsoft.com/office/drawing/2014/main" id="{9E3C92F1-39C0-49C8-A7EE-DC9C3A6CE92F}"/>
+                <a16:creationId xmlns:a16="http://schemas.microsoft.com/office/drawing/2014/main" id="{4880950E-3AA2-418B-AD5E-987DCDD6A68D}"/>
               </a:ext>
             </a:extLst>
           </p:cNvPr>
@@ -10970,7 +10970,7 @@
           <p:cNvPr id="8" name="b">
             <a:extLst xmlns:a="http://schemas.openxmlformats.org/drawingml/2006/main">
               <a:ext uri="{FF2B5EF4-FFF2-40B4-BE49-F238E27FC236}">
-                <a16:creationId xmlns:a16="http://schemas.microsoft.com/office/drawing/2014/main" id="{31141044-29ED-4FA2-BCA6-7D205CD79E68}"/>
+                <a16:creationId xmlns:a16="http://schemas.microsoft.com/office/drawing/2014/main" id="{AB89F7D9-0AFA-4122-BB93-58F662D7F78D}"/>
               </a:ext>
             </a:extLst>
           </p:cNvPr>
@@ -11027,7 +11027,7 @@
           <p:cNvPr id="9" name="Classificeer de vraag naar bioscoopkaartjes en leg in g">
             <a:extLst xmlns:a="http://schemas.openxmlformats.org/drawingml/2006/main">
               <a:ext uri="{FF2B5EF4-FFF2-40B4-BE49-F238E27FC236}">
-                <a16:creationId xmlns:a16="http://schemas.microsoft.com/office/drawing/2014/main" id="{2E7EC25E-9E4B-44D3-B944-91C155F15CFF}"/>
+                <a16:creationId xmlns:a16="http://schemas.microsoft.com/office/drawing/2014/main" id="{063053B8-7AC8-4B69-B48C-319079BC6A7F}"/>
               </a:ext>
             </a:extLst>
           </p:cNvPr>
@@ -11128,7 +11128,7 @@
     </p:spTree>
     <p:extLst>
       <p:ext uri="{BB962C8B-B14F-4D97-AF65-F5344CB8AC3E}">
-        <p14:creationId xmlns:p14="http://schemas.microsoft.com/office/powerpoint/2010/main" val="247352857"/>
+        <p14:creationId xmlns:p14="http://schemas.microsoft.com/office/powerpoint/2010/main" val="1443422428"/>
       </p:ext>
     </p:extLst>
   </p:cSld>
@@ -11159,7 +11159,7 @@
           <p:cNvPr id="10" name="Opgave 7: deelvragen c en d">
             <a:extLst xmlns:a="http://schemas.openxmlformats.org/drawingml/2006/main">
               <a:ext uri="{FF2B5EF4-FFF2-40B4-BE49-F238E27FC236}">
-                <a16:creationId xmlns:a16="http://schemas.microsoft.com/office/drawing/2014/main" id="{38CF0AC3-9E0F-4778-9E92-D28B21861DDE}"/>
+                <a16:creationId xmlns:a16="http://schemas.microsoft.com/office/drawing/2014/main" id="{36C7D813-07F5-4F9E-8E50-DDBD827106EA}"/>
               </a:ext>
             </a:extLst>
           </p:cNvPr>
@@ -11216,7 +11216,7 @@
           <p:cNvPr id="2" name="">
             <a:extLst xmlns:a="http://schemas.openxmlformats.org/drawingml/2006/main">
               <a:ext uri="{FF2B5EF4-FFF2-40B4-BE49-F238E27FC236}">
-                <a16:creationId xmlns:a16="http://schemas.microsoft.com/office/drawing/2014/main" id="{8B226E29-D0D7-417F-9D72-B7033194A7BD}"/>
+                <a16:creationId xmlns:a16="http://schemas.microsoft.com/office/drawing/2014/main" id="{0DAF93E9-72BC-43EB-B698-D9A1A762DACB}"/>
               </a:ext>
             </a:extLst>
           </p:cNvPr>
@@ -11242,10 +11242,10 @@
       </p:sp>
       <p:sp>
         <p:nvSpPr>
-          <p:cNvPr id="3" name="§2.2.1 Prijselasticiteit · Doeloefening · Boekpagina 42">
-            <a:extLst xmlns:a="http://schemas.openxmlformats.org/drawingml/2006/main">
-              <a:ext uri="{FF2B5EF4-FFF2-40B4-BE49-F238E27FC236}">
-                <a16:creationId xmlns:a16="http://schemas.microsoft.com/office/drawing/2014/main" id="{288BD9C0-A60A-48AF-9EC7-69062CF10F8B}"/>
+          <p:cNvPr id="3" name="§2.2.1 Prijselasticiteit · Doeloefening · Boekpagina 43">
+            <a:extLst xmlns:a="http://schemas.openxmlformats.org/drawingml/2006/main">
+              <a:ext uri="{FF2B5EF4-FFF2-40B4-BE49-F238E27FC236}">
+                <a16:creationId xmlns:a16="http://schemas.microsoft.com/office/drawing/2014/main" id="{E081AA06-9620-4CEA-8B64-851F330668D6}"/>
               </a:ext>
             </a:extLst>
           </p:cNvPr>
@@ -11292,7 +11292,7 @@
                 <a:ea typeface="Arial"/>
                 <a:cs typeface="Arial"/>
               </a:rPr>
-              <a:t>§2.2.1 Prijselasticiteit · Doeloefening · Boekpagina 42</a:t>
+              <a:t>§2.2.1 Prijselasticiteit · Doeloefening · Boekpagina 43</a:t>
             </a:r>
           </a:p>
         </p:txBody>
@@ -11302,7 +11302,7 @@
           <p:cNvPr id="4" name="slide-number">
             <a:extLst xmlns:a="http://schemas.openxmlformats.org/drawingml/2006/main">
               <a:ext uri="{FF2B5EF4-FFF2-40B4-BE49-F238E27FC236}">
-                <a16:creationId xmlns:a16="http://schemas.microsoft.com/office/drawing/2014/main" id="{345ECF63-29DA-4347-93EB-AED0F9E9FBD4}"/>
+                <a16:creationId xmlns:a16="http://schemas.microsoft.com/office/drawing/2014/main" id="{838245FE-9958-4F9B-B200-C9B5C331CCE6}"/>
               </a:ext>
             </a:extLst>
           </p:cNvPr>
@@ -11359,7 +11359,7 @@
           <p:cNvPr id="5" name="c">
             <a:extLst xmlns:a="http://schemas.openxmlformats.org/drawingml/2006/main">
               <a:ext uri="{FF2B5EF4-FFF2-40B4-BE49-F238E27FC236}">
-                <a16:creationId xmlns:a16="http://schemas.microsoft.com/office/drawing/2014/main" id="{66BC9142-EEB1-4657-B05F-D2423B67BC66}"/>
+                <a16:creationId xmlns:a16="http://schemas.microsoft.com/office/drawing/2014/main" id="{5C447D3A-C790-4996-92FE-6D1660DE23C9}"/>
               </a:ext>
             </a:extLst>
           </p:cNvPr>
@@ -11416,7 +11416,7 @@
           <p:cNvPr id="6" name="Classificeer de vraag naar StreamNow met Ev = −2 en ver">
             <a:extLst xmlns:a="http://schemas.openxmlformats.org/drawingml/2006/main">
               <a:ext uri="{FF2B5EF4-FFF2-40B4-BE49-F238E27FC236}">
-                <a16:creationId xmlns:a16="http://schemas.microsoft.com/office/drawing/2014/main" id="{FCE47E74-4722-43EB-B3A8-D5DBEB15E5BB}"/>
+                <a16:creationId xmlns:a16="http://schemas.microsoft.com/office/drawing/2014/main" id="{6579FCC1-8738-40C1-87A2-D024D770B782}"/>
               </a:ext>
             </a:extLst>
           </p:cNvPr>
@@ -11519,7 +11519,7 @@
           <p:cNvPr id="7" name="">
             <a:extLst xmlns:a="http://schemas.openxmlformats.org/drawingml/2006/main">
               <a:ext uri="{FF2B5EF4-FFF2-40B4-BE49-F238E27FC236}">
-                <a16:creationId xmlns:a16="http://schemas.microsoft.com/office/drawing/2014/main" id="{12E835D8-2AC5-43CB-9439-E7FE8536894B}"/>
+                <a16:creationId xmlns:a16="http://schemas.microsoft.com/office/drawing/2014/main" id="{3359135D-4EF5-48F2-BACF-EA690C5C5484}"/>
               </a:ext>
             </a:extLst>
           </p:cNvPr>
@@ -11548,7 +11548,7 @@
           <p:cNvPr id="8" name="d">
             <a:extLst xmlns:a="http://schemas.openxmlformats.org/drawingml/2006/main">
               <a:ext uri="{FF2B5EF4-FFF2-40B4-BE49-F238E27FC236}">
-                <a16:creationId xmlns:a16="http://schemas.microsoft.com/office/drawing/2014/main" id="{95937016-B34A-4293-8E4D-0DCE269A0E1D}"/>
+                <a16:creationId xmlns:a16="http://schemas.microsoft.com/office/drawing/2014/main" id="{5FE66D10-B65A-4021-BA6D-AEB925045B9F}"/>
               </a:ext>
             </a:extLst>
           </p:cNvPr>
@@ -11605,7 +11605,7 @@
           <p:cNvPr id="9" name="Geef één plausibele contextverklaring voor het verschil">
             <a:extLst xmlns:a="http://schemas.openxmlformats.org/drawingml/2006/main">
               <a:ext uri="{FF2B5EF4-FFF2-40B4-BE49-F238E27FC236}">
-                <a16:creationId xmlns:a16="http://schemas.microsoft.com/office/drawing/2014/main" id="{F624D905-24B5-4FBA-ADF6-7BCB460463B1}"/>
+                <a16:creationId xmlns:a16="http://schemas.microsoft.com/office/drawing/2014/main" id="{078450A0-8375-46B4-9098-C2F16AA14D3C}"/>
               </a:ext>
             </a:extLst>
           </p:cNvPr>
@@ -11706,7 +11706,7 @@
     </p:spTree>
     <p:extLst>
       <p:ext uri="{BB962C8B-B14F-4D97-AF65-F5344CB8AC3E}">
-        <p14:creationId xmlns:p14="http://schemas.microsoft.com/office/powerpoint/2010/main" val="2005241353"/>
+        <p14:creationId xmlns:p14="http://schemas.microsoft.com/office/powerpoint/2010/main" val="1161833511"/>
       </p:ext>
     </p:extLst>
   </p:cSld>
@@ -11737,7 +11737,7 @@
           <p:cNvPr id="11" name="Opgave 7a: de procentuele prijsverandering">
             <a:extLst xmlns:a="http://schemas.openxmlformats.org/drawingml/2006/main">
               <a:ext uri="{FF2B5EF4-FFF2-40B4-BE49-F238E27FC236}">
-                <a16:creationId xmlns:a16="http://schemas.microsoft.com/office/drawing/2014/main" id="{E2F963B5-858C-4B35-A761-3974617FB976}"/>
+                <a16:creationId xmlns:a16="http://schemas.microsoft.com/office/drawing/2014/main" id="{1AC49CEB-6B02-470D-87A2-ED7E77446D21}"/>
               </a:ext>
             </a:extLst>
           </p:cNvPr>
@@ -11794,7 +11794,7 @@
           <p:cNvPr id="2" name="">
             <a:extLst xmlns:a="http://schemas.openxmlformats.org/drawingml/2006/main">
               <a:ext uri="{FF2B5EF4-FFF2-40B4-BE49-F238E27FC236}">
-                <a16:creationId xmlns:a16="http://schemas.microsoft.com/office/drawing/2014/main" id="{7971ECCB-8717-48D5-958B-00C30994CCC2}"/>
+                <a16:creationId xmlns:a16="http://schemas.microsoft.com/office/drawing/2014/main" id="{24E692E6-3E29-4AC5-A8A6-E64CF0380223}"/>
               </a:ext>
             </a:extLst>
           </p:cNvPr>
@@ -11820,10 +11820,10 @@
       </p:sp>
       <p:sp>
         <p:nvSpPr>
-          <p:cNvPr id="3" name="§2.2.1 Prijselasticiteit · Opgave 7 · Boekpagina 42">
-            <a:extLst xmlns:a="http://schemas.openxmlformats.org/drawingml/2006/main">
-              <a:ext uri="{FF2B5EF4-FFF2-40B4-BE49-F238E27FC236}">
-                <a16:creationId xmlns:a16="http://schemas.microsoft.com/office/drawing/2014/main" id="{150979A1-27EC-45BE-9063-826D37CC8473}"/>
+          <p:cNvPr id="3" name="§2.2.1 Prijselasticiteit · Opgave 7 · Boekpagina 43">
+            <a:extLst xmlns:a="http://schemas.openxmlformats.org/drawingml/2006/main">
+              <a:ext uri="{FF2B5EF4-FFF2-40B4-BE49-F238E27FC236}">
+                <a16:creationId xmlns:a16="http://schemas.microsoft.com/office/drawing/2014/main" id="{9D63B617-360C-457F-B77C-A09B8C1080EC}"/>
               </a:ext>
             </a:extLst>
           </p:cNvPr>
@@ -11870,7 +11870,7 @@
                 <a:ea typeface="Arial"/>
                 <a:cs typeface="Arial"/>
               </a:rPr>
-              <a:t>§2.2.1 Prijselasticiteit · Opgave 7 · Boekpagina 42</a:t>
+              <a:t>§2.2.1 Prijselasticiteit · Opgave 7 · Boekpagina 43</a:t>
             </a:r>
           </a:p>
         </p:txBody>
@@ -11880,7 +11880,7 @@
           <p:cNvPr id="4" name="slide-number">
             <a:extLst xmlns:a="http://schemas.openxmlformats.org/drawingml/2006/main">
               <a:ext uri="{FF2B5EF4-FFF2-40B4-BE49-F238E27FC236}">
-                <a16:creationId xmlns:a16="http://schemas.microsoft.com/office/drawing/2014/main" id="{410FE475-F5A8-4BB1-B8B8-DA8414B6DDC0}"/>
+                <a16:creationId xmlns:a16="http://schemas.microsoft.com/office/drawing/2014/main" id="{EAB77335-8499-46E2-B679-8D917A3A11AE}"/>
               </a:ext>
             </a:extLst>
           </p:cNvPr>
@@ -11937,7 +11937,7 @@
           <p:cNvPr id="5" name="Nova: € 10 naar € 12 per ticket">
             <a:extLst xmlns:a="http://schemas.openxmlformats.org/drawingml/2006/main">
               <a:ext uri="{FF2B5EF4-FFF2-40B4-BE49-F238E27FC236}">
-                <a16:creationId xmlns:a16="http://schemas.microsoft.com/office/drawing/2014/main" id="{9E3B70A8-3D1A-4CCE-8575-01CC8ED3BDBA}"/>
+                <a16:creationId xmlns:a16="http://schemas.microsoft.com/office/drawing/2014/main" id="{60CBB44A-D13B-4AEE-86AB-2D8B672F0D24}"/>
               </a:ext>
             </a:extLst>
           </p:cNvPr>
@@ -11994,7 +11994,7 @@
           <p:cNvPr id="6" name="%ΔP = (nieuwe P − oude P) / oude P × 100%">
             <a:extLst xmlns:a="http://schemas.openxmlformats.org/drawingml/2006/main">
               <a:ext uri="{FF2B5EF4-FFF2-40B4-BE49-F238E27FC236}">
-                <a16:creationId xmlns:a16="http://schemas.microsoft.com/office/drawing/2014/main" id="{A5911149-A161-41C7-8A2C-5FBC554609F1}"/>
+                <a16:creationId xmlns:a16="http://schemas.microsoft.com/office/drawing/2014/main" id="{9A659AAB-520C-418C-840D-F0E040A4B714}"/>
               </a:ext>
             </a:extLst>
           </p:cNvPr>
@@ -12051,7 +12051,7 @@
           <p:cNvPr id="7" name="%ΔP = (12 − 10) / 10 × 100%">
             <a:extLst xmlns:a="http://schemas.openxmlformats.org/drawingml/2006/main">
               <a:ext uri="{FF2B5EF4-FFF2-40B4-BE49-F238E27FC236}">
-                <a16:creationId xmlns:a16="http://schemas.microsoft.com/office/drawing/2014/main" id="{05183E0B-EDE8-463F-8E2C-DB4D953F850B}"/>
+                <a16:creationId xmlns:a16="http://schemas.microsoft.com/office/drawing/2014/main" id="{D350A1A5-E022-42AD-B42C-1AF22BD6FFDA}"/>
               </a:ext>
             </a:extLst>
           </p:cNvPr>
@@ -12108,7 +12108,7 @@
           <p:cNvPr id="8" name="%ΔP = +20%">
             <a:extLst xmlns:a="http://schemas.openxmlformats.org/drawingml/2006/main">
               <a:ext uri="{FF2B5EF4-FFF2-40B4-BE49-F238E27FC236}">
-                <a16:creationId xmlns:a16="http://schemas.microsoft.com/office/drawing/2014/main" id="{3B00ED14-BB12-43E9-A299-4192032FBBB7}"/>
+                <a16:creationId xmlns:a16="http://schemas.microsoft.com/office/drawing/2014/main" id="{3CFF1AF0-3D90-4176-B6CC-4C618F939A0F}"/>
               </a:ext>
             </a:extLst>
           </p:cNvPr>
@@ -12165,7 +12165,7 @@
           <p:cNvPr id="9" name="">
             <a:extLst xmlns:a="http://schemas.openxmlformats.org/drawingml/2006/main">
               <a:ext uri="{FF2B5EF4-FFF2-40B4-BE49-F238E27FC236}">
-                <a16:creationId xmlns:a16="http://schemas.microsoft.com/office/drawing/2014/main" id="{420890C0-9DE9-4729-A8D1-E6EB08CEB491}"/>
+                <a16:creationId xmlns:a16="http://schemas.microsoft.com/office/drawing/2014/main" id="{1B06B273-8769-4698-B6F5-7665742B3D9A}"/>
               </a:ext>
             </a:extLst>
           </p:cNvPr>
@@ -12194,7 +12194,7 @@
           <p:cNvPr id="10" name="Controle: € 10 × 1,20 = € 12">
             <a:extLst xmlns:a="http://schemas.openxmlformats.org/drawingml/2006/main">
               <a:ext uri="{FF2B5EF4-FFF2-40B4-BE49-F238E27FC236}">
-                <a16:creationId xmlns:a16="http://schemas.microsoft.com/office/drawing/2014/main" id="{24A58FC0-6E52-481C-9F0C-9793898AE2BD}"/>
+                <a16:creationId xmlns:a16="http://schemas.microsoft.com/office/drawing/2014/main" id="{E622E981-BE77-4184-8774-94F8B568C0B4}"/>
               </a:ext>
             </a:extLst>
           </p:cNvPr>
@@ -12249,7 +12249,7 @@
     </p:spTree>
     <p:extLst>
       <p:ext uri="{BB962C8B-B14F-4D97-AF65-F5344CB8AC3E}">
-        <p14:creationId xmlns:p14="http://schemas.microsoft.com/office/powerpoint/2010/main" val="1828871457"/>
+        <p14:creationId xmlns:p14="http://schemas.microsoft.com/office/powerpoint/2010/main" val="1740769513"/>
       </p:ext>
     </p:extLst>
   </p:cSld>
@@ -12280,7 +12280,7 @@
           <p:cNvPr id="11" name="Opgave 7a: de procentuele hoeveelheidsverandering">
             <a:extLst xmlns:a="http://schemas.openxmlformats.org/drawingml/2006/main">
               <a:ext uri="{FF2B5EF4-FFF2-40B4-BE49-F238E27FC236}">
-                <a16:creationId xmlns:a16="http://schemas.microsoft.com/office/drawing/2014/main" id="{F14A1708-E6EC-410B-8E7E-A3ECE5960770}"/>
+                <a16:creationId xmlns:a16="http://schemas.microsoft.com/office/drawing/2014/main" id="{55E604F9-F1BB-4AEF-80D7-5946642FF4A9}"/>
               </a:ext>
             </a:extLst>
           </p:cNvPr>
@@ -12337,7 +12337,7 @@
           <p:cNvPr id="2" name="">
             <a:extLst xmlns:a="http://schemas.openxmlformats.org/drawingml/2006/main">
               <a:ext uri="{FF2B5EF4-FFF2-40B4-BE49-F238E27FC236}">
-                <a16:creationId xmlns:a16="http://schemas.microsoft.com/office/drawing/2014/main" id="{7FDB6990-2D9C-4BBF-8BCE-4ED978DFCBFD}"/>
+                <a16:creationId xmlns:a16="http://schemas.microsoft.com/office/drawing/2014/main" id="{EA19679E-89FB-41AE-B556-42C08C60ABD7}"/>
               </a:ext>
             </a:extLst>
           </p:cNvPr>
@@ -12363,10 +12363,10 @@
       </p:sp>
       <p:sp>
         <p:nvSpPr>
-          <p:cNvPr id="3" name="§2.2.1 Prijselasticiteit · Opgave 7 · Boekpagina 42">
-            <a:extLst xmlns:a="http://schemas.openxmlformats.org/drawingml/2006/main">
-              <a:ext uri="{FF2B5EF4-FFF2-40B4-BE49-F238E27FC236}">
-                <a16:creationId xmlns:a16="http://schemas.microsoft.com/office/drawing/2014/main" id="{3611D998-4AF1-41A8-9AB2-2F8D7FC2C36F}"/>
+          <p:cNvPr id="3" name="§2.2.1 Prijselasticiteit · Opgave 7 · Boekpagina 43">
+            <a:extLst xmlns:a="http://schemas.openxmlformats.org/drawingml/2006/main">
+              <a:ext uri="{FF2B5EF4-FFF2-40B4-BE49-F238E27FC236}">
+                <a16:creationId xmlns:a16="http://schemas.microsoft.com/office/drawing/2014/main" id="{86428251-65A6-46FD-80E6-DAA853B53E56}"/>
               </a:ext>
             </a:extLst>
           </p:cNvPr>
@@ -12413,7 +12413,7 @@
                 <a:ea typeface="Arial"/>
                 <a:cs typeface="Arial"/>
               </a:rPr>
-              <a:t>§2.2.1 Prijselasticiteit · Opgave 7 · Boekpagina 42</a:t>
+              <a:t>§2.2.1 Prijselasticiteit · Opgave 7 · Boekpagina 43</a:t>
             </a:r>
           </a:p>
         </p:txBody>
@@ -12423,7 +12423,7 @@
           <p:cNvPr id="4" name="slide-number">
             <a:extLst xmlns:a="http://schemas.openxmlformats.org/drawingml/2006/main">
               <a:ext uri="{FF2B5EF4-FFF2-40B4-BE49-F238E27FC236}">
-                <a16:creationId xmlns:a16="http://schemas.microsoft.com/office/drawing/2014/main" id="{3DAF15C7-2159-4D80-9E80-37C08121A86E}"/>
+                <a16:creationId xmlns:a16="http://schemas.microsoft.com/office/drawing/2014/main" id="{470E8769-1C78-4B06-8B84-5CA025759EA3}"/>
               </a:ext>
             </a:extLst>
           </p:cNvPr>
@@ -12480,7 +12480,7 @@
           <p:cNvPr id="5" name="Nova: 500 naar 420 tickets per week">
             <a:extLst xmlns:a="http://schemas.openxmlformats.org/drawingml/2006/main">
               <a:ext uri="{FF2B5EF4-FFF2-40B4-BE49-F238E27FC236}">
-                <a16:creationId xmlns:a16="http://schemas.microsoft.com/office/drawing/2014/main" id="{96A4DDDC-707A-4728-8897-42890A7282BB}"/>
+                <a16:creationId xmlns:a16="http://schemas.microsoft.com/office/drawing/2014/main" id="{278D4BD1-5383-48E8-8D96-4485DCF320F6}"/>
               </a:ext>
             </a:extLst>
           </p:cNvPr>
@@ -12537,7 +12537,7 @@
           <p:cNvPr id="6" name="%ΔQv = (nieuwe Qv − oude Qv) / oude Qv × 100%">
             <a:extLst xmlns:a="http://schemas.openxmlformats.org/drawingml/2006/main">
               <a:ext uri="{FF2B5EF4-FFF2-40B4-BE49-F238E27FC236}">
-                <a16:creationId xmlns:a16="http://schemas.microsoft.com/office/drawing/2014/main" id="{EE77F23C-2E47-4117-BD70-B6460AE56B0A}"/>
+                <a16:creationId xmlns:a16="http://schemas.microsoft.com/office/drawing/2014/main" id="{C2957D48-53E9-4237-A543-ABC434F9D9E2}"/>
               </a:ext>
             </a:extLst>
           </p:cNvPr>
@@ -12594,7 +12594,7 @@
           <p:cNvPr id="7" name="%ΔQv = (420 − 500) / 500 × 100%">
             <a:extLst xmlns:a="http://schemas.openxmlformats.org/drawingml/2006/main">
               <a:ext uri="{FF2B5EF4-FFF2-40B4-BE49-F238E27FC236}">
-                <a16:creationId xmlns:a16="http://schemas.microsoft.com/office/drawing/2014/main" id="{037025FF-8C61-4101-8355-371BFA3CA6D6}"/>
+                <a16:creationId xmlns:a16="http://schemas.microsoft.com/office/drawing/2014/main" id="{EEB36D3D-8F18-4895-BA58-871AFFE03610}"/>
               </a:ext>
             </a:extLst>
           </p:cNvPr>
@@ -12651,7 +12651,7 @@
           <p:cNvPr id="8" name="%ΔQv = −16%">
             <a:extLst xmlns:a="http://schemas.openxmlformats.org/drawingml/2006/main">
               <a:ext uri="{FF2B5EF4-FFF2-40B4-BE49-F238E27FC236}">
-                <a16:creationId xmlns:a16="http://schemas.microsoft.com/office/drawing/2014/main" id="{8825A349-65F3-4FCA-B019-B81937F130C4}"/>
+                <a16:creationId xmlns:a16="http://schemas.microsoft.com/office/drawing/2014/main" id="{18A50260-BF80-4A5A-8EF6-242D1220C5EC}"/>
               </a:ext>
             </a:extLst>
           </p:cNvPr>
@@ -12708,7 +12708,7 @@
           <p:cNvPr id="9" name="">
             <a:extLst xmlns:a="http://schemas.openxmlformats.org/drawingml/2006/main">
               <a:ext uri="{FF2B5EF4-FFF2-40B4-BE49-F238E27FC236}">
-                <a16:creationId xmlns:a16="http://schemas.microsoft.com/office/drawing/2014/main" id="{66C678BA-1A16-4211-A000-AB675F7A3296}"/>
+                <a16:creationId xmlns:a16="http://schemas.microsoft.com/office/drawing/2014/main" id="{72F25818-AE7A-4A13-861D-9D80E08D1ACF}"/>
               </a:ext>
             </a:extLst>
           </p:cNvPr>
@@ -12737,7 +12737,7 @@
           <p:cNvPr id="10" name="Controle: 500 × 0,84 = 420 tickets per week">
             <a:extLst xmlns:a="http://schemas.openxmlformats.org/drawingml/2006/main">
               <a:ext uri="{FF2B5EF4-FFF2-40B4-BE49-F238E27FC236}">
-                <a16:creationId xmlns:a16="http://schemas.microsoft.com/office/drawing/2014/main" id="{B3A3421A-3AF6-4B11-8D33-91F12B9E0B84}"/>
+                <a16:creationId xmlns:a16="http://schemas.microsoft.com/office/drawing/2014/main" id="{B6214F80-E983-4783-ABD7-3E7F29261A85}"/>
               </a:ext>
             </a:extLst>
           </p:cNvPr>
@@ -12792,7 +12792,7 @@
     </p:spTree>
     <p:extLst>
       <p:ext uri="{BB962C8B-B14F-4D97-AF65-F5344CB8AC3E}">
-        <p14:creationId xmlns:p14="http://schemas.microsoft.com/office/powerpoint/2010/main" val="1885750996"/>
+        <p14:creationId xmlns:p14="http://schemas.microsoft.com/office/powerpoint/2010/main" val="517940088"/>
       </p:ext>
     </p:extLst>
   </p:cSld>
@@ -12823,7 +12823,7 @@
           <p:cNvPr id="10" name="Opgave 7a: de elasticiteit van Nova">
             <a:extLst xmlns:a="http://schemas.openxmlformats.org/drawingml/2006/main">
               <a:ext uri="{FF2B5EF4-FFF2-40B4-BE49-F238E27FC236}">
-                <a16:creationId xmlns:a16="http://schemas.microsoft.com/office/drawing/2014/main" id="{706960EC-561E-45DE-B9DB-2E4ABDBEE501}"/>
+                <a16:creationId xmlns:a16="http://schemas.microsoft.com/office/drawing/2014/main" id="{70F93D11-4383-43FC-B7C2-2E39F77D258F}"/>
               </a:ext>
             </a:extLst>
           </p:cNvPr>
@@ -12880,7 +12880,7 @@
           <p:cNvPr id="2" name="">
             <a:extLst xmlns:a="http://schemas.openxmlformats.org/drawingml/2006/main">
               <a:ext uri="{FF2B5EF4-FFF2-40B4-BE49-F238E27FC236}">
-                <a16:creationId xmlns:a16="http://schemas.microsoft.com/office/drawing/2014/main" id="{7AA3FA12-C387-4622-9984-B91D28625E83}"/>
+                <a16:creationId xmlns:a16="http://schemas.microsoft.com/office/drawing/2014/main" id="{24E37F17-E9BE-4854-BCE6-5D34170D4910}"/>
               </a:ext>
             </a:extLst>
           </p:cNvPr>
@@ -12906,10 +12906,10 @@
       </p:sp>
       <p:sp>
         <p:nvSpPr>
-          <p:cNvPr id="3" name="§2.2.1 Prijselasticiteit · Opgave 7 · Boekpagina 42">
-            <a:extLst xmlns:a="http://schemas.openxmlformats.org/drawingml/2006/main">
-              <a:ext uri="{FF2B5EF4-FFF2-40B4-BE49-F238E27FC236}">
-                <a16:creationId xmlns:a16="http://schemas.microsoft.com/office/drawing/2014/main" id="{302EBE97-DC17-4560-80E5-48DDF5AA7189}"/>
+          <p:cNvPr id="3" name="§2.2.1 Prijselasticiteit · Opgave 7 · Boekpagina 43">
+            <a:extLst xmlns:a="http://schemas.openxmlformats.org/drawingml/2006/main">
+              <a:ext uri="{FF2B5EF4-FFF2-40B4-BE49-F238E27FC236}">
+                <a16:creationId xmlns:a16="http://schemas.microsoft.com/office/drawing/2014/main" id="{45875ED0-2F5B-46C2-B812-F5009EC218F7}"/>
               </a:ext>
             </a:extLst>
           </p:cNvPr>
@@ -12956,7 +12956,7 @@
                 <a:ea typeface="Arial"/>
                 <a:cs typeface="Arial"/>
               </a:rPr>
-              <a:t>§2.2.1 Prijselasticiteit · Opgave 7 · Boekpagina 42</a:t>
+              <a:t>§2.2.1 Prijselasticiteit · Opgave 7 · Boekpagina 43</a:t>
             </a:r>
           </a:p>
         </p:txBody>
@@ -12966,7 +12966,7 @@
           <p:cNvPr id="4" name="slide-number">
             <a:extLst xmlns:a="http://schemas.openxmlformats.org/drawingml/2006/main">
               <a:ext uri="{FF2B5EF4-FFF2-40B4-BE49-F238E27FC236}">
-                <a16:creationId xmlns:a16="http://schemas.microsoft.com/office/drawing/2014/main" id="{C03B29CD-68DF-49CE-91E9-4EDF8A8676CD}"/>
+                <a16:creationId xmlns:a16="http://schemas.microsoft.com/office/drawing/2014/main" id="{04EA5E8A-514E-4DF7-B457-69591989E03B}"/>
               </a:ext>
             </a:extLst>
           </p:cNvPr>
@@ -13023,7 +13023,7 @@
           <p:cNvPr id="5" name="Ev = %ΔQv / %ΔP">
             <a:extLst xmlns:a="http://schemas.openxmlformats.org/drawingml/2006/main">
               <a:ext uri="{FF2B5EF4-FFF2-40B4-BE49-F238E27FC236}">
-                <a16:creationId xmlns:a16="http://schemas.microsoft.com/office/drawing/2014/main" id="{E93C4FDD-5CE6-4021-9CA7-AD9575D531ED}"/>
+                <a16:creationId xmlns:a16="http://schemas.microsoft.com/office/drawing/2014/main" id="{6FBCAFCE-713E-4B1E-A6FA-C742484E730C}"/>
               </a:ext>
             </a:extLst>
           </p:cNvPr>
@@ -13080,7 +13080,7 @@
           <p:cNvPr id="6" name="Ev = −16% / +20% = −0,8">
             <a:extLst xmlns:a="http://schemas.openxmlformats.org/drawingml/2006/main">
               <a:ext uri="{FF2B5EF4-FFF2-40B4-BE49-F238E27FC236}">
-                <a16:creationId xmlns:a16="http://schemas.microsoft.com/office/drawing/2014/main" id="{7C8A997A-2CAE-4B32-8599-BF3E6EF9B24A}"/>
+                <a16:creationId xmlns:a16="http://schemas.microsoft.com/office/drawing/2014/main" id="{2E2AFD11-38A5-41CC-B243-0A85B97AA189}"/>
               </a:ext>
             </a:extLst>
           </p:cNvPr>
@@ -13137,7 +13137,7 @@
           <p:cNvPr id="7" name="Ev heeft geen eenheid en geen procentteken.">
             <a:extLst xmlns:a="http://schemas.openxmlformats.org/drawingml/2006/main">
               <a:ext uri="{FF2B5EF4-FFF2-40B4-BE49-F238E27FC236}">
-                <a16:creationId xmlns:a16="http://schemas.microsoft.com/office/drawing/2014/main" id="{C7137A0F-B520-4D6E-9997-4761D4813927}"/>
+                <a16:creationId xmlns:a16="http://schemas.microsoft.com/office/drawing/2014/main" id="{6ABAC0E3-9CAE-4398-9A3C-4073F3300001}"/>
               </a:ext>
             </a:extLst>
           </p:cNvPr>
@@ -13194,7 +13194,7 @@
           <p:cNvPr id="8" name="">
             <a:extLst xmlns:a="http://schemas.openxmlformats.org/drawingml/2006/main">
               <a:ext uri="{FF2B5EF4-FFF2-40B4-BE49-F238E27FC236}">
-                <a16:creationId xmlns:a16="http://schemas.microsoft.com/office/drawing/2014/main" id="{89330084-18BC-40DB-920C-62F654C78513}"/>
+                <a16:creationId xmlns:a16="http://schemas.microsoft.com/office/drawing/2014/main" id="{162F7CB1-8240-40F4-93AA-C00BA9B285DD}"/>
               </a:ext>
             </a:extLst>
           </p:cNvPr>
@@ -13223,7 +13223,7 @@
           <p:cNvPr id="9" name="Controle: −0,8 × (+20%) = −16%">
             <a:extLst xmlns:a="http://schemas.openxmlformats.org/drawingml/2006/main">
               <a:ext uri="{FF2B5EF4-FFF2-40B4-BE49-F238E27FC236}">
-                <a16:creationId xmlns:a16="http://schemas.microsoft.com/office/drawing/2014/main" id="{CE36F522-B543-4FE5-9B92-FC9FB34315B3}"/>
+                <a16:creationId xmlns:a16="http://schemas.microsoft.com/office/drawing/2014/main" id="{1E527ED6-ED70-45BF-B392-B55BF9A66532}"/>
               </a:ext>
             </a:extLst>
           </p:cNvPr>
@@ -13278,7 +13278,7 @@
     </p:spTree>
     <p:extLst>
       <p:ext uri="{BB962C8B-B14F-4D97-AF65-F5344CB8AC3E}">
-        <p14:creationId xmlns:p14="http://schemas.microsoft.com/office/powerpoint/2010/main" val="496579841"/>
+        <p14:creationId xmlns:p14="http://schemas.microsoft.com/office/powerpoint/2010/main" val="1207536509"/>
       </p:ext>
     </p:extLst>
   </p:cSld>
@@ -13309,7 +13309,7 @@
           <p:cNvPr id="16" name="Wat kun je na deze les?">
             <a:extLst xmlns:a="http://schemas.openxmlformats.org/drawingml/2006/main">
               <a:ext uri="{FF2B5EF4-FFF2-40B4-BE49-F238E27FC236}">
-                <a16:creationId xmlns:a16="http://schemas.microsoft.com/office/drawing/2014/main" id="{0DC30EDA-8EA8-404B-9E9A-AB4B41B35C28}"/>
+                <a16:creationId xmlns:a16="http://schemas.microsoft.com/office/drawing/2014/main" id="{B66B5CF9-29EC-42C0-A289-B7888C0FB35D}"/>
               </a:ext>
             </a:extLst>
           </p:cNvPr>
@@ -13366,7 +13366,7 @@
           <p:cNvPr id="2" name="">
             <a:extLst xmlns:a="http://schemas.openxmlformats.org/drawingml/2006/main">
               <a:ext uri="{FF2B5EF4-FFF2-40B4-BE49-F238E27FC236}">
-                <a16:creationId xmlns:a16="http://schemas.microsoft.com/office/drawing/2014/main" id="{5C976B19-D97A-40B6-9FD3-AED02F7B079E}"/>
+                <a16:creationId xmlns:a16="http://schemas.microsoft.com/office/drawing/2014/main" id="{22651778-9195-46CD-A929-73A57B6A35D5}"/>
               </a:ext>
             </a:extLst>
           </p:cNvPr>
@@ -13395,7 +13395,7 @@
           <p:cNvPr id="3" name="§2.2.1 Prijselasticiteit">
             <a:extLst xmlns:a="http://schemas.openxmlformats.org/drawingml/2006/main">
               <a:ext uri="{FF2B5EF4-FFF2-40B4-BE49-F238E27FC236}">
-                <a16:creationId xmlns:a16="http://schemas.microsoft.com/office/drawing/2014/main" id="{9CAE0791-5E4B-46C4-8B1B-58561BE3BC21}"/>
+                <a16:creationId xmlns:a16="http://schemas.microsoft.com/office/drawing/2014/main" id="{72125D5E-9F9E-4F6B-B4D4-B0A3BE828AFF}"/>
               </a:ext>
             </a:extLst>
           </p:cNvPr>
@@ -13452,7 +13452,7 @@
           <p:cNvPr id="4" name="slide-number">
             <a:extLst xmlns:a="http://schemas.openxmlformats.org/drawingml/2006/main">
               <a:ext uri="{FF2B5EF4-FFF2-40B4-BE49-F238E27FC236}">
-                <a16:creationId xmlns:a16="http://schemas.microsoft.com/office/drawing/2014/main" id="{7B1AEF7F-81ED-4ABD-80F2-25C97B489619}"/>
+                <a16:creationId xmlns:a16="http://schemas.microsoft.com/office/drawing/2014/main" id="{CA16A215-902A-4E5D-AA9A-9484E78E3BCA}"/>
               </a:ext>
             </a:extLst>
           </p:cNvPr>
@@ -13509,7 +13509,7 @@
           <p:cNvPr id="5" name="Berekenen">
             <a:extLst xmlns:a="http://schemas.openxmlformats.org/drawingml/2006/main">
               <a:ext uri="{FF2B5EF4-FFF2-40B4-BE49-F238E27FC236}">
-                <a16:creationId xmlns:a16="http://schemas.microsoft.com/office/drawing/2014/main" id="{34775E91-611B-4622-B3CA-A277FE35182A}"/>
+                <a16:creationId xmlns:a16="http://schemas.microsoft.com/office/drawing/2014/main" id="{C4EA64DF-F656-423F-B037-F248ED853CED}"/>
               </a:ext>
             </a:extLst>
           </p:cNvPr>
@@ -13566,7 +13566,7 @@
           <p:cNvPr id="6" name="Je berekent beide procenten en Ev met het juiste teken.">
             <a:extLst xmlns:a="http://schemas.openxmlformats.org/drawingml/2006/main">
               <a:ext uri="{FF2B5EF4-FFF2-40B4-BE49-F238E27FC236}">
-                <a16:creationId xmlns:a16="http://schemas.microsoft.com/office/drawing/2014/main" id="{674278BD-8CE7-4053-A6B8-379EA9E6ADA2}"/>
+                <a16:creationId xmlns:a16="http://schemas.microsoft.com/office/drawing/2014/main" id="{B29CEDF4-EBBB-4803-A473-DF84B0BAB4FD}"/>
               </a:ext>
             </a:extLst>
           </p:cNvPr>
@@ -13623,7 +13623,7 @@
           <p:cNvPr id="7" name="">
             <a:extLst xmlns:a="http://schemas.openxmlformats.org/drawingml/2006/main">
               <a:ext uri="{FF2B5EF4-FFF2-40B4-BE49-F238E27FC236}">
-                <a16:creationId xmlns:a16="http://schemas.microsoft.com/office/drawing/2014/main" id="{A9A00FE7-BD66-445C-88C5-D8503B7CF2C3}"/>
+                <a16:creationId xmlns:a16="http://schemas.microsoft.com/office/drawing/2014/main" id="{16962B03-90B0-4F2E-9819-B5806ED4A368}"/>
               </a:ext>
             </a:extLst>
           </p:cNvPr>
@@ -13652,7 +13652,7 @@
           <p:cNvPr id="8" name="Indelen">
             <a:extLst xmlns:a="http://schemas.openxmlformats.org/drawingml/2006/main">
               <a:ext uri="{FF2B5EF4-FFF2-40B4-BE49-F238E27FC236}">
-                <a16:creationId xmlns:a16="http://schemas.microsoft.com/office/drawing/2014/main" id="{0ADAE277-8260-434B-8FA8-F92CE70ECA9C}"/>
+                <a16:creationId xmlns:a16="http://schemas.microsoft.com/office/drawing/2014/main" id="{F44DC10C-1E1C-447B-937E-93A65F989520}"/>
               </a:ext>
             </a:extLst>
           </p:cNvPr>
@@ -13709,7 +13709,7 @@
           <p:cNvPr id="9" name="Je vergelijkt Ev met −1 en 0.">
             <a:extLst xmlns:a="http://schemas.openxmlformats.org/drawingml/2006/main">
               <a:ext uri="{FF2B5EF4-FFF2-40B4-BE49-F238E27FC236}">
-                <a16:creationId xmlns:a16="http://schemas.microsoft.com/office/drawing/2014/main" id="{922B743B-648E-469B-B5AE-B1E4DCBF48CF}"/>
+                <a16:creationId xmlns:a16="http://schemas.microsoft.com/office/drawing/2014/main" id="{A011F831-8A23-4994-B7DB-5B57C4187D06}"/>
               </a:ext>
             </a:extLst>
           </p:cNvPr>
@@ -13766,7 +13766,7 @@
           <p:cNvPr id="10" name="">
             <a:extLst xmlns:a="http://schemas.openxmlformats.org/drawingml/2006/main">
               <a:ext uri="{FF2B5EF4-FFF2-40B4-BE49-F238E27FC236}">
-                <a16:creationId xmlns:a16="http://schemas.microsoft.com/office/drawing/2014/main" id="{4936327C-48DB-42B3-BC7B-758CE52585D7}"/>
+                <a16:creationId xmlns:a16="http://schemas.microsoft.com/office/drawing/2014/main" id="{6CB93F67-FFFE-4586-840C-05F0CDAB5A7F}"/>
               </a:ext>
             </a:extLst>
           </p:cNvPr>
@@ -13795,7 +13795,7 @@
           <p:cNvPr id="11" name="Vergelijken">
             <a:extLst xmlns:a="http://schemas.openxmlformats.org/drawingml/2006/main">
               <a:ext uri="{FF2B5EF4-FFF2-40B4-BE49-F238E27FC236}">
-                <a16:creationId xmlns:a16="http://schemas.microsoft.com/office/drawing/2014/main" id="{C7D8C698-7FFC-4912-A84E-04185C7FCD25}"/>
+                <a16:creationId xmlns:a16="http://schemas.microsoft.com/office/drawing/2014/main" id="{3DD9368F-8340-4B7F-8BE6-971B6AB9F0F7}"/>
               </a:ext>
             </a:extLst>
           </p:cNvPr>
@@ -13852,7 +13852,7 @@
           <p:cNvPr id="12" name="Je legt uit waar de relatieve prijsreactie sterker is.">
             <a:extLst xmlns:a="http://schemas.openxmlformats.org/drawingml/2006/main">
               <a:ext uri="{FF2B5EF4-FFF2-40B4-BE49-F238E27FC236}">
-                <a16:creationId xmlns:a16="http://schemas.microsoft.com/office/drawing/2014/main" id="{38F73AF4-0EFF-4525-8487-A7883FB79438}"/>
+                <a16:creationId xmlns:a16="http://schemas.microsoft.com/office/drawing/2014/main" id="{8FF8C6AE-E32D-4662-A396-EFB4FE86327F}"/>
               </a:ext>
             </a:extLst>
           </p:cNvPr>
@@ -13909,7 +13909,7 @@
           <p:cNvPr id="13" name="">
             <a:extLst xmlns:a="http://schemas.openxmlformats.org/drawingml/2006/main">
               <a:ext uri="{FF2B5EF4-FFF2-40B4-BE49-F238E27FC236}">
-                <a16:creationId xmlns:a16="http://schemas.microsoft.com/office/drawing/2014/main" id="{E54FF7E7-71F6-422E-BA8D-3C11D5B12517}"/>
+                <a16:creationId xmlns:a16="http://schemas.microsoft.com/office/drawing/2014/main" id="{46966626-CB13-4CDE-AA5C-303C7FCBEC1C}"/>
               </a:ext>
             </a:extLst>
           </p:cNvPr>
@@ -13938,7 +13938,7 @@
           <p:cNvPr id="14" name="Verklaren">
             <a:extLst xmlns:a="http://schemas.openxmlformats.org/drawingml/2006/main">
               <a:ext uri="{FF2B5EF4-FFF2-40B4-BE49-F238E27FC236}">
-                <a16:creationId xmlns:a16="http://schemas.microsoft.com/office/drawing/2014/main" id="{F9A45C47-653A-4EFB-AA53-9EB2A4AF8A77}"/>
+                <a16:creationId xmlns:a16="http://schemas.microsoft.com/office/drawing/2014/main" id="{9EA0422C-888A-42CD-BBF1-681773AA435F}"/>
               </a:ext>
             </a:extLst>
           </p:cNvPr>
@@ -13995,7 +13995,7 @@
           <p:cNvPr id="15" name="Je onderscheidt een mogelijke reden van een bewezen oor">
             <a:extLst xmlns:a="http://schemas.openxmlformats.org/drawingml/2006/main">
               <a:ext uri="{FF2B5EF4-FFF2-40B4-BE49-F238E27FC236}">
-                <a16:creationId xmlns:a16="http://schemas.microsoft.com/office/drawing/2014/main" id="{C6AE75FF-D28D-49C2-9A98-DDA4AA3216D3}"/>
+                <a16:creationId xmlns:a16="http://schemas.microsoft.com/office/drawing/2014/main" id="{DF399BB7-46C3-4086-891B-545AFEEEE067}"/>
               </a:ext>
             </a:extLst>
           </p:cNvPr>
@@ -14050,7 +14050,7 @@
     </p:spTree>
     <p:extLst>
       <p:ext uri="{BB962C8B-B14F-4D97-AF65-F5344CB8AC3E}">
-        <p14:creationId xmlns:p14="http://schemas.microsoft.com/office/powerpoint/2010/main" val="580941659"/>
+        <p14:creationId xmlns:p14="http://schemas.microsoft.com/office/powerpoint/2010/main" val="892568004"/>
       </p:ext>
     </p:extLst>
   </p:cSld>
@@ -14081,7 +14081,7 @@
           <p:cNvPr id="8" name="Opgave 7b: prijsinelastische vraag">
             <a:extLst xmlns:a="http://schemas.openxmlformats.org/drawingml/2006/main">
               <a:ext uri="{FF2B5EF4-FFF2-40B4-BE49-F238E27FC236}">
-                <a16:creationId xmlns:a16="http://schemas.microsoft.com/office/drawing/2014/main" id="{F423320A-88E6-4878-B20C-EC5E5101AFB4}"/>
+                <a16:creationId xmlns:a16="http://schemas.microsoft.com/office/drawing/2014/main" id="{9B908AB6-DB69-440E-A3AB-1015D303C69E}"/>
               </a:ext>
             </a:extLst>
           </p:cNvPr>
@@ -14138,7 +14138,7 @@
           <p:cNvPr id="2" name="">
             <a:extLst xmlns:a="http://schemas.openxmlformats.org/drawingml/2006/main">
               <a:ext uri="{FF2B5EF4-FFF2-40B4-BE49-F238E27FC236}">
-                <a16:creationId xmlns:a16="http://schemas.microsoft.com/office/drawing/2014/main" id="{990A70E1-B416-4218-B934-A03D017543A8}"/>
+                <a16:creationId xmlns:a16="http://schemas.microsoft.com/office/drawing/2014/main" id="{A5AECD20-1ED7-4807-A0E8-47ACB01C66EB}"/>
               </a:ext>
             </a:extLst>
           </p:cNvPr>
@@ -14164,10 +14164,10 @@
       </p:sp>
       <p:sp>
         <p:nvSpPr>
-          <p:cNvPr id="3" name="§2.2.1 Prijselasticiteit · Opgave 7 · Boekpagina 42">
-            <a:extLst xmlns:a="http://schemas.openxmlformats.org/drawingml/2006/main">
-              <a:ext uri="{FF2B5EF4-FFF2-40B4-BE49-F238E27FC236}">
-                <a16:creationId xmlns:a16="http://schemas.microsoft.com/office/drawing/2014/main" id="{D53B1E2C-313B-4865-9434-971C7D2E674C}"/>
+          <p:cNvPr id="3" name="§2.2.1 Prijselasticiteit · Opgave 7 · Boekpagina 43">
+            <a:extLst xmlns:a="http://schemas.openxmlformats.org/drawingml/2006/main">
+              <a:ext uri="{FF2B5EF4-FFF2-40B4-BE49-F238E27FC236}">
+                <a16:creationId xmlns:a16="http://schemas.microsoft.com/office/drawing/2014/main" id="{6C2E02D0-4A0F-49C8-B1C7-F4542C4A1E31}"/>
               </a:ext>
             </a:extLst>
           </p:cNvPr>
@@ -14214,7 +14214,7 @@
                 <a:ea typeface="Arial"/>
                 <a:cs typeface="Arial"/>
               </a:rPr>
-              <a:t>§2.2.1 Prijselasticiteit · Opgave 7 · Boekpagina 42</a:t>
+              <a:t>§2.2.1 Prijselasticiteit · Opgave 7 · Boekpagina 43</a:t>
             </a:r>
           </a:p>
         </p:txBody>
@@ -14224,7 +14224,7 @@
           <p:cNvPr id="4" name="slide-number">
             <a:extLst xmlns:a="http://schemas.openxmlformats.org/drawingml/2006/main">
               <a:ext uri="{FF2B5EF4-FFF2-40B4-BE49-F238E27FC236}">
-                <a16:creationId xmlns:a16="http://schemas.microsoft.com/office/drawing/2014/main" id="{E0376B17-C027-46E4-AE36-10C92547A068}"/>
+                <a16:creationId xmlns:a16="http://schemas.microsoft.com/office/drawing/2014/main" id="{02A01D59-E9E5-49BE-A247-2DF3C5EF70DE}"/>
               </a:ext>
             </a:extLst>
           </p:cNvPr>
@@ -14281,7 +14281,7 @@
           <p:cNvPr id="5" name="−1 &lt; −0,8 &lt; 0">
             <a:extLst xmlns:a="http://schemas.openxmlformats.org/drawingml/2006/main">
               <a:ext uri="{FF2B5EF4-FFF2-40B4-BE49-F238E27FC236}">
-                <a16:creationId xmlns:a16="http://schemas.microsoft.com/office/drawing/2014/main" id="{44B4194E-A5C8-48F7-BFDC-9151DC0CCC6E}"/>
+                <a16:creationId xmlns:a16="http://schemas.microsoft.com/office/drawing/2014/main" id="{19D9F73C-5DF2-4058-A7DF-143E26AB6293}"/>
               </a:ext>
             </a:extLst>
           </p:cNvPr>
@@ -14510,7 +14510,7 @@
           <p:cNvPr id="7" name="De hoeveelheidsdaling is 0,8 maal de prijsstijging, in ">
             <a:extLst xmlns:a="http://schemas.openxmlformats.org/drawingml/2006/main">
               <a:ext uri="{FF2B5EF4-FFF2-40B4-BE49-F238E27FC236}">
-                <a16:creationId xmlns:a16="http://schemas.microsoft.com/office/drawing/2014/main" id="{39F3E136-6B66-4DA7-94D3-EF1A964A055C}"/>
+                <a16:creationId xmlns:a16="http://schemas.microsoft.com/office/drawing/2014/main" id="{DB6882F2-F07D-4E90-AA5C-B377F238D776}"/>
               </a:ext>
             </a:extLst>
           </p:cNvPr>
@@ -14565,7 +14565,7 @@
     </p:spTree>
     <p:extLst>
       <p:ext uri="{BB962C8B-B14F-4D97-AF65-F5344CB8AC3E}">
-        <p14:creationId xmlns:p14="http://schemas.microsoft.com/office/powerpoint/2010/main" val="1251995726"/>
+        <p14:creationId xmlns:p14="http://schemas.microsoft.com/office/powerpoint/2010/main" val="385236639"/>
       </p:ext>
     </p:extLst>
   </p:cSld>
@@ -14596,7 +14596,7 @@
           <p:cNvPr id="9" name="Opgave 7c: StreamNow is prijsgevoeliger">
             <a:extLst xmlns:a="http://schemas.openxmlformats.org/drawingml/2006/main">
               <a:ext uri="{FF2B5EF4-FFF2-40B4-BE49-F238E27FC236}">
-                <a16:creationId xmlns:a16="http://schemas.microsoft.com/office/drawing/2014/main" id="{58AD3749-720E-49A1-A052-27C642686E38}"/>
+                <a16:creationId xmlns:a16="http://schemas.microsoft.com/office/drawing/2014/main" id="{A88E204E-325B-4BFF-AC27-C6AFBA10A9F7}"/>
               </a:ext>
             </a:extLst>
           </p:cNvPr>
@@ -14653,7 +14653,7 @@
           <p:cNvPr id="2" name="">
             <a:extLst xmlns:a="http://schemas.openxmlformats.org/drawingml/2006/main">
               <a:ext uri="{FF2B5EF4-FFF2-40B4-BE49-F238E27FC236}">
-                <a16:creationId xmlns:a16="http://schemas.microsoft.com/office/drawing/2014/main" id="{344DC5CB-A5DA-40CB-B07E-DC829F35E9AB}"/>
+                <a16:creationId xmlns:a16="http://schemas.microsoft.com/office/drawing/2014/main" id="{9FA05BE5-81EA-4FB8-929D-29322616B290}"/>
               </a:ext>
             </a:extLst>
           </p:cNvPr>
@@ -14679,10 +14679,10 @@
       </p:sp>
       <p:sp>
         <p:nvSpPr>
-          <p:cNvPr id="3" name="§2.2.1 Prijselasticiteit · Opgave 7 · Boekpagina 42">
-            <a:extLst xmlns:a="http://schemas.openxmlformats.org/drawingml/2006/main">
-              <a:ext uri="{FF2B5EF4-FFF2-40B4-BE49-F238E27FC236}">
-                <a16:creationId xmlns:a16="http://schemas.microsoft.com/office/drawing/2014/main" id="{7D36CA40-7250-4435-8A9A-DC98B6628E59}"/>
+          <p:cNvPr id="3" name="§2.2.1 Prijselasticiteit · Opgave 7 · Boekpagina 43">
+            <a:extLst xmlns:a="http://schemas.openxmlformats.org/drawingml/2006/main">
+              <a:ext uri="{FF2B5EF4-FFF2-40B4-BE49-F238E27FC236}">
+                <a16:creationId xmlns:a16="http://schemas.microsoft.com/office/drawing/2014/main" id="{CE46248C-2088-4D48-96CA-39C86F2277C7}"/>
               </a:ext>
             </a:extLst>
           </p:cNvPr>
@@ -14729,7 +14729,7 @@
                 <a:ea typeface="Arial"/>
                 <a:cs typeface="Arial"/>
               </a:rPr>
-              <a:t>§2.2.1 Prijselasticiteit · Opgave 7 · Boekpagina 42</a:t>
+              <a:t>§2.2.1 Prijselasticiteit · Opgave 7 · Boekpagina 43</a:t>
             </a:r>
           </a:p>
         </p:txBody>
@@ -14739,7 +14739,7 @@
           <p:cNvPr id="4" name="slide-number">
             <a:extLst xmlns:a="http://schemas.openxmlformats.org/drawingml/2006/main">
               <a:ext uri="{FF2B5EF4-FFF2-40B4-BE49-F238E27FC236}">
-                <a16:creationId xmlns:a16="http://schemas.microsoft.com/office/drawing/2014/main" id="{4E7D4F06-5839-4A5E-A310-40EB22E92CB1}"/>
+                <a16:creationId xmlns:a16="http://schemas.microsoft.com/office/drawing/2014/main" id="{CB440DC0-C859-4C5E-A023-8C6F0169DDAB}"/>
               </a:ext>
             </a:extLst>
           </p:cNvPr>
@@ -15041,7 +15041,7 @@
           <p:cNvPr id="6" name="Bij StreamNow reageert Qv procentueel sterker op P.">
             <a:extLst xmlns:a="http://schemas.openxmlformats.org/drawingml/2006/main">
               <a:ext uri="{FF2B5EF4-FFF2-40B4-BE49-F238E27FC236}">
-                <a16:creationId xmlns:a16="http://schemas.microsoft.com/office/drawing/2014/main" id="{719D707C-90C4-4FE4-9393-7C833FEEA0B2}"/>
+                <a16:creationId xmlns:a16="http://schemas.microsoft.com/office/drawing/2014/main" id="{02B2D606-F644-4470-BB6A-B1C965A5806D}"/>
               </a:ext>
             </a:extLst>
           </p:cNvPr>
@@ -15098,7 +15098,7 @@
           <p:cNvPr id="7" name="2 maal de prijsverandering tegenover 0,8 maal, in proce">
             <a:extLst xmlns:a="http://schemas.openxmlformats.org/drawingml/2006/main">
               <a:ext uri="{FF2B5EF4-FFF2-40B4-BE49-F238E27FC236}">
-                <a16:creationId xmlns:a16="http://schemas.microsoft.com/office/drawing/2014/main" id="{49B2DE2D-0A3A-40C6-AE3B-39D60026055C}"/>
+                <a16:creationId xmlns:a16="http://schemas.microsoft.com/office/drawing/2014/main" id="{DA4A8421-7943-49A8-B897-F1D8DF8FF6D4}"/>
               </a:ext>
             </a:extLst>
           </p:cNvPr>
@@ -15155,7 +15155,7 @@
           <p:cNvPr id="8" name="De absolute aantallen verloren klanten kun je niet verg">
             <a:extLst xmlns:a="http://schemas.openxmlformats.org/drawingml/2006/main">
               <a:ext uri="{FF2B5EF4-FFF2-40B4-BE49-F238E27FC236}">
-                <a16:creationId xmlns:a16="http://schemas.microsoft.com/office/drawing/2014/main" id="{9E1D9573-7FAB-4A8E-86CD-D38619E65912}"/>
+                <a16:creationId xmlns:a16="http://schemas.microsoft.com/office/drawing/2014/main" id="{43F1711E-7982-4B19-93BC-EDDB78D55B70}"/>
               </a:ext>
             </a:extLst>
           </p:cNvPr>
@@ -15210,7 +15210,7 @@
     </p:spTree>
     <p:extLst>
       <p:ext uri="{BB962C8B-B14F-4D97-AF65-F5344CB8AC3E}">
-        <p14:creationId xmlns:p14="http://schemas.microsoft.com/office/powerpoint/2010/main" val="2091651670"/>
+        <p14:creationId xmlns:p14="http://schemas.microsoft.com/office/powerpoint/2010/main" val="883623114"/>
       </p:ext>
     </p:extLst>
   </p:cSld>
@@ -15241,7 +15241,7 @@
           <p:cNvPr id="10" name="Opgave 7d: een plausibele contextverklaring">
             <a:extLst xmlns:a="http://schemas.openxmlformats.org/drawingml/2006/main">
               <a:ext uri="{FF2B5EF4-FFF2-40B4-BE49-F238E27FC236}">
-                <a16:creationId xmlns:a16="http://schemas.microsoft.com/office/drawing/2014/main" id="{662BCAAA-F45D-482D-968D-7E63217B5552}"/>
+                <a16:creationId xmlns:a16="http://schemas.microsoft.com/office/drawing/2014/main" id="{15BF5C51-866D-4D3F-BD18-A413F348D7BC}"/>
               </a:ext>
             </a:extLst>
           </p:cNvPr>
@@ -15298,7 +15298,7 @@
           <p:cNvPr id="2" name="">
             <a:extLst xmlns:a="http://schemas.openxmlformats.org/drawingml/2006/main">
               <a:ext uri="{FF2B5EF4-FFF2-40B4-BE49-F238E27FC236}">
-                <a16:creationId xmlns:a16="http://schemas.microsoft.com/office/drawing/2014/main" id="{C584DDA8-E919-4315-B0A4-6ABC71C9D6AC}"/>
+                <a16:creationId xmlns:a16="http://schemas.microsoft.com/office/drawing/2014/main" id="{8D2B0054-61E7-435F-AEBD-5345B85A1A1A}"/>
               </a:ext>
             </a:extLst>
           </p:cNvPr>
@@ -15324,10 +15324,10 @@
       </p:sp>
       <p:sp>
         <p:nvSpPr>
-          <p:cNvPr id="3" name="§2.2.1 Prijselasticiteit · Opgave 7 · Boekpagina 42">
-            <a:extLst xmlns:a="http://schemas.openxmlformats.org/drawingml/2006/main">
-              <a:ext uri="{FF2B5EF4-FFF2-40B4-BE49-F238E27FC236}">
-                <a16:creationId xmlns:a16="http://schemas.microsoft.com/office/drawing/2014/main" id="{B3FD2755-290F-4351-98CD-E1D731AB97DB}"/>
+          <p:cNvPr id="3" name="§2.2.1 Prijselasticiteit · Opgave 7 · Boekpagina 43">
+            <a:extLst xmlns:a="http://schemas.openxmlformats.org/drawingml/2006/main">
+              <a:ext uri="{FF2B5EF4-FFF2-40B4-BE49-F238E27FC236}">
+                <a16:creationId xmlns:a16="http://schemas.microsoft.com/office/drawing/2014/main" id="{C482D066-68EB-4C71-ABAC-9509195DB7D7}"/>
               </a:ext>
             </a:extLst>
           </p:cNvPr>
@@ -15374,7 +15374,7 @@
                 <a:ea typeface="Arial"/>
                 <a:cs typeface="Arial"/>
               </a:rPr>
-              <a:t>§2.2.1 Prijselasticiteit · Opgave 7 · Boekpagina 42</a:t>
+              <a:t>§2.2.1 Prijselasticiteit · Opgave 7 · Boekpagina 43</a:t>
             </a:r>
           </a:p>
         </p:txBody>
@@ -15384,7 +15384,7 @@
           <p:cNvPr id="4" name="slide-number">
             <a:extLst xmlns:a="http://schemas.openxmlformats.org/drawingml/2006/main">
               <a:ext uri="{FF2B5EF4-FFF2-40B4-BE49-F238E27FC236}">
-                <a16:creationId xmlns:a16="http://schemas.microsoft.com/office/drawing/2014/main" id="{EBB3E318-F402-4078-B501-042FDC880712}"/>
+                <a16:creationId xmlns:a16="http://schemas.microsoft.com/office/drawing/2014/main" id="{9AE8F9BA-8FAA-46E9-9AD6-7E261F9179F2}"/>
               </a:ext>
             </a:extLst>
           </p:cNvPr>
@@ -15441,7 +15441,7 @@
           <p:cNvPr id="5" name="Mogelijke verklaring">
             <a:extLst xmlns:a="http://schemas.openxmlformats.org/drawingml/2006/main">
               <a:ext uri="{FF2B5EF4-FFF2-40B4-BE49-F238E27FC236}">
-                <a16:creationId xmlns:a16="http://schemas.microsoft.com/office/drawing/2014/main" id="{37CFE578-5F02-4462-89C5-03318C8E3E36}"/>
+                <a16:creationId xmlns:a16="http://schemas.microsoft.com/office/drawing/2014/main" id="{4E7C05DA-454A-4F74-B290-A77292B30E6C}"/>
               </a:ext>
             </a:extLst>
           </p:cNvPr>
@@ -15498,7 +15498,7 @@
           <p:cNvPr id="6" name="Een streamingabonnement is mogelijk makkelijker op te z">
             <a:extLst xmlns:a="http://schemas.openxmlformats.org/drawingml/2006/main">
               <a:ext uri="{FF2B5EF4-FFF2-40B4-BE49-F238E27FC236}">
-                <a16:creationId xmlns:a16="http://schemas.microsoft.com/office/drawing/2014/main" id="{E7550BD0-F046-4580-8BCA-CE01D2F18DF9}"/>
+                <a16:creationId xmlns:a16="http://schemas.microsoft.com/office/drawing/2014/main" id="{7096772B-66B8-4138-938B-7FE16DD7ABB3}"/>
               </a:ext>
             </a:extLst>
           </p:cNvPr>
@@ -15578,7 +15578,7 @@
           <p:cNvPr id="7" name="">
             <a:extLst xmlns:a="http://schemas.openxmlformats.org/drawingml/2006/main">
               <a:ext uri="{FF2B5EF4-FFF2-40B4-BE49-F238E27FC236}">
-                <a16:creationId xmlns:a16="http://schemas.microsoft.com/office/drawing/2014/main" id="{88B3B7AC-6F27-4062-AE4F-44607B4A986D}"/>
+                <a16:creationId xmlns:a16="http://schemas.microsoft.com/office/drawing/2014/main" id="{66C8EA2A-FF9C-405E-8D70-0642A0ADF902}"/>
               </a:ext>
             </a:extLst>
           </p:cNvPr>
@@ -15607,7 +15607,7 @@
           <p:cNvPr id="8" name="Dat kan bij StreamNow een sterkere procentuele&#10;hoeveelh">
             <a:extLst xmlns:a="http://schemas.openxmlformats.org/drawingml/2006/main">
               <a:ext uri="{FF2B5EF4-FFF2-40B4-BE49-F238E27FC236}">
-                <a16:creationId xmlns:a16="http://schemas.microsoft.com/office/drawing/2014/main" id="{06D751B0-4271-4DEA-B6B9-97034628079D}"/>
+                <a16:creationId xmlns:a16="http://schemas.microsoft.com/office/drawing/2014/main" id="{48C6948E-2730-4429-B497-82D13ECC75FE}"/>
               </a:ext>
             </a:extLst>
           </p:cNvPr>
@@ -15687,7 +15687,7 @@
           <p:cNvPr id="9" name="De gegeven cijfers bewijzen deze oorzaak niet.">
             <a:extLst xmlns:a="http://schemas.openxmlformats.org/drawingml/2006/main">
               <a:ext uri="{FF2B5EF4-FFF2-40B4-BE49-F238E27FC236}">
-                <a16:creationId xmlns:a16="http://schemas.microsoft.com/office/drawing/2014/main" id="{0E925012-ACB3-4847-B383-B7158B1446B1}"/>
+                <a16:creationId xmlns:a16="http://schemas.microsoft.com/office/drawing/2014/main" id="{19EBDD8D-8E67-4707-8F51-90C80E25F17A}"/>
               </a:ext>
             </a:extLst>
           </p:cNvPr>
@@ -15742,7 +15742,7 @@
     </p:spTree>
     <p:extLst>
       <p:ext uri="{BB962C8B-B14F-4D97-AF65-F5344CB8AC3E}">
-        <p14:creationId xmlns:p14="http://schemas.microsoft.com/office/powerpoint/2010/main" val="21329262"/>
+        <p14:creationId xmlns:p14="http://schemas.microsoft.com/office/powerpoint/2010/main" val="1715180936"/>
       </p:ext>
     </p:extLst>
   </p:cSld>
@@ -15773,7 +15773,7 @@
           <p:cNvPr id="14" name="Antwoordcontrole bij opgave 7">
             <a:extLst xmlns:a="http://schemas.openxmlformats.org/drawingml/2006/main">
               <a:ext uri="{FF2B5EF4-FFF2-40B4-BE49-F238E27FC236}">
-                <a16:creationId xmlns:a16="http://schemas.microsoft.com/office/drawing/2014/main" id="{C782611D-913A-4CA2-8BC6-2B85085E171C}"/>
+                <a16:creationId xmlns:a16="http://schemas.microsoft.com/office/drawing/2014/main" id="{C2E07A7E-244A-4707-A9EC-9029CF0C700E}"/>
               </a:ext>
             </a:extLst>
           </p:cNvPr>
@@ -15830,7 +15830,7 @@
           <p:cNvPr id="2" name="">
             <a:extLst xmlns:a="http://schemas.openxmlformats.org/drawingml/2006/main">
               <a:ext uri="{FF2B5EF4-FFF2-40B4-BE49-F238E27FC236}">
-                <a16:creationId xmlns:a16="http://schemas.microsoft.com/office/drawing/2014/main" id="{F53D2B67-F3A2-483E-9252-34C9A067AE33}"/>
+                <a16:creationId xmlns:a16="http://schemas.microsoft.com/office/drawing/2014/main" id="{FBFCAA54-2A17-4A72-AE35-CB6A58E5BDCD}"/>
               </a:ext>
             </a:extLst>
           </p:cNvPr>
@@ -15859,7 +15859,7 @@
           <p:cNvPr id="3" name="§2.2.1 Prijselasticiteit">
             <a:extLst xmlns:a="http://schemas.openxmlformats.org/drawingml/2006/main">
               <a:ext uri="{FF2B5EF4-FFF2-40B4-BE49-F238E27FC236}">
-                <a16:creationId xmlns:a16="http://schemas.microsoft.com/office/drawing/2014/main" id="{BA4E0BF4-0ADE-4269-80D8-3EF48B101F80}"/>
+                <a16:creationId xmlns:a16="http://schemas.microsoft.com/office/drawing/2014/main" id="{B1EFAE78-4424-4DC9-B25E-ADF1A051D190}"/>
               </a:ext>
             </a:extLst>
           </p:cNvPr>
@@ -15916,7 +15916,7 @@
           <p:cNvPr id="4" name="slide-number">
             <a:extLst xmlns:a="http://schemas.openxmlformats.org/drawingml/2006/main">
               <a:ext uri="{FF2B5EF4-FFF2-40B4-BE49-F238E27FC236}">
-                <a16:creationId xmlns:a16="http://schemas.microsoft.com/office/drawing/2014/main" id="{F4269B32-B2FB-43FD-81D4-599DCE7C3187}"/>
+                <a16:creationId xmlns:a16="http://schemas.microsoft.com/office/drawing/2014/main" id="{06E950A3-9CA2-4BE0-B8D8-8AF55293F41B}"/>
               </a:ext>
             </a:extLst>
           </p:cNvPr>
@@ -15973,7 +15973,7 @@
           <p:cNvPr id="5" name="a · Berekening">
             <a:extLst xmlns:a="http://schemas.openxmlformats.org/drawingml/2006/main">
               <a:ext uri="{FF2B5EF4-FFF2-40B4-BE49-F238E27FC236}">
-                <a16:creationId xmlns:a16="http://schemas.microsoft.com/office/drawing/2014/main" id="{9C13509D-9531-48E5-9259-3E57A2D08796}"/>
+                <a16:creationId xmlns:a16="http://schemas.microsoft.com/office/drawing/2014/main" id="{281A3942-929B-4E37-A51A-A26DFF380C84}"/>
               </a:ext>
             </a:extLst>
           </p:cNvPr>
@@ -16030,7 +16030,7 @@
           <p:cNvPr id="6" name="Oude waarden als noemer, +20%, −16%, Ev = −0,8.">
             <a:extLst xmlns:a="http://schemas.openxmlformats.org/drawingml/2006/main">
               <a:ext uri="{FF2B5EF4-FFF2-40B4-BE49-F238E27FC236}">
-                <a16:creationId xmlns:a16="http://schemas.microsoft.com/office/drawing/2014/main" id="{EB24972E-A495-4A62-A1B3-A16CE450268A}"/>
+                <a16:creationId xmlns:a16="http://schemas.microsoft.com/office/drawing/2014/main" id="{66E3FB13-497A-46DE-B94B-642808908AF3}"/>
               </a:ext>
             </a:extLst>
           </p:cNvPr>
@@ -16087,7 +16087,7 @@
           <p:cNvPr id="7" name="b · Betekenis">
             <a:extLst xmlns:a="http://schemas.openxmlformats.org/drawingml/2006/main">
               <a:ext uri="{FF2B5EF4-FFF2-40B4-BE49-F238E27FC236}">
-                <a16:creationId xmlns:a16="http://schemas.microsoft.com/office/drawing/2014/main" id="{454B617B-9E66-46A8-A384-FD87FFCBFAE5}"/>
+                <a16:creationId xmlns:a16="http://schemas.microsoft.com/office/drawing/2014/main" id="{5D9D7122-7CF3-4E8F-9F2D-24B8112F3C65}"/>
               </a:ext>
             </a:extLst>
           </p:cNvPr>
@@ -16144,7 +16144,7 @@
           <p:cNvPr id="8" name="Prijsinelastisch, met 16% tegenover 20% toegelicht.">
             <a:extLst xmlns:a="http://schemas.openxmlformats.org/drawingml/2006/main">
               <a:ext uri="{FF2B5EF4-FFF2-40B4-BE49-F238E27FC236}">
-                <a16:creationId xmlns:a16="http://schemas.microsoft.com/office/drawing/2014/main" id="{8AF7DCC2-65E1-4B39-BAD4-50EAA3C69EE5}"/>
+                <a16:creationId xmlns:a16="http://schemas.microsoft.com/office/drawing/2014/main" id="{AFF97A35-5D22-4A19-8D3D-02FB13205495}"/>
               </a:ext>
             </a:extLst>
           </p:cNvPr>
@@ -16201,7 +16201,7 @@
           <p:cNvPr id="9" name="c · Vergelijking">
             <a:extLst xmlns:a="http://schemas.openxmlformats.org/drawingml/2006/main">
               <a:ext uri="{FF2B5EF4-FFF2-40B4-BE49-F238E27FC236}">
-                <a16:creationId xmlns:a16="http://schemas.microsoft.com/office/drawing/2014/main" id="{677FF534-D02A-467B-AEDB-101E08F3A67B}"/>
+                <a16:creationId xmlns:a16="http://schemas.microsoft.com/office/drawing/2014/main" id="{824A1D51-B85F-439D-9202-48B22C47CF81}"/>
               </a:ext>
             </a:extLst>
           </p:cNvPr>
@@ -16258,7 +16258,7 @@
           <p:cNvPr id="10" name="StreamNow prijselastisch en relatief prijsgevoeliger.">
             <a:extLst xmlns:a="http://schemas.openxmlformats.org/drawingml/2006/main">
               <a:ext uri="{FF2B5EF4-FFF2-40B4-BE49-F238E27FC236}">
-                <a16:creationId xmlns:a16="http://schemas.microsoft.com/office/drawing/2014/main" id="{617A6027-DBFA-41FE-8DFE-8D6C6C632DBF}"/>
+                <a16:creationId xmlns:a16="http://schemas.microsoft.com/office/drawing/2014/main" id="{CF79CA27-411E-41BC-8959-68163ACAE7B9}"/>
               </a:ext>
             </a:extLst>
           </p:cNvPr>
@@ -16315,7 +16315,7 @@
           <p:cNvPr id="11" name="d · Verklaring">
             <a:extLst xmlns:a="http://schemas.openxmlformats.org/drawingml/2006/main">
               <a:ext uri="{FF2B5EF4-FFF2-40B4-BE49-F238E27FC236}">
-                <a16:creationId xmlns:a16="http://schemas.microsoft.com/office/drawing/2014/main" id="{ABE42BA3-DA0E-4037-A952-A38EF8331C97}"/>
+                <a16:creationId xmlns:a16="http://schemas.microsoft.com/office/drawing/2014/main" id="{0CB474E6-099A-4494-BFAA-7318131B1DFC}"/>
               </a:ext>
             </a:extLst>
           </p:cNvPr>
@@ -16372,7 +16372,7 @@
           <p:cNvPr id="12" name="Een mogelijk mechanisme, met een passende beperking.">
             <a:extLst xmlns:a="http://schemas.openxmlformats.org/drawingml/2006/main">
               <a:ext uri="{FF2B5EF4-FFF2-40B4-BE49-F238E27FC236}">
-                <a16:creationId xmlns:a16="http://schemas.microsoft.com/office/drawing/2014/main" id="{D5AB8C2D-D7D6-4BF2-83EC-D7D0954DB261}"/>
+                <a16:creationId xmlns:a16="http://schemas.microsoft.com/office/drawing/2014/main" id="{92F4943E-613E-4B01-9906-E29A666F819D}"/>
               </a:ext>
             </a:extLst>
           </p:cNvPr>
@@ -16429,7 +16429,7 @@
           <p:cNvPr id="13" name="Verbeter één ontbrekende stap in je eigen antwoord.">
             <a:extLst xmlns:a="http://schemas.openxmlformats.org/drawingml/2006/main">
               <a:ext uri="{FF2B5EF4-FFF2-40B4-BE49-F238E27FC236}">
-                <a16:creationId xmlns:a16="http://schemas.microsoft.com/office/drawing/2014/main" id="{10DFC075-4DCF-4732-BE82-07C52CC562F5}"/>
+                <a16:creationId xmlns:a16="http://schemas.microsoft.com/office/drawing/2014/main" id="{836DCA60-B279-49E2-A024-29079C39C385}"/>
               </a:ext>
             </a:extLst>
           </p:cNvPr>
@@ -16484,7 +16484,7 @@
     </p:spTree>
     <p:extLst>
       <p:ext uri="{BB962C8B-B14F-4D97-AF65-F5344CB8AC3E}">
-        <p14:creationId xmlns:p14="http://schemas.microsoft.com/office/powerpoint/2010/main" val="419845321"/>
+        <p14:creationId xmlns:p14="http://schemas.microsoft.com/office/powerpoint/2010/main" val="1669818721"/>
       </p:ext>
     </p:extLst>
   </p:cSld>
@@ -16515,7 +16515,7 @@
           <p:cNvPr id="29" name="Deze les: §2.2.1 Prijselasticiteit">
             <a:extLst xmlns:a="http://schemas.openxmlformats.org/drawingml/2006/main">
               <a:ext uri="{FF2B5EF4-FFF2-40B4-BE49-F238E27FC236}">
-                <a16:creationId xmlns:a16="http://schemas.microsoft.com/office/drawing/2014/main" id="{7BB9A3B7-74AC-430F-B65A-CE1E0FC21D0C}"/>
+                <a16:creationId xmlns:a16="http://schemas.microsoft.com/office/drawing/2014/main" id="{DD46BE14-E016-4AF4-8B2C-E2B6E0EB7B7B}"/>
               </a:ext>
             </a:extLst>
           </p:cNvPr>
@@ -16572,7 +16572,7 @@
           <p:cNvPr id="2" name="">
             <a:extLst xmlns:a="http://schemas.openxmlformats.org/drawingml/2006/main">
               <a:ext uri="{FF2B5EF4-FFF2-40B4-BE49-F238E27FC236}">
-                <a16:creationId xmlns:a16="http://schemas.microsoft.com/office/drawing/2014/main" id="{5947C767-6BD7-49FC-AAE0-F8B3F5D3F583}"/>
+                <a16:creationId xmlns:a16="http://schemas.microsoft.com/office/drawing/2014/main" id="{81063044-2C4D-4BE5-B774-E9AD37F799EE}"/>
               </a:ext>
             </a:extLst>
           </p:cNvPr>
@@ -16601,7 +16601,7 @@
           <p:cNvPr id="3" name="§2.2.1 Prijselasticiteit">
             <a:extLst xmlns:a="http://schemas.openxmlformats.org/drawingml/2006/main">
               <a:ext uri="{FF2B5EF4-FFF2-40B4-BE49-F238E27FC236}">
-                <a16:creationId xmlns:a16="http://schemas.microsoft.com/office/drawing/2014/main" id="{09B95EE5-E799-40F8-B4A2-9401A06CB27E}"/>
+                <a16:creationId xmlns:a16="http://schemas.microsoft.com/office/drawing/2014/main" id="{D77EB3A3-E5A1-4D81-B111-55D5DE50DCD0}"/>
               </a:ext>
             </a:extLst>
           </p:cNvPr>
@@ -16658,7 +16658,7 @@
           <p:cNvPr id="4" name="slide-number">
             <a:extLst xmlns:a="http://schemas.openxmlformats.org/drawingml/2006/main">
               <a:ext uri="{FF2B5EF4-FFF2-40B4-BE49-F238E27FC236}">
-                <a16:creationId xmlns:a16="http://schemas.microsoft.com/office/drawing/2014/main" id="{2EB5E7B9-7485-4969-AA6A-4EBCF5DC10F8}"/>
+                <a16:creationId xmlns:a16="http://schemas.microsoft.com/office/drawing/2014/main" id="{2B4BFA7F-3778-42A8-9B44-44528C1C47D9}"/>
               </a:ext>
             </a:extLst>
           </p:cNvPr>
@@ -16715,7 +16715,7 @@
           <p:cNvPr id="5" name="phase">
             <a:extLst xmlns:a="http://schemas.openxmlformats.org/drawingml/2006/main">
               <a:ext uri="{FF2B5EF4-FFF2-40B4-BE49-F238E27FC236}">
-                <a16:creationId xmlns:a16="http://schemas.microsoft.com/office/drawing/2014/main" id="{11070B11-901E-4F60-8E6D-8033E2D4D46B}"/>
+                <a16:creationId xmlns:a16="http://schemas.microsoft.com/office/drawing/2014/main" id="{F8A78EB2-5389-4DF9-A578-8E16CE269A17}"/>
               </a:ext>
             </a:extLst>
           </p:cNvPr>
@@ -16772,7 +16772,7 @@
           <p:cNvPr id="6" name="Lesroute">
             <a:extLst xmlns:a="http://schemas.openxmlformats.org/drawingml/2006/main">
               <a:ext uri="{FF2B5EF4-FFF2-40B4-BE49-F238E27FC236}">
-                <a16:creationId xmlns:a16="http://schemas.microsoft.com/office/drawing/2014/main" id="{2AD0DE76-77DD-4B31-B519-20071DD2CE38}"/>
+                <a16:creationId xmlns:a16="http://schemas.microsoft.com/office/drawing/2014/main" id="{49F37E25-DF64-4FC3-A64C-476B96B77ECA}"/>
               </a:ext>
             </a:extLst>
           </p:cNvPr>
@@ -16829,7 +16829,7 @@
           <p:cNvPr id="7" name="route-number-1">
             <a:extLst xmlns:a="http://schemas.openxmlformats.org/drawingml/2006/main">
               <a:ext uri="{FF2B5EF4-FFF2-40B4-BE49-F238E27FC236}">
-                <a16:creationId xmlns:a16="http://schemas.microsoft.com/office/drawing/2014/main" id="{107CFBB6-4B35-499F-BCFE-AD558A60D731}"/>
+                <a16:creationId xmlns:a16="http://schemas.microsoft.com/office/drawing/2014/main" id="{75B36E44-7F7B-4748-82DD-16897035998E}"/>
               </a:ext>
             </a:extLst>
           </p:cNvPr>
@@ -16886,7 +16886,7 @@
           <p:cNvPr id="8" name="route-1">
             <a:extLst xmlns:a="http://schemas.openxmlformats.org/drawingml/2006/main">
               <a:ext uri="{FF2B5EF4-FFF2-40B4-BE49-F238E27FC236}">
-                <a16:creationId xmlns:a16="http://schemas.microsoft.com/office/drawing/2014/main" id="{53056A0B-C0CA-466C-B51D-CD971B6F4DCA}"/>
+                <a16:creationId xmlns:a16="http://schemas.microsoft.com/office/drawing/2014/main" id="{35C4DD1B-989C-48C9-8127-32FC1279594B}"/>
               </a:ext>
             </a:extLst>
           </p:cNvPr>
@@ -16943,7 +16943,7 @@
           <p:cNvPr id="9" name="route-number-2">
             <a:extLst xmlns:a="http://schemas.openxmlformats.org/drawingml/2006/main">
               <a:ext uri="{FF2B5EF4-FFF2-40B4-BE49-F238E27FC236}">
-                <a16:creationId xmlns:a16="http://schemas.microsoft.com/office/drawing/2014/main" id="{566BF406-19A3-442B-B5C3-2431171515EE}"/>
+                <a16:creationId xmlns:a16="http://schemas.microsoft.com/office/drawing/2014/main" id="{E591CEC7-651D-47A9-955B-E774E4979BD8}"/>
               </a:ext>
             </a:extLst>
           </p:cNvPr>
@@ -17000,7 +17000,7 @@
           <p:cNvPr id="10" name="route-2">
             <a:extLst xmlns:a="http://schemas.openxmlformats.org/drawingml/2006/main">
               <a:ext uri="{FF2B5EF4-FFF2-40B4-BE49-F238E27FC236}">
-                <a16:creationId xmlns:a16="http://schemas.microsoft.com/office/drawing/2014/main" id="{8B65FA85-5AA3-4D1C-B91D-D34542CD75BA}"/>
+                <a16:creationId xmlns:a16="http://schemas.microsoft.com/office/drawing/2014/main" id="{428455B2-159A-4B98-8A7C-DCD81A8F4071}"/>
               </a:ext>
             </a:extLst>
           </p:cNvPr>
@@ -17057,7 +17057,7 @@
           <p:cNvPr id="11" name="route-number-3">
             <a:extLst xmlns:a="http://schemas.openxmlformats.org/drawingml/2006/main">
               <a:ext uri="{FF2B5EF4-FFF2-40B4-BE49-F238E27FC236}">
-                <a16:creationId xmlns:a16="http://schemas.microsoft.com/office/drawing/2014/main" id="{E33A2504-9E3D-4501-A781-39863A865942}"/>
+                <a16:creationId xmlns:a16="http://schemas.microsoft.com/office/drawing/2014/main" id="{E5CE8161-088B-4747-B73C-CBBE6900BE2B}"/>
               </a:ext>
             </a:extLst>
           </p:cNvPr>
@@ -17114,7 +17114,7 @@
           <p:cNvPr id="12" name="route-3">
             <a:extLst xmlns:a="http://schemas.openxmlformats.org/drawingml/2006/main">
               <a:ext uri="{FF2B5EF4-FFF2-40B4-BE49-F238E27FC236}">
-                <a16:creationId xmlns:a16="http://schemas.microsoft.com/office/drawing/2014/main" id="{10B8843F-4F1E-45C1-B5DF-64382E1F25E2}"/>
+                <a16:creationId xmlns:a16="http://schemas.microsoft.com/office/drawing/2014/main" id="{07765A90-43CF-4DB6-AE76-8D9FF32BFD6E}"/>
               </a:ext>
             </a:extLst>
           </p:cNvPr>
@@ -17171,7 +17171,7 @@
           <p:cNvPr id="13" name="route-number-4">
             <a:extLst xmlns:a="http://schemas.openxmlformats.org/drawingml/2006/main">
               <a:ext uri="{FF2B5EF4-FFF2-40B4-BE49-F238E27FC236}">
-                <a16:creationId xmlns:a16="http://schemas.microsoft.com/office/drawing/2014/main" id="{C8D85A32-AC4E-425E-BE16-F28CF3F16C04}"/>
+                <a16:creationId xmlns:a16="http://schemas.microsoft.com/office/drawing/2014/main" id="{DA8F8D77-085F-466F-B47A-6EDFE5E8285E}"/>
               </a:ext>
             </a:extLst>
           </p:cNvPr>
@@ -17228,7 +17228,7 @@
           <p:cNvPr id="14" name="route-4">
             <a:extLst xmlns:a="http://schemas.openxmlformats.org/drawingml/2006/main">
               <a:ext uri="{FF2B5EF4-FFF2-40B4-BE49-F238E27FC236}">
-                <a16:creationId xmlns:a16="http://schemas.microsoft.com/office/drawing/2014/main" id="{CA732FA5-E297-470F-BAD9-FA4B85D0C11A}"/>
+                <a16:creationId xmlns:a16="http://schemas.microsoft.com/office/drawing/2014/main" id="{B7558465-8EE3-4CD7-A0D4-AA5E5C538B27}"/>
               </a:ext>
             </a:extLst>
           </p:cNvPr>
@@ -17285,7 +17285,7 @@
           <p:cNvPr id="15" name="route-number-5">
             <a:extLst xmlns:a="http://schemas.openxmlformats.org/drawingml/2006/main">
               <a:ext uri="{FF2B5EF4-FFF2-40B4-BE49-F238E27FC236}">
-                <a16:creationId xmlns:a16="http://schemas.microsoft.com/office/drawing/2014/main" id="{3040A07B-D19D-4254-B2EE-1FC24245E42D}"/>
+                <a16:creationId xmlns:a16="http://schemas.microsoft.com/office/drawing/2014/main" id="{2B9FAB54-3CD3-4359-9AD6-99890CC5BA8C}"/>
               </a:ext>
             </a:extLst>
           </p:cNvPr>
@@ -17342,7 +17342,7 @@
           <p:cNvPr id="16" name="route-5">
             <a:extLst xmlns:a="http://schemas.openxmlformats.org/drawingml/2006/main">
               <a:ext uri="{FF2B5EF4-FFF2-40B4-BE49-F238E27FC236}">
-                <a16:creationId xmlns:a16="http://schemas.microsoft.com/office/drawing/2014/main" id="{735B340B-C8DB-46FC-A11C-DB95CC266582}"/>
+                <a16:creationId xmlns:a16="http://schemas.microsoft.com/office/drawing/2014/main" id="{1B1CE520-66E6-4497-939E-843D9E837D94}"/>
               </a:ext>
             </a:extLst>
           </p:cNvPr>
@@ -17399,7 +17399,7 @@
           <p:cNvPr id="17" name="route-number-6">
             <a:extLst xmlns:a="http://schemas.openxmlformats.org/drawingml/2006/main">
               <a:ext uri="{FF2B5EF4-FFF2-40B4-BE49-F238E27FC236}">
-                <a16:creationId xmlns:a16="http://schemas.microsoft.com/office/drawing/2014/main" id="{A687D41C-95F2-4184-864A-DFCC9A8C93C7}"/>
+                <a16:creationId xmlns:a16="http://schemas.microsoft.com/office/drawing/2014/main" id="{24206753-0C60-494D-BD37-09D41F44EC9C}"/>
               </a:ext>
             </a:extLst>
           </p:cNvPr>
@@ -17456,7 +17456,7 @@
           <p:cNvPr id="18" name="route-6">
             <a:extLst xmlns:a="http://schemas.openxmlformats.org/drawingml/2006/main">
               <a:ext uri="{FF2B5EF4-FFF2-40B4-BE49-F238E27FC236}">
-                <a16:creationId xmlns:a16="http://schemas.microsoft.com/office/drawing/2014/main" id="{F35403CB-D8E6-4939-8718-BB27F791E5B3}"/>
+                <a16:creationId xmlns:a16="http://schemas.microsoft.com/office/drawing/2014/main" id="{38E35EA0-53D4-4188-9C60-99F4A198787A}"/>
               </a:ext>
             </a:extLst>
           </p:cNvPr>
@@ -17513,7 +17513,7 @@
           <p:cNvPr id="19" name="route-number-7">
             <a:extLst xmlns:a="http://schemas.openxmlformats.org/drawingml/2006/main">
               <a:ext uri="{FF2B5EF4-FFF2-40B4-BE49-F238E27FC236}">
-                <a16:creationId xmlns:a16="http://schemas.microsoft.com/office/drawing/2014/main" id="{E26F563B-E316-424D-BCE5-2387A02B9A57}"/>
+                <a16:creationId xmlns:a16="http://schemas.microsoft.com/office/drawing/2014/main" id="{50A2857F-C199-4A44-B493-0B94D6583618}"/>
               </a:ext>
             </a:extLst>
           </p:cNvPr>
@@ -17570,7 +17570,7 @@
           <p:cNvPr id="20" name="route-7">
             <a:extLst xmlns:a="http://schemas.openxmlformats.org/drawingml/2006/main">
               <a:ext uri="{FF2B5EF4-FFF2-40B4-BE49-F238E27FC236}">
-                <a16:creationId xmlns:a16="http://schemas.microsoft.com/office/drawing/2014/main" id="{F69F4A7D-A305-40CB-8CCD-14F4A500A461}"/>
+                <a16:creationId xmlns:a16="http://schemas.microsoft.com/office/drawing/2014/main" id="{3A60AE0B-DD06-40C2-B9A1-0D8300F475C0}"/>
               </a:ext>
             </a:extLst>
           </p:cNvPr>
@@ -17627,7 +17627,7 @@
           <p:cNvPr id="21" name="Lesdoelen">
             <a:extLst xmlns:a="http://schemas.openxmlformats.org/drawingml/2006/main">
               <a:ext uri="{FF2B5EF4-FFF2-40B4-BE49-F238E27FC236}">
-                <a16:creationId xmlns:a16="http://schemas.microsoft.com/office/drawing/2014/main" id="{6A537D5E-D86D-4D6C-B503-C6F54BEE8BAA}"/>
+                <a16:creationId xmlns:a16="http://schemas.microsoft.com/office/drawing/2014/main" id="{16B04CA8-3795-4FD6-8BFE-B21997AF6229}"/>
               </a:ext>
             </a:extLst>
           </p:cNvPr>
@@ -17684,7 +17684,7 @@
           <p:cNvPr id="22" name="overview-goals">
             <a:extLst xmlns:a="http://schemas.openxmlformats.org/drawingml/2006/main">
               <a:ext uri="{FF2B5EF4-FFF2-40B4-BE49-F238E27FC236}">
-                <a16:creationId xmlns:a16="http://schemas.microsoft.com/office/drawing/2014/main" id="{4EC5DF66-74C4-485B-823B-24983CC48762}"/>
+                <a16:creationId xmlns:a16="http://schemas.microsoft.com/office/drawing/2014/main" id="{01EC26C3-B42F-4483-B3EB-B8C985EBE451}"/>
               </a:ext>
             </a:extLst>
           </p:cNvPr>
@@ -17787,7 +17787,7 @@
           <p:cNvPr id="23" name="">
             <a:extLst xmlns:a="http://schemas.openxmlformats.org/drawingml/2006/main">
               <a:ext uri="{FF2B5EF4-FFF2-40B4-BE49-F238E27FC236}">
-                <a16:creationId xmlns:a16="http://schemas.microsoft.com/office/drawing/2014/main" id="{DFD342B8-190C-4CEA-B7F8-87AF8FE5F1A6}"/>
+                <a16:creationId xmlns:a16="http://schemas.microsoft.com/office/drawing/2014/main" id="{5B70BD6E-C78A-49CD-BAEE-261A0D81979E}"/>
               </a:ext>
             </a:extLst>
           </p:cNvPr>
@@ -17816,7 +17816,7 @@
           <p:cNvPr id="24" name="Startopdracht">
             <a:extLst xmlns:a="http://schemas.openxmlformats.org/drawingml/2006/main">
               <a:ext uri="{FF2B5EF4-FFF2-40B4-BE49-F238E27FC236}">
-                <a16:creationId xmlns:a16="http://schemas.microsoft.com/office/drawing/2014/main" id="{58F0CB5E-BD75-48B3-B715-AAA43416C426}"/>
+                <a16:creationId xmlns:a16="http://schemas.microsoft.com/office/drawing/2014/main" id="{1B17B63A-3F49-45F4-AE51-35AC8E77B27F}"/>
               </a:ext>
             </a:extLst>
           </p:cNvPr>
@@ -17873,7 +17873,7 @@
           <p:cNvPr id="25" name="overview-start">
             <a:extLst xmlns:a="http://schemas.openxmlformats.org/drawingml/2006/main">
               <a:ext uri="{FF2B5EF4-FFF2-40B4-BE49-F238E27FC236}">
-                <a16:creationId xmlns:a16="http://schemas.microsoft.com/office/drawing/2014/main" id="{2E6E1FC9-87A8-4CC9-BF2C-5E4A44BE5ECC}"/>
+                <a16:creationId xmlns:a16="http://schemas.microsoft.com/office/drawing/2014/main" id="{FDA8FB6C-3909-41EE-AB60-FD5EB1A4E560}"/>
               </a:ext>
             </a:extLst>
           </p:cNvPr>
@@ -17920,7 +17920,7 @@
                 <a:ea typeface="Arial"/>
                 <a:cs typeface="Arial"/>
               </a:rPr>
-              <a:t>Pagina 40 · Opgaven 1 en 2</a:t>
+              <a:t>Pagina 41 · Opgaven 1 en 2</a:t>
             </a:r>
           </a:p>
           <a:p xmlns:a="http://schemas.openxmlformats.org/drawingml/2006/main">
@@ -17966,7 +17966,7 @@
                 <a:ea typeface="Arial"/>
                 <a:cs typeface="Arial"/>
               </a:rPr>
-              <a:t>2: verkennen met theorie p. 38</a:t>
+              <a:t>2: verkennen met theorie p. 39</a:t>
             </a:r>
           </a:p>
         </p:txBody>
@@ -17976,7 +17976,7 @@
           <p:cNvPr id="26" name="">
             <a:extLst xmlns:a="http://schemas.openxmlformats.org/drawingml/2006/main">
               <a:ext uri="{FF2B5EF4-FFF2-40B4-BE49-F238E27FC236}">
-                <a16:creationId xmlns:a16="http://schemas.microsoft.com/office/drawing/2014/main" id="{4A248C7A-8236-43B4-8153-E9AFFFAB5B5B}"/>
+                <a16:creationId xmlns:a16="http://schemas.microsoft.com/office/drawing/2014/main" id="{BF4B7346-03AD-4E06-AEA6-1E2AC4374B09}"/>
               </a:ext>
             </a:extLst>
           </p:cNvPr>
@@ -18005,7 +18005,7 @@
           <p:cNvPr id="27" name="Huiswerk">
             <a:extLst xmlns:a="http://schemas.openxmlformats.org/drawingml/2006/main">
               <a:ext uri="{FF2B5EF4-FFF2-40B4-BE49-F238E27FC236}">
-                <a16:creationId xmlns:a16="http://schemas.microsoft.com/office/drawing/2014/main" id="{35EAD1FC-1FEE-4191-AA92-4BE294943843}"/>
+                <a16:creationId xmlns:a16="http://schemas.microsoft.com/office/drawing/2014/main" id="{52CD4291-1BBC-44FB-9776-C1A5BFC5B80B}"/>
               </a:ext>
             </a:extLst>
           </p:cNvPr>
@@ -18062,7 +18062,7 @@
           <p:cNvPr id="28" name="overview-homework">
             <a:extLst xmlns:a="http://schemas.openxmlformats.org/drawingml/2006/main">
               <a:ext uri="{FF2B5EF4-FFF2-40B4-BE49-F238E27FC236}">
-                <a16:creationId xmlns:a16="http://schemas.microsoft.com/office/drawing/2014/main" id="{D4B1529B-2A5A-47EF-AD47-3E1A7822A6A0}"/>
+                <a16:creationId xmlns:a16="http://schemas.microsoft.com/office/drawing/2014/main" id="{4F65154E-8433-4D0A-9B9A-6CF493C30134}"/>
               </a:ext>
             </a:extLst>
           </p:cNvPr>
@@ -18209,7 +18209,7 @@
     </p:spTree>
     <p:extLst>
       <p:ext uri="{BB962C8B-B14F-4D97-AF65-F5344CB8AC3E}">
-        <p14:creationId xmlns:p14="http://schemas.microsoft.com/office/powerpoint/2010/main" val="851224149"/>
+        <p14:creationId xmlns:p14="http://schemas.microsoft.com/office/powerpoint/2010/main" val="1305728912"/>
       </p:ext>
     </p:extLst>
   </p:cSld>
@@ -18240,7 +18240,7 @@
           <p:cNvPr id="10" name="Een hogere prijs bij het Keramiekcafé">
             <a:extLst xmlns:a="http://schemas.openxmlformats.org/drawingml/2006/main">
               <a:ext uri="{FF2B5EF4-FFF2-40B4-BE49-F238E27FC236}">
-                <a16:creationId xmlns:a16="http://schemas.microsoft.com/office/drawing/2014/main" id="{154BE8C3-DA2D-4246-B530-41B2784418A2}"/>
+                <a16:creationId xmlns:a16="http://schemas.microsoft.com/office/drawing/2014/main" id="{2D13F25A-AE22-41CE-8909-34115318A8EF}"/>
               </a:ext>
             </a:extLst>
           </p:cNvPr>
@@ -18297,7 +18297,7 @@
           <p:cNvPr id="2" name="">
             <a:extLst xmlns:a="http://schemas.openxmlformats.org/drawingml/2006/main">
               <a:ext uri="{FF2B5EF4-FFF2-40B4-BE49-F238E27FC236}">
-                <a16:creationId xmlns:a16="http://schemas.microsoft.com/office/drawing/2014/main" id="{C2E6F18B-528B-4532-A616-7D15B3988913}"/>
+                <a16:creationId xmlns:a16="http://schemas.microsoft.com/office/drawing/2014/main" id="{446D74F7-1C03-481E-BDC6-90ABE7FA3213}"/>
               </a:ext>
             </a:extLst>
           </p:cNvPr>
@@ -18326,7 +18326,7 @@
           <p:cNvPr id="3" name="§2.2.1 Prijselasticiteit">
             <a:extLst xmlns:a="http://schemas.openxmlformats.org/drawingml/2006/main">
               <a:ext uri="{FF2B5EF4-FFF2-40B4-BE49-F238E27FC236}">
-                <a16:creationId xmlns:a16="http://schemas.microsoft.com/office/drawing/2014/main" id="{FAA36583-EFC8-47F7-B720-CECE639ABB8B}"/>
+                <a16:creationId xmlns:a16="http://schemas.microsoft.com/office/drawing/2014/main" id="{E4A04E8A-4F6D-45A2-A091-FBB46940A172}"/>
               </a:ext>
             </a:extLst>
           </p:cNvPr>
@@ -18383,7 +18383,7 @@
           <p:cNvPr id="4" name="slide-number">
             <a:extLst xmlns:a="http://schemas.openxmlformats.org/drawingml/2006/main">
               <a:ext uri="{FF2B5EF4-FFF2-40B4-BE49-F238E27FC236}">
-                <a16:creationId xmlns:a16="http://schemas.microsoft.com/office/drawing/2014/main" id="{FC3B9282-8DA5-4EAD-A008-82417FCBE680}"/>
+                <a16:creationId xmlns:a16="http://schemas.microsoft.com/office/drawing/2014/main" id="{A5F3E7C0-0173-4D1B-B3E3-CF6CAF23CB9E}"/>
               </a:ext>
             </a:extLst>
           </p:cNvPr>
@@ -18440,7 +18440,7 @@
           <p:cNvPr id="5" name="Uitlegvoorbeeld — niet uit het boek">
             <a:extLst xmlns:a="http://schemas.openxmlformats.org/drawingml/2006/main">
               <a:ext uri="{FF2B5EF4-FFF2-40B4-BE49-F238E27FC236}">
-                <a16:creationId xmlns:a16="http://schemas.microsoft.com/office/drawing/2014/main" id="{21CF1C53-CF98-4F94-B65F-2B5210B3C984}"/>
+                <a16:creationId xmlns:a16="http://schemas.microsoft.com/office/drawing/2014/main" id="{F1254409-8655-4F48-AED9-5A6857260EB3}"/>
               </a:ext>
             </a:extLst>
           </p:cNvPr>
@@ -18497,7 +18497,7 @@
           <p:cNvPr id="6" name="Keramiekcafé">
             <a:extLst xmlns:a="http://schemas.openxmlformats.org/drawingml/2006/main">
               <a:ext uri="{FF2B5EF4-FFF2-40B4-BE49-F238E27FC236}">
-                <a16:creationId xmlns:a16="http://schemas.microsoft.com/office/drawing/2014/main" id="{44682E89-BDE5-4521-AD10-496948C05105}"/>
+                <a16:creationId xmlns:a16="http://schemas.microsoft.com/office/drawing/2014/main" id="{AA58E899-0F9A-4C3B-90DD-3442FB64AE9D}"/>
               </a:ext>
             </a:extLst>
           </p:cNvPr>
@@ -18799,7 +18799,7 @@
           <p:cNvPr id="8" name="P is de eigen prijs. Qv is de gevraagde hoeveelheid.">
             <a:extLst xmlns:a="http://schemas.openxmlformats.org/drawingml/2006/main">
               <a:ext uri="{FF2B5EF4-FFF2-40B4-BE49-F238E27FC236}">
-                <a16:creationId xmlns:a16="http://schemas.microsoft.com/office/drawing/2014/main" id="{6D5F02C2-8EFC-46E6-AD91-6DA267286DEB}"/>
+                <a16:creationId xmlns:a16="http://schemas.microsoft.com/office/drawing/2014/main" id="{ADB4B094-AD3F-45FF-86BD-07D347009DCD}"/>
               </a:ext>
             </a:extLst>
           </p:cNvPr>
@@ -18856,7 +18856,7 @@
           <p:cNvPr id="9" name="Andere vraagfactoren blijven gelijk: ceteris paribus.">
             <a:extLst xmlns:a="http://schemas.openxmlformats.org/drawingml/2006/main">
               <a:ext uri="{FF2B5EF4-FFF2-40B4-BE49-F238E27FC236}">
-                <a16:creationId xmlns:a16="http://schemas.microsoft.com/office/drawing/2014/main" id="{9F6DBA5F-F959-4EF5-88CE-3EAF14C4FD29}"/>
+                <a16:creationId xmlns:a16="http://schemas.microsoft.com/office/drawing/2014/main" id="{20A1CCE7-A841-4934-9E5E-E08BCB65E4D8}"/>
               </a:ext>
             </a:extLst>
           </p:cNvPr>
@@ -18911,7 +18911,7 @@
     </p:spTree>
     <p:extLst>
       <p:ext uri="{BB962C8B-B14F-4D97-AF65-F5344CB8AC3E}">
-        <p14:creationId xmlns:p14="http://schemas.microsoft.com/office/powerpoint/2010/main" val="2120564137"/>
+        <p14:creationId xmlns:p14="http://schemas.microsoft.com/office/powerpoint/2010/main" val="1431452940"/>
       </p:ext>
     </p:extLst>
   </p:cSld>
@@ -18942,7 +18942,7 @@
           <p:cNvPr id="14" name="Procenten met de oude waarde als basis">
             <a:extLst xmlns:a="http://schemas.openxmlformats.org/drawingml/2006/main">
               <a:ext uri="{FF2B5EF4-FFF2-40B4-BE49-F238E27FC236}">
-                <a16:creationId xmlns:a16="http://schemas.microsoft.com/office/drawing/2014/main" id="{8DFEA80F-ECBD-4A16-A123-CFCAAE6045EA}"/>
+                <a16:creationId xmlns:a16="http://schemas.microsoft.com/office/drawing/2014/main" id="{11D0B713-E3FF-4241-9FF2-115C45E3F294}"/>
               </a:ext>
             </a:extLst>
           </p:cNvPr>
@@ -18999,7 +18999,7 @@
           <p:cNvPr id="2" name="">
             <a:extLst xmlns:a="http://schemas.openxmlformats.org/drawingml/2006/main">
               <a:ext uri="{FF2B5EF4-FFF2-40B4-BE49-F238E27FC236}">
-                <a16:creationId xmlns:a16="http://schemas.microsoft.com/office/drawing/2014/main" id="{B484FEB5-D4BF-4925-A602-0A66DDCC3E7E}"/>
+                <a16:creationId xmlns:a16="http://schemas.microsoft.com/office/drawing/2014/main" id="{2DCBDD36-8061-45EB-8A5C-6FC6B4E9D7B2}"/>
               </a:ext>
             </a:extLst>
           </p:cNvPr>
@@ -19028,7 +19028,7 @@
           <p:cNvPr id="3" name="§2.2.1 Prijselasticiteit">
             <a:extLst xmlns:a="http://schemas.openxmlformats.org/drawingml/2006/main">
               <a:ext uri="{FF2B5EF4-FFF2-40B4-BE49-F238E27FC236}">
-                <a16:creationId xmlns:a16="http://schemas.microsoft.com/office/drawing/2014/main" id="{EDF3E43D-BEA9-4F9D-B5A6-8EA356BF7FB7}"/>
+                <a16:creationId xmlns:a16="http://schemas.microsoft.com/office/drawing/2014/main" id="{C29661D5-EBFA-4C30-926F-9DC224A73E7B}"/>
               </a:ext>
             </a:extLst>
           </p:cNvPr>
@@ -19085,7 +19085,7 @@
           <p:cNvPr id="4" name="slide-number">
             <a:extLst xmlns:a="http://schemas.openxmlformats.org/drawingml/2006/main">
               <a:ext uri="{FF2B5EF4-FFF2-40B4-BE49-F238E27FC236}">
-                <a16:creationId xmlns:a16="http://schemas.microsoft.com/office/drawing/2014/main" id="{0AD35B75-A018-4162-B9E3-CDFFBDC0C337}"/>
+                <a16:creationId xmlns:a16="http://schemas.microsoft.com/office/drawing/2014/main" id="{02F5C4FF-78AA-42B8-92F3-34566531C1AD}"/>
               </a:ext>
             </a:extLst>
           </p:cNvPr>
@@ -19142,7 +19142,7 @@
           <p:cNvPr id="5" name="Uitlegvoorbeeld — niet uit het boek">
             <a:extLst xmlns:a="http://schemas.openxmlformats.org/drawingml/2006/main">
               <a:ext uri="{FF2B5EF4-FFF2-40B4-BE49-F238E27FC236}">
-                <a16:creationId xmlns:a16="http://schemas.microsoft.com/office/drawing/2014/main" id="{3541FD6B-A198-44FA-9B69-C178A16E0553}"/>
+                <a16:creationId xmlns:a16="http://schemas.microsoft.com/office/drawing/2014/main" id="{25F8DEB0-2748-412E-8D45-1D66B49ECDF8}"/>
               </a:ext>
             </a:extLst>
           </p:cNvPr>
@@ -19199,7 +19199,7 @@
           <p:cNvPr id="6" name="Keramiekcafé">
             <a:extLst xmlns:a="http://schemas.openxmlformats.org/drawingml/2006/main">
               <a:ext uri="{FF2B5EF4-FFF2-40B4-BE49-F238E27FC236}">
-                <a16:creationId xmlns:a16="http://schemas.microsoft.com/office/drawing/2014/main" id="{9C7BAD35-C679-412C-9841-F692ACBEFCF6}"/>
+                <a16:creationId xmlns:a16="http://schemas.microsoft.com/office/drawing/2014/main" id="{3E87133E-0BC2-4D06-9BB5-A92282ECA524}"/>
               </a:ext>
             </a:extLst>
           </p:cNvPr>
@@ -19256,7 +19256,7 @@
           <p:cNvPr id="7" name="%Δ = (nieuw − oud) / oud × 100%">
             <a:extLst xmlns:a="http://schemas.openxmlformats.org/drawingml/2006/main">
               <a:ext uri="{FF2B5EF4-FFF2-40B4-BE49-F238E27FC236}">
-                <a16:creationId xmlns:a16="http://schemas.microsoft.com/office/drawing/2014/main" id="{093CC156-F38B-40B7-A4D7-82BA20C8B244}"/>
+                <a16:creationId xmlns:a16="http://schemas.microsoft.com/office/drawing/2014/main" id="{F58FA13F-C7F7-4F7C-9AA9-AE19F8305A6A}"/>
               </a:ext>
             </a:extLst>
           </p:cNvPr>
@@ -19313,7 +19313,7 @@
           <p:cNvPr id="8" name="">
             <a:extLst xmlns:a="http://schemas.openxmlformats.org/drawingml/2006/main">
               <a:ext uri="{FF2B5EF4-FFF2-40B4-BE49-F238E27FC236}">
-                <a16:creationId xmlns:a16="http://schemas.microsoft.com/office/drawing/2014/main" id="{8B847C81-415C-4D3F-B0CA-261B78F8C316}"/>
+                <a16:creationId xmlns:a16="http://schemas.microsoft.com/office/drawing/2014/main" id="{F59A8905-5741-4197-A600-DBDEE0E9D041}"/>
               </a:ext>
             </a:extLst>
           </p:cNvPr>
@@ -19342,7 +19342,7 @@
           <p:cNvPr id="9" name="Prijs">
             <a:extLst xmlns:a="http://schemas.openxmlformats.org/drawingml/2006/main">
               <a:ext uri="{FF2B5EF4-FFF2-40B4-BE49-F238E27FC236}">
-                <a16:creationId xmlns:a16="http://schemas.microsoft.com/office/drawing/2014/main" id="{B129EA5A-4F45-4CC5-A8E7-4F86107BDAC2}"/>
+                <a16:creationId xmlns:a16="http://schemas.microsoft.com/office/drawing/2014/main" id="{6076D4CE-4089-4D2E-9F5A-4465AA42D057}"/>
               </a:ext>
             </a:extLst>
           </p:cNvPr>
@@ -19399,7 +19399,7 @@
           <p:cNvPr id="10" name="(27 − 24) / 24 × 100% = +12,5%">
             <a:extLst xmlns:a="http://schemas.openxmlformats.org/drawingml/2006/main">
               <a:ext uri="{FF2B5EF4-FFF2-40B4-BE49-F238E27FC236}">
-                <a16:creationId xmlns:a16="http://schemas.microsoft.com/office/drawing/2014/main" id="{3D2E8623-E451-40F1-A904-59776E9D3255}"/>
+                <a16:creationId xmlns:a16="http://schemas.microsoft.com/office/drawing/2014/main" id="{76307126-372C-45B7-BF04-A5DD2C801656}"/>
               </a:ext>
             </a:extLst>
           </p:cNvPr>
@@ -19456,7 +19456,7 @@
           <p:cNvPr id="11" name="Hoeveelheid">
             <a:extLst xmlns:a="http://schemas.openxmlformats.org/drawingml/2006/main">
               <a:ext uri="{FF2B5EF4-FFF2-40B4-BE49-F238E27FC236}">
-                <a16:creationId xmlns:a16="http://schemas.microsoft.com/office/drawing/2014/main" id="{D79B9F35-9594-4986-9D38-C5475F8FCEBB}"/>
+                <a16:creationId xmlns:a16="http://schemas.microsoft.com/office/drawing/2014/main" id="{CBE958D7-A67B-4F91-A4C5-CBAC3872233D}"/>
               </a:ext>
             </a:extLst>
           </p:cNvPr>
@@ -19513,7 +19513,7 @@
           <p:cNvPr id="12" name="(148 − 160) / 160 × 100% = −7,5%">
             <a:extLst xmlns:a="http://schemas.openxmlformats.org/drawingml/2006/main">
               <a:ext uri="{FF2B5EF4-FFF2-40B4-BE49-F238E27FC236}">
-                <a16:creationId xmlns:a16="http://schemas.microsoft.com/office/drawing/2014/main" id="{D57B5D40-31B1-4386-BD76-5AA6E9282DFD}"/>
+                <a16:creationId xmlns:a16="http://schemas.microsoft.com/office/drawing/2014/main" id="{5751AD58-8456-4250-9BAF-3B8AEF01B6BF}"/>
               </a:ext>
             </a:extLst>
           </p:cNvPr>
@@ -19570,7 +19570,7 @@
           <p:cNvPr id="13" name="Een stijging is positief. Een daling is negatief.">
             <a:extLst xmlns:a="http://schemas.openxmlformats.org/drawingml/2006/main">
               <a:ext uri="{FF2B5EF4-FFF2-40B4-BE49-F238E27FC236}">
-                <a16:creationId xmlns:a16="http://schemas.microsoft.com/office/drawing/2014/main" id="{DCB1091B-91F2-4378-8753-B6B0A9B6EC0F}"/>
+                <a16:creationId xmlns:a16="http://schemas.microsoft.com/office/drawing/2014/main" id="{C306C308-E10A-473F-8C37-736FAAC4B39E}"/>
               </a:ext>
             </a:extLst>
           </p:cNvPr>
@@ -19625,7 +19625,7 @@
     </p:spTree>
     <p:extLst>
       <p:ext uri="{BB962C8B-B14F-4D97-AF65-F5344CB8AC3E}">
-        <p14:creationId xmlns:p14="http://schemas.microsoft.com/office/powerpoint/2010/main" val="942861001"/>
+        <p14:creationId xmlns:p14="http://schemas.microsoft.com/office/powerpoint/2010/main" val="1658445316"/>
       </p:ext>
     </p:extLst>
   </p:cSld>
@@ -19656,7 +19656,7 @@
           <p:cNvPr id="9" name="De hoeveelheid reageert procentueel minder sterk">
             <a:extLst xmlns:a="http://schemas.openxmlformats.org/drawingml/2006/main">
               <a:ext uri="{FF2B5EF4-FFF2-40B4-BE49-F238E27FC236}">
-                <a16:creationId xmlns:a16="http://schemas.microsoft.com/office/drawing/2014/main" id="{C5EB5E2F-F728-4CCC-90F6-3348F8936B34}"/>
+                <a16:creationId xmlns:a16="http://schemas.microsoft.com/office/drawing/2014/main" id="{15698A96-0175-4154-BFA2-9FAC999752AB}"/>
               </a:ext>
             </a:extLst>
           </p:cNvPr>
@@ -19713,7 +19713,7 @@
           <p:cNvPr id="2" name="">
             <a:extLst xmlns:a="http://schemas.openxmlformats.org/drawingml/2006/main">
               <a:ext uri="{FF2B5EF4-FFF2-40B4-BE49-F238E27FC236}">
-                <a16:creationId xmlns:a16="http://schemas.microsoft.com/office/drawing/2014/main" id="{61CCD82C-4986-4AFC-B7EE-036806C04D9B}"/>
+                <a16:creationId xmlns:a16="http://schemas.microsoft.com/office/drawing/2014/main" id="{90483DD8-5111-4856-A6F7-A1217847DF35}"/>
               </a:ext>
             </a:extLst>
           </p:cNvPr>
@@ -19742,7 +19742,7 @@
           <p:cNvPr id="3" name="§2.2.1 Prijselasticiteit">
             <a:extLst xmlns:a="http://schemas.openxmlformats.org/drawingml/2006/main">
               <a:ext uri="{FF2B5EF4-FFF2-40B4-BE49-F238E27FC236}">
-                <a16:creationId xmlns:a16="http://schemas.microsoft.com/office/drawing/2014/main" id="{D8540987-D3DA-4BF8-A846-F407D474B076}"/>
+                <a16:creationId xmlns:a16="http://schemas.microsoft.com/office/drawing/2014/main" id="{1828685E-2BF9-410A-8FEE-19C6BC6F9809}"/>
               </a:ext>
             </a:extLst>
           </p:cNvPr>
@@ -19799,7 +19799,7 @@
           <p:cNvPr id="4" name="slide-number">
             <a:extLst xmlns:a="http://schemas.openxmlformats.org/drawingml/2006/main">
               <a:ext uri="{FF2B5EF4-FFF2-40B4-BE49-F238E27FC236}">
-                <a16:creationId xmlns:a16="http://schemas.microsoft.com/office/drawing/2014/main" id="{86C0604D-9523-4133-AA36-1B89F5A41EAD}"/>
+                <a16:creationId xmlns:a16="http://schemas.microsoft.com/office/drawing/2014/main" id="{14211D4D-473F-419F-A2F9-9746710EA1E5}"/>
               </a:ext>
             </a:extLst>
           </p:cNvPr>
@@ -19856,7 +19856,7 @@
           <p:cNvPr id="5" name="Uitlegvoorbeeld — niet uit het boek">
             <a:extLst xmlns:a="http://schemas.openxmlformats.org/drawingml/2006/main">
               <a:ext uri="{FF2B5EF4-FFF2-40B4-BE49-F238E27FC236}">
-                <a16:creationId xmlns:a16="http://schemas.microsoft.com/office/drawing/2014/main" id="{F60EBC25-7845-44E9-B3B9-8AF72DD86F8B}"/>
+                <a16:creationId xmlns:a16="http://schemas.microsoft.com/office/drawing/2014/main" id="{87008B34-C2F6-48F4-8B97-59DD752CC0DC}"/>
               </a:ext>
             </a:extLst>
           </p:cNvPr>
@@ -19913,7 +19913,7 @@
           <p:cNvPr id="6" name="Keramiekcafé">
             <a:extLst xmlns:a="http://schemas.openxmlformats.org/drawingml/2006/main">
               <a:ext uri="{FF2B5EF4-FFF2-40B4-BE49-F238E27FC236}">
-                <a16:creationId xmlns:a16="http://schemas.microsoft.com/office/drawing/2014/main" id="{1DE656A3-0E01-430B-AB01-2C33E35B8158}"/>
+                <a16:creationId xmlns:a16="http://schemas.microsoft.com/office/drawing/2014/main" id="{EF2DA050-5BF7-48A3-9D29-2B976B31566C}"/>
               </a:ext>
             </a:extLst>
           </p:cNvPr>
@@ -19977,7 +19977,7 @@
         </p:xfrm>
         <a:graphic xmlns:a="http://schemas.openxmlformats.org/drawingml/2006/main">
           <a:graphicData uri="http://schemas.openxmlformats.org/drawingml/2006/chart">
-            <c:chart xmlns:r="http://schemas.openxmlformats.org/officeDocument/2006/relationships" xmlns:c="http://schemas.openxmlformats.org/drawingml/2006/chart" r:id="R3c2417ad00634b5f"/>
+            <c:chart xmlns:r="http://schemas.openxmlformats.org/officeDocument/2006/relationships" xmlns:c="http://schemas.openxmlformats.org/drawingml/2006/chart" r:id="R9b497e1d601546c1"/>
           </a:graphicData>
         </a:graphic>
       </p:graphicFrame>
@@ -19986,7 +19986,7 @@
           <p:cNvPr id="8" name="Prijs: +12,5%        Gevraagde hoeveelheid: −7,5%">
             <a:extLst xmlns:a="http://schemas.openxmlformats.org/drawingml/2006/main">
               <a:ext uri="{FF2B5EF4-FFF2-40B4-BE49-F238E27FC236}">
-                <a16:creationId xmlns:a16="http://schemas.microsoft.com/office/drawing/2014/main" id="{D1E96066-FA6A-4AB2-93B5-3126D5079B2D}"/>
+                <a16:creationId xmlns:a16="http://schemas.microsoft.com/office/drawing/2014/main" id="{FB504027-4592-4AE1-A08F-81CE745F77F9}"/>
               </a:ext>
             </a:extLst>
           </p:cNvPr>
@@ -20041,7 +20041,7 @@
     </p:spTree>
     <p:extLst>
       <p:ext uri="{BB962C8B-B14F-4D97-AF65-F5344CB8AC3E}">
-        <p14:creationId xmlns:p14="http://schemas.microsoft.com/office/powerpoint/2010/main" val="884393189"/>
+        <p14:creationId xmlns:p14="http://schemas.microsoft.com/office/powerpoint/2010/main" val="1678414246"/>
       </p:ext>
     </p:extLst>
   </p:cSld>
@@ -20072,7 +20072,7 @@
           <p:cNvPr id="12" name="Ev: hoeveelheidsreactie gedeeld door prijsverandering">
             <a:extLst xmlns:a="http://schemas.openxmlformats.org/drawingml/2006/main">
               <a:ext uri="{FF2B5EF4-FFF2-40B4-BE49-F238E27FC236}">
-                <a16:creationId xmlns:a16="http://schemas.microsoft.com/office/drawing/2014/main" id="{9F03B412-4733-43C8-ACC2-F75B34E6F033}"/>
+                <a16:creationId xmlns:a16="http://schemas.microsoft.com/office/drawing/2014/main" id="{F4741646-14DF-487D-8D13-D3B4F0EEB5FB}"/>
               </a:ext>
             </a:extLst>
           </p:cNvPr>
@@ -20129,7 +20129,7 @@
           <p:cNvPr id="2" name="">
             <a:extLst xmlns:a="http://schemas.openxmlformats.org/drawingml/2006/main">
               <a:ext uri="{FF2B5EF4-FFF2-40B4-BE49-F238E27FC236}">
-                <a16:creationId xmlns:a16="http://schemas.microsoft.com/office/drawing/2014/main" id="{28C4DC48-8E84-45D9-984F-B89AAB38A889}"/>
+                <a16:creationId xmlns:a16="http://schemas.microsoft.com/office/drawing/2014/main" id="{5D26E800-D42C-4092-B103-FF5976751A3B}"/>
               </a:ext>
             </a:extLst>
           </p:cNvPr>
@@ -20158,7 +20158,7 @@
           <p:cNvPr id="3" name="§2.2.1 Prijselasticiteit">
             <a:extLst xmlns:a="http://schemas.openxmlformats.org/drawingml/2006/main">
               <a:ext uri="{FF2B5EF4-FFF2-40B4-BE49-F238E27FC236}">
-                <a16:creationId xmlns:a16="http://schemas.microsoft.com/office/drawing/2014/main" id="{26D4CBA0-6A9E-496E-9539-0DC25CC87EA7}"/>
+                <a16:creationId xmlns:a16="http://schemas.microsoft.com/office/drawing/2014/main" id="{B842EA1C-4A77-43EA-AB1D-EED82D819C27}"/>
               </a:ext>
             </a:extLst>
           </p:cNvPr>
@@ -20215,7 +20215,7 @@
           <p:cNvPr id="4" name="slide-number">
             <a:extLst xmlns:a="http://schemas.openxmlformats.org/drawingml/2006/main">
               <a:ext uri="{FF2B5EF4-FFF2-40B4-BE49-F238E27FC236}">
-                <a16:creationId xmlns:a16="http://schemas.microsoft.com/office/drawing/2014/main" id="{7C0A4199-4D12-4CC1-A83A-2C159A948C86}"/>
+                <a16:creationId xmlns:a16="http://schemas.microsoft.com/office/drawing/2014/main" id="{B12E122F-4CAD-4D3B-B4F5-B2E8C118B29F}"/>
               </a:ext>
             </a:extLst>
           </p:cNvPr>
@@ -20272,7 +20272,7 @@
           <p:cNvPr id="5" name="Uitlegvoorbeeld — niet uit het boek">
             <a:extLst xmlns:a="http://schemas.openxmlformats.org/drawingml/2006/main">
               <a:ext uri="{FF2B5EF4-FFF2-40B4-BE49-F238E27FC236}">
-                <a16:creationId xmlns:a16="http://schemas.microsoft.com/office/drawing/2014/main" id="{421F499B-DC04-4C4B-AF9D-D121C08DA0D0}"/>
+                <a16:creationId xmlns:a16="http://schemas.microsoft.com/office/drawing/2014/main" id="{27ECCB8C-7177-4DC0-A9A3-C121777BC37A}"/>
               </a:ext>
             </a:extLst>
           </p:cNvPr>
@@ -20329,7 +20329,7 @@
           <p:cNvPr id="6" name="Keramiekcafé">
             <a:extLst xmlns:a="http://schemas.openxmlformats.org/drawingml/2006/main">
               <a:ext uri="{FF2B5EF4-FFF2-40B4-BE49-F238E27FC236}">
-                <a16:creationId xmlns:a16="http://schemas.microsoft.com/office/drawing/2014/main" id="{5B080106-56B1-486D-856D-5577B2CCD23C}"/>
+                <a16:creationId xmlns:a16="http://schemas.microsoft.com/office/drawing/2014/main" id="{C01122AD-5ADE-465B-9423-6E129422BE31}"/>
               </a:ext>
             </a:extLst>
           </p:cNvPr>
@@ -20386,7 +20386,7 @@
           <p:cNvPr id="7" name="Ev = %ΔQv / %ΔP">
             <a:extLst xmlns:a="http://schemas.openxmlformats.org/drawingml/2006/main">
               <a:ext uri="{FF2B5EF4-FFF2-40B4-BE49-F238E27FC236}">
-                <a16:creationId xmlns:a16="http://schemas.microsoft.com/office/drawing/2014/main" id="{18FE7A5A-5AEA-4A69-BFDD-DBF56A0A850F}"/>
+                <a16:creationId xmlns:a16="http://schemas.microsoft.com/office/drawing/2014/main" id="{04300866-C0AA-4DB3-B9FD-6C4DBCDA7139}"/>
               </a:ext>
             </a:extLst>
           </p:cNvPr>
@@ -20443,7 +20443,7 @@
           <p:cNvPr id="8" name="Ev = −7,5% / +12,5% = −0,6">
             <a:extLst xmlns:a="http://schemas.openxmlformats.org/drawingml/2006/main">
               <a:ext uri="{FF2B5EF4-FFF2-40B4-BE49-F238E27FC236}">
-                <a16:creationId xmlns:a16="http://schemas.microsoft.com/office/drawing/2014/main" id="{6EA2D8BA-B84E-43D1-9515-2C921A9EE28E}"/>
+                <a16:creationId xmlns:a16="http://schemas.microsoft.com/office/drawing/2014/main" id="{D19325C4-7C68-4E32-9500-0E8197608714}"/>
               </a:ext>
             </a:extLst>
           </p:cNvPr>
@@ -20500,7 +20500,7 @@
           <p:cNvPr id="9" name="">
             <a:extLst xmlns:a="http://schemas.openxmlformats.org/drawingml/2006/main">
               <a:ext uri="{FF2B5EF4-FFF2-40B4-BE49-F238E27FC236}">
-                <a16:creationId xmlns:a16="http://schemas.microsoft.com/office/drawing/2014/main" id="{8721E502-07E6-4B10-9E8F-667C9A03888C}"/>
+                <a16:creationId xmlns:a16="http://schemas.microsoft.com/office/drawing/2014/main" id="{34F52857-AE03-47FD-94F1-DF7F0FC0F127}"/>
               </a:ext>
             </a:extLst>
           </p:cNvPr>
@@ -20529,7 +20529,7 @@
           <p:cNvPr id="10" name="De hoeveelheidsdaling is 0,6 maal de prijsstijging, in ">
             <a:extLst xmlns:a="http://schemas.openxmlformats.org/drawingml/2006/main">
               <a:ext uri="{FF2B5EF4-FFF2-40B4-BE49-F238E27FC236}">
-                <a16:creationId xmlns:a16="http://schemas.microsoft.com/office/drawing/2014/main" id="{AC28F3AB-A3D7-442A-8544-9BD8E374BC3A}"/>
+                <a16:creationId xmlns:a16="http://schemas.microsoft.com/office/drawing/2014/main" id="{6141BAEA-724F-481C-B1CC-C67BD2B3A8E6}"/>
               </a:ext>
             </a:extLst>
           </p:cNvPr>
@@ -20586,7 +20586,7 @@
           <p:cNvPr id="11" name="Ev heeft geen eenheid en geen procentteken.">
             <a:extLst xmlns:a="http://schemas.openxmlformats.org/drawingml/2006/main">
               <a:ext uri="{FF2B5EF4-FFF2-40B4-BE49-F238E27FC236}">
-                <a16:creationId xmlns:a16="http://schemas.microsoft.com/office/drawing/2014/main" id="{995BB666-1591-4C12-8D8A-4CEC845E2E5D}"/>
+                <a16:creationId xmlns:a16="http://schemas.microsoft.com/office/drawing/2014/main" id="{00A52ACB-34A6-43C8-BCAF-36F15EE4AAF2}"/>
               </a:ext>
             </a:extLst>
           </p:cNvPr>
@@ -20641,7 +20641,7 @@
     </p:spTree>
     <p:extLst>
       <p:ext uri="{BB962C8B-B14F-4D97-AF65-F5344CB8AC3E}">
-        <p14:creationId xmlns:p14="http://schemas.microsoft.com/office/powerpoint/2010/main" val="1632728794"/>
+        <p14:creationId xmlns:p14="http://schemas.microsoft.com/office/powerpoint/2010/main" val="1654026695"/>
       </p:ext>
     </p:extLst>
   </p:cSld>
@@ -20672,7 +20672,7 @@
           <p:cNvPr id="7" name="De vraag indelen met Ev">
             <a:extLst xmlns:a="http://schemas.openxmlformats.org/drawingml/2006/main">
               <a:ext uri="{FF2B5EF4-FFF2-40B4-BE49-F238E27FC236}">
-                <a16:creationId xmlns:a16="http://schemas.microsoft.com/office/drawing/2014/main" id="{A710001A-0869-4D26-862E-870D4DEBD3AF}"/>
+                <a16:creationId xmlns:a16="http://schemas.microsoft.com/office/drawing/2014/main" id="{2186556E-9A6E-4394-BDC1-0240CDEE1512}"/>
               </a:ext>
             </a:extLst>
           </p:cNvPr>
@@ -20729,7 +20729,7 @@
           <p:cNvPr id="2" name="">
             <a:extLst xmlns:a="http://schemas.openxmlformats.org/drawingml/2006/main">
               <a:ext uri="{FF2B5EF4-FFF2-40B4-BE49-F238E27FC236}">
-                <a16:creationId xmlns:a16="http://schemas.microsoft.com/office/drawing/2014/main" id="{D30B3DFE-EA24-407D-99F2-4BD546DBC5C8}"/>
+                <a16:creationId xmlns:a16="http://schemas.microsoft.com/office/drawing/2014/main" id="{87D5224D-B188-4C34-9995-63714AF2FC18}"/>
               </a:ext>
             </a:extLst>
           </p:cNvPr>
@@ -20758,7 +20758,7 @@
           <p:cNvPr id="3" name="§2.2.1 Prijselasticiteit">
             <a:extLst xmlns:a="http://schemas.openxmlformats.org/drawingml/2006/main">
               <a:ext uri="{FF2B5EF4-FFF2-40B4-BE49-F238E27FC236}">
-                <a16:creationId xmlns:a16="http://schemas.microsoft.com/office/drawing/2014/main" id="{DDE6A55F-B648-4CAA-BFAA-4BCF5E0E5C40}"/>
+                <a16:creationId xmlns:a16="http://schemas.microsoft.com/office/drawing/2014/main" id="{A624D358-2FB1-4E2C-8F66-789E3D5F4215}"/>
               </a:ext>
             </a:extLst>
           </p:cNvPr>
@@ -20815,7 +20815,7 @@
           <p:cNvPr id="4" name="slide-number">
             <a:extLst xmlns:a="http://schemas.openxmlformats.org/drawingml/2006/main">
               <a:ext uri="{FF2B5EF4-FFF2-40B4-BE49-F238E27FC236}">
-                <a16:creationId xmlns:a16="http://schemas.microsoft.com/office/drawing/2014/main" id="{8B16BD7F-F6E5-47B9-B7E3-8684C6F1D0C0}"/>
+                <a16:creationId xmlns:a16="http://schemas.microsoft.com/office/drawing/2014/main" id="{55F359B7-A037-4D83-A632-5F6F87E0522E}"/>
               </a:ext>
             </a:extLst>
           </p:cNvPr>
@@ -21265,7 +21265,7 @@
           <p:cNvPr id="6" name="−1 &lt; −0,6 &lt; 0: prijsinelastisch">
             <a:extLst xmlns:a="http://schemas.openxmlformats.org/drawingml/2006/main">
               <a:ext uri="{FF2B5EF4-FFF2-40B4-BE49-F238E27FC236}">
-                <a16:creationId xmlns:a16="http://schemas.microsoft.com/office/drawing/2014/main" id="{B42B331C-8E85-4AD4-8472-99DAA74B4788}"/>
+                <a16:creationId xmlns:a16="http://schemas.microsoft.com/office/drawing/2014/main" id="{22B4ADD8-1050-40FD-9E8A-5C33D9C39488}"/>
               </a:ext>
             </a:extLst>
           </p:cNvPr>
@@ -21320,7 +21320,7 @@
     </p:spTree>
     <p:extLst>
       <p:ext uri="{BB962C8B-B14F-4D97-AF65-F5344CB8AC3E}">
-        <p14:creationId xmlns:p14="http://schemas.microsoft.com/office/powerpoint/2010/main" val="1628630377"/>
+        <p14:creationId xmlns:p14="http://schemas.microsoft.com/office/powerpoint/2010/main" val="432592702"/>
       </p:ext>
     </p:extLst>
   </p:cSld>
@@ -21351,7 +21351,7 @@
           <p:cNvPr id="10" name="Prijsgevoeligheid vergelijken">
             <a:extLst xmlns:a="http://schemas.openxmlformats.org/drawingml/2006/main">
               <a:ext uri="{FF2B5EF4-FFF2-40B4-BE49-F238E27FC236}">
-                <a16:creationId xmlns:a16="http://schemas.microsoft.com/office/drawing/2014/main" id="{F52D7762-6D75-4947-85E4-33ED0FA93302}"/>
+                <a16:creationId xmlns:a16="http://schemas.microsoft.com/office/drawing/2014/main" id="{E0D60458-08D4-4249-96DF-191526541268}"/>
               </a:ext>
             </a:extLst>
           </p:cNvPr>
@@ -21408,7 +21408,7 @@
           <p:cNvPr id="2" name="">
             <a:extLst xmlns:a="http://schemas.openxmlformats.org/drawingml/2006/main">
               <a:ext uri="{FF2B5EF4-FFF2-40B4-BE49-F238E27FC236}">
-                <a16:creationId xmlns:a16="http://schemas.microsoft.com/office/drawing/2014/main" id="{73BACAF9-DC07-44E3-AFE0-C157D62B55DD}"/>
+                <a16:creationId xmlns:a16="http://schemas.microsoft.com/office/drawing/2014/main" id="{40EF3FBE-3944-4E10-AE45-59D4D713C48F}"/>
               </a:ext>
             </a:extLst>
           </p:cNvPr>
@@ -21437,7 +21437,7 @@
           <p:cNvPr id="3" name="§2.2.1 Prijselasticiteit">
             <a:extLst xmlns:a="http://schemas.openxmlformats.org/drawingml/2006/main">
               <a:ext uri="{FF2B5EF4-FFF2-40B4-BE49-F238E27FC236}">
-                <a16:creationId xmlns:a16="http://schemas.microsoft.com/office/drawing/2014/main" id="{5EE3605D-FD54-49A2-981C-3EBE203163BC}"/>
+                <a16:creationId xmlns:a16="http://schemas.microsoft.com/office/drawing/2014/main" id="{A3F0023A-0B1D-4876-9F18-4D4DE0298F09}"/>
               </a:ext>
             </a:extLst>
           </p:cNvPr>
@@ -21494,7 +21494,7 @@
           <p:cNvPr id="4" name="slide-number">
             <a:extLst xmlns:a="http://schemas.openxmlformats.org/drawingml/2006/main">
               <a:ext uri="{FF2B5EF4-FFF2-40B4-BE49-F238E27FC236}">
-                <a16:creationId xmlns:a16="http://schemas.microsoft.com/office/drawing/2014/main" id="{04577E84-010F-4A21-92FF-B4965FE41410}"/>
+                <a16:creationId xmlns:a16="http://schemas.microsoft.com/office/drawing/2014/main" id="{E0E1CD7D-6518-4D11-946B-5F5BF92A1905}"/>
               </a:ext>
             </a:extLst>
           </p:cNvPr>
@@ -21551,7 +21551,7 @@
           <p:cNvPr id="5" name="Uitlegvoorbeeld — niet uit het boek">
             <a:extLst xmlns:a="http://schemas.openxmlformats.org/drawingml/2006/main">
               <a:ext uri="{FF2B5EF4-FFF2-40B4-BE49-F238E27FC236}">
-                <a16:creationId xmlns:a16="http://schemas.microsoft.com/office/drawing/2014/main" id="{E206B103-965E-4BC8-9059-9B87343665F5}"/>
+                <a16:creationId xmlns:a16="http://schemas.microsoft.com/office/drawing/2014/main" id="{3153E780-31F4-4D17-8470-A45BD10F1C24}"/>
               </a:ext>
             </a:extLst>
           </p:cNvPr>
@@ -21608,7 +21608,7 @@
           <p:cNvPr id="6" name="Keramiekcafé en Fotoworkshop">
             <a:extLst xmlns:a="http://schemas.openxmlformats.org/drawingml/2006/main">
               <a:ext uri="{FF2B5EF4-FFF2-40B4-BE49-F238E27FC236}">
-                <a16:creationId xmlns:a16="http://schemas.microsoft.com/office/drawing/2014/main" id="{7DE54C43-2489-4562-BFDE-02C4F782BE76}"/>
+                <a16:creationId xmlns:a16="http://schemas.microsoft.com/office/drawing/2014/main" id="{AD2EDD6B-A194-4A61-8B10-5DF54A277E3E}"/>
               </a:ext>
             </a:extLst>
           </p:cNvPr>
@@ -21983,7 +21983,7 @@
           <p:cNvPr id="8" name="Bij Fotoworkshop reageert Qv procentueel sterker op P.">
             <a:extLst xmlns:a="http://schemas.openxmlformats.org/drawingml/2006/main">
               <a:ext uri="{FF2B5EF4-FFF2-40B4-BE49-F238E27FC236}">
-                <a16:creationId xmlns:a16="http://schemas.microsoft.com/office/drawing/2014/main" id="{331E5053-23FE-49CC-B5A6-8B2A6F943873}"/>
+                <a16:creationId xmlns:a16="http://schemas.microsoft.com/office/drawing/2014/main" id="{2236D613-7280-4983-9031-F55651405D00}"/>
               </a:ext>
             </a:extLst>
           </p:cNvPr>
@@ -22040,7 +22040,7 @@
           <p:cNvPr id="9" name="Gemiddeld per 1% prijsstijging: 1,8% tegenover 0,6% dal">
             <a:extLst xmlns:a="http://schemas.openxmlformats.org/drawingml/2006/main">
               <a:ext uri="{FF2B5EF4-FFF2-40B4-BE49-F238E27FC236}">
-                <a16:creationId xmlns:a16="http://schemas.microsoft.com/office/drawing/2014/main" id="{EA1A4C95-D007-494D-840E-E0F90B60DB86}"/>
+                <a16:creationId xmlns:a16="http://schemas.microsoft.com/office/drawing/2014/main" id="{01819309-6BB4-4B79-AC53-3BE78FC78BB9}"/>
               </a:ext>
             </a:extLst>
           </p:cNvPr>
@@ -22095,7 +22095,7 @@
     </p:spTree>
     <p:extLst>
       <p:ext uri="{BB962C8B-B14F-4D97-AF65-F5344CB8AC3E}">
-        <p14:creationId xmlns:p14="http://schemas.microsoft.com/office/powerpoint/2010/main" val="1749979087"/>
+        <p14:creationId xmlns:p14="http://schemas.microsoft.com/office/powerpoint/2010/main" val="1247797089"/>
       </p:ext>
     </p:extLst>
   </p:cSld>
@@ -22126,7 +22126,7 @@
           <p:cNvPr id="13" name="Een mogelijke verklaring voor het verschil">
             <a:extLst xmlns:a="http://schemas.openxmlformats.org/drawingml/2006/main">
               <a:ext uri="{FF2B5EF4-FFF2-40B4-BE49-F238E27FC236}">
-                <a16:creationId xmlns:a16="http://schemas.microsoft.com/office/drawing/2014/main" id="{E2EFBD7D-51FC-4DD8-A1C1-81A6DA2A6D67}"/>
+                <a16:creationId xmlns:a16="http://schemas.microsoft.com/office/drawing/2014/main" id="{C993523B-5A0D-4BF8-83AB-5963F7BC1DB1}"/>
               </a:ext>
             </a:extLst>
           </p:cNvPr>
@@ -22183,7 +22183,7 @@
           <p:cNvPr id="2" name="">
             <a:extLst xmlns:a="http://schemas.openxmlformats.org/drawingml/2006/main">
               <a:ext uri="{FF2B5EF4-FFF2-40B4-BE49-F238E27FC236}">
-                <a16:creationId xmlns:a16="http://schemas.microsoft.com/office/drawing/2014/main" id="{F8A63FF3-01AC-429E-AE26-1D9A71E0428E}"/>
+                <a16:creationId xmlns:a16="http://schemas.microsoft.com/office/drawing/2014/main" id="{64695217-CB09-4D4B-87B0-2ADFBB86D481}"/>
               </a:ext>
             </a:extLst>
           </p:cNvPr>
@@ -22212,7 +22212,7 @@
           <p:cNvPr id="3" name="§2.2.1 Prijselasticiteit">
             <a:extLst xmlns:a="http://schemas.openxmlformats.org/drawingml/2006/main">
               <a:ext uri="{FF2B5EF4-FFF2-40B4-BE49-F238E27FC236}">
-                <a16:creationId xmlns:a16="http://schemas.microsoft.com/office/drawing/2014/main" id="{5092FAB1-FE92-45C1-ABF0-F88F65E9D589}"/>
+                <a16:creationId xmlns:a16="http://schemas.microsoft.com/office/drawing/2014/main" id="{72F798CA-5187-43C6-AB07-3B838D70658B}"/>
               </a:ext>
             </a:extLst>
           </p:cNvPr>
@@ -22269,7 +22269,7 @@
           <p:cNvPr id="4" name="slide-number">
             <a:extLst xmlns:a="http://schemas.openxmlformats.org/drawingml/2006/main">
               <a:ext uri="{FF2B5EF4-FFF2-40B4-BE49-F238E27FC236}">
-                <a16:creationId xmlns:a16="http://schemas.microsoft.com/office/drawing/2014/main" id="{E2425289-F8BB-4285-82EE-34FB7566DE15}"/>
+                <a16:creationId xmlns:a16="http://schemas.microsoft.com/office/drawing/2014/main" id="{74C972AC-F724-4F6B-AF1B-AB114CC2EB9B}"/>
               </a:ext>
             </a:extLst>
           </p:cNvPr>
@@ -22326,7 +22326,7 @@
           <p:cNvPr id="5" name="Uitlegvoorbeeld — niet uit het boek">
             <a:extLst xmlns:a="http://schemas.openxmlformats.org/drawingml/2006/main">
               <a:ext uri="{FF2B5EF4-FFF2-40B4-BE49-F238E27FC236}">
-                <a16:creationId xmlns:a16="http://schemas.microsoft.com/office/drawing/2014/main" id="{0ECAD878-6FA5-49FF-8323-13142F0CFCE1}"/>
+                <a16:creationId xmlns:a16="http://schemas.microsoft.com/office/drawing/2014/main" id="{8D23D1B4-AF55-49B7-80B4-B375751C1AF8}"/>
               </a:ext>
             </a:extLst>
           </p:cNvPr>
@@ -22383,7 +22383,7 @@
           <p:cNvPr id="6" name="Fotoworkshop: Ev = −1,8 · Keramiekcafé: Ev = −0,6">
             <a:extLst xmlns:a="http://schemas.openxmlformats.org/drawingml/2006/main">
               <a:ext uri="{FF2B5EF4-FFF2-40B4-BE49-F238E27FC236}">
-                <a16:creationId xmlns:a16="http://schemas.microsoft.com/office/drawing/2014/main" id="{0B0F6EE2-A948-4359-ACB0-2944BD00576F}"/>
+                <a16:creationId xmlns:a16="http://schemas.microsoft.com/office/drawing/2014/main" id="{714794B7-43FE-4110-9766-72B45D0D89AA}"/>
               </a:ext>
             </a:extLst>
           </p:cNvPr>
@@ -22440,7 +22440,7 @@
           <p:cNvPr id="7" name="Mogelijke reden">
             <a:extLst xmlns:a="http://schemas.openxmlformats.org/drawingml/2006/main">
               <a:ext uri="{FF2B5EF4-FFF2-40B4-BE49-F238E27FC236}">
-                <a16:creationId xmlns:a16="http://schemas.microsoft.com/office/drawing/2014/main" id="{80A1BA13-AC0F-4E5E-AF50-C304A42349CD}"/>
+                <a16:creationId xmlns:a16="http://schemas.microsoft.com/office/drawing/2014/main" id="{34C3BBC5-4D4B-47B2-85D2-6D732E91E5A6}"/>
               </a:ext>
             </a:extLst>
           </p:cNvPr>
@@ -22497,7 +22497,7 @@
           <p:cNvPr id="8" name="Bij Fotoworkshop is een ander uitje&#10;mogelijk makkelijke">
             <a:extLst xmlns:a="http://schemas.openxmlformats.org/drawingml/2006/main">
               <a:ext uri="{FF2B5EF4-FFF2-40B4-BE49-F238E27FC236}">
-                <a16:creationId xmlns:a16="http://schemas.microsoft.com/office/drawing/2014/main" id="{ECAAAFE7-2F3B-4A4B-A705-C0E749ED3A7B}"/>
+                <a16:creationId xmlns:a16="http://schemas.microsoft.com/office/drawing/2014/main" id="{E8E23D4A-D92D-4343-8D8D-4A011137C457}"/>
               </a:ext>
             </a:extLst>
           </p:cNvPr>
@@ -22577,7 +22577,7 @@
           <p:cNvPr id="9" name="">
             <a:extLst xmlns:a="http://schemas.openxmlformats.org/drawingml/2006/main">
               <a:ext uri="{FF2B5EF4-FFF2-40B4-BE49-F238E27FC236}">
-                <a16:creationId xmlns:a16="http://schemas.microsoft.com/office/drawing/2014/main" id="{29C3EB08-2EFE-4E83-80A1-CE21CE932343}"/>
+                <a16:creationId xmlns:a16="http://schemas.microsoft.com/office/drawing/2014/main" id="{85F4E88C-597F-4A96-B21B-33E6FA6EA96B}"/>
               </a:ext>
             </a:extLst>
           </p:cNvPr>
@@ -22606,7 +22606,7 @@
           <p:cNvPr id="10" name="Economische redenering">
             <a:extLst xmlns:a="http://schemas.openxmlformats.org/drawingml/2006/main">
               <a:ext uri="{FF2B5EF4-FFF2-40B4-BE49-F238E27FC236}">
-                <a16:creationId xmlns:a16="http://schemas.microsoft.com/office/drawing/2014/main" id="{7881A0C7-582C-4750-ADEA-0E9C319CA36B}"/>
+                <a16:creationId xmlns:a16="http://schemas.microsoft.com/office/drawing/2014/main" id="{DCC06FF2-ED45-4485-BAF0-D7A72A5BBDC0}"/>
               </a:ext>
             </a:extLst>
           </p:cNvPr>
@@ -22663,7 +22663,7 @@
           <p:cNvPr id="11" name="Meer uitwijkmogelijkheden kunnen de procentuele&#10;hoeveel">
             <a:extLst xmlns:a="http://schemas.openxmlformats.org/drawingml/2006/main">
               <a:ext uri="{FF2B5EF4-FFF2-40B4-BE49-F238E27FC236}">
-                <a16:creationId xmlns:a16="http://schemas.microsoft.com/office/drawing/2014/main" id="{65E156F8-9CC1-49C4-9AD0-3C759E1117F2}"/>
+                <a16:creationId xmlns:a16="http://schemas.microsoft.com/office/drawing/2014/main" id="{8FA39DAC-FF9C-4572-A6DE-66D042706973}"/>
               </a:ext>
             </a:extLst>
           </p:cNvPr>
@@ -22743,7 +22743,7 @@
           <p:cNvPr id="12" name="De elasticiteiten alleen bewijzen deze oorzaak niet.">
             <a:extLst xmlns:a="http://schemas.openxmlformats.org/drawingml/2006/main">
               <a:ext uri="{FF2B5EF4-FFF2-40B4-BE49-F238E27FC236}">
-                <a16:creationId xmlns:a16="http://schemas.microsoft.com/office/drawing/2014/main" id="{11861506-470A-45B2-9BCD-6F68E5158499}"/>
+                <a16:creationId xmlns:a16="http://schemas.microsoft.com/office/drawing/2014/main" id="{173098EB-D32C-4328-A13C-3D12A461955B}"/>
               </a:ext>
             </a:extLst>
           </p:cNvPr>
@@ -22798,7 +22798,7 @@
     </p:spTree>
     <p:extLst>
       <p:ext uri="{BB962C8B-B14F-4D97-AF65-F5344CB8AC3E}">
-        <p14:creationId xmlns:p14="http://schemas.microsoft.com/office/powerpoint/2010/main" val="995997027"/>
+        <p14:creationId xmlns:p14="http://schemas.microsoft.com/office/powerpoint/2010/main" val="1336847159"/>
       </p:ext>
     </p:extLst>
   </p:cSld>
